--- a/docs/pptx/auc3/jx-auc3-linsubhr-sens-throm2.pptx
+++ b/docs/pptx/auc3/jx-auc3-linsubhr-sens-throm2.pptx
@@ -5339,7 +5339,7 @@
           <p:spPr>
             <a:xfrm>
               <a:off x="817517" y="1896563"/>
-              <a:ext cx="6169365" cy="82021"/>
+              <a:ext cx="6833128" cy="82021"/>
             </a:xfrm>
             <a:prstGeom prst="rect">
               <a:avLst/>
@@ -5371,7 +5371,7 @@
                   <a:latin typeface="Helvetica"/>
                   <a:cs typeface="Helvetica"/>
                 </a:rPr>
-                <a:t>subHR per 0.1 ratio decline: 1.17 (0.92-1.48), p = 0.208  |  per IQR decline (Δ = 0.28): 1.54 (0.79-3.03)  |  IQR: [0.70, 0.98]</a:t>
+                <a:t>subHR per 0.1 ratio decline: 1.17 (0.92-1.48), p_Bonf = 1.000 (n = 6)  |  per IQR decline (Δ = 0.28): 1.54 (0.79-3.03)  |  IQR: [0.70, 0.98]</a:t>
               </a:r>
             </a:p>
           </p:txBody>

--- a/docs/pptx/auc3/jx-auc3-linsubhr-sens-throm2.pptx
+++ b/docs/pptx/auc3/jx-auc3-linsubhr-sens-throm2.pptx
@@ -5062,8 +5062,8 @@
           </p:nvSpPr>
           <p:spPr>
             <a:xfrm>
-              <a:off x="2137719" y="5785772"/>
-              <a:ext cx="155356" cy="80101"/>
+              <a:off x="2134610" y="5785772"/>
+              <a:ext cx="161574" cy="80101"/>
             </a:xfrm>
             <a:prstGeom prst="rect">
               <a:avLst/>
@@ -5095,7 +5095,7 @@
                   <a:latin typeface="Helvetica"/>
                   <a:cs typeface="Helvetica"/>
                 </a:rPr>
-                <a:t>0.6</a:t>
+                <a:t>-40</a:t>
               </a:r>
             </a:p>
           </p:txBody>
@@ -5108,8 +5108,8 @@
           </p:nvSpPr>
           <p:spPr>
             <a:xfrm>
-              <a:off x="3878840" y="5785772"/>
-              <a:ext cx="155356" cy="80101"/>
+              <a:off x="3875731" y="5785772"/>
+              <a:ext cx="161574" cy="80101"/>
             </a:xfrm>
             <a:prstGeom prst="rect">
               <a:avLst/>
@@ -5141,7 +5141,7 @@
                   <a:latin typeface="Helvetica"/>
                   <a:cs typeface="Helvetica"/>
                 </a:rPr>
-                <a:t>0.8</a:t>
+                <a:t>-20</a:t>
               </a:r>
             </a:p>
           </p:txBody>
@@ -5154,8 +5154,8 @@
           </p:nvSpPr>
           <p:spPr>
             <a:xfrm>
-              <a:off x="5619961" y="5785772"/>
-              <a:ext cx="155356" cy="80101"/>
+              <a:off x="5666549" y="5785772"/>
+              <a:ext cx="62179" cy="80101"/>
             </a:xfrm>
             <a:prstGeom prst="rect">
               <a:avLst/>
@@ -5187,7 +5187,7 @@
                   <a:latin typeface="Helvetica"/>
                   <a:cs typeface="Helvetica"/>
                 </a:rPr>
-                <a:t>1.0</a:t>
+                <a:t>0</a:t>
               </a:r>
             </a:p>
           </p:txBody>
@@ -5200,8 +5200,8 @@
           </p:nvSpPr>
           <p:spPr>
             <a:xfrm>
-              <a:off x="7361081" y="5785772"/>
-              <a:ext cx="155356" cy="80101"/>
+              <a:off x="7376580" y="5785772"/>
+              <a:ext cx="124358" cy="80101"/>
             </a:xfrm>
             <a:prstGeom prst="rect">
               <a:avLst/>
@@ -5233,7 +5233,7 @@
                   <a:latin typeface="Helvetica"/>
                   <a:cs typeface="Helvetica"/>
                 </a:rPr>
-                <a:t>1.2</a:t>
+                <a:t>20</a:t>
               </a:r>
             </a:p>
           </p:txBody>
@@ -5246,8 +5246,8 @@
           </p:nvSpPr>
           <p:spPr>
             <a:xfrm>
-              <a:off x="2691419" y="5925448"/>
-              <a:ext cx="4051889" cy="100218"/>
+              <a:off x="1561815" y="5925448"/>
+              <a:ext cx="6311097" cy="100218"/>
             </a:xfrm>
             <a:prstGeom prst="rect">
               <a:avLst/>
@@ -5279,7 +5279,7 @@
                   <a:latin typeface="Helvetica"/>
                   <a:cs typeface="Helvetica"/>
                 </a:rPr>
-                <a:t>Sensitivity eGFR Ratio (CKD-EPI 2012 CysC / CKD-EPI 2021 Cr)</a:t>
+                <a:t>Sensitivity eGFR Difference (%): 100 × (CKD-EPI 2012 CysC − CKD-EPI 2021 Cr) / CKD-EPI 2021 Cr</a:t>
               </a:r>
             </a:p>
           </p:txBody>
@@ -5339,7 +5339,7 @@
           <p:spPr>
             <a:xfrm>
               <a:off x="817517" y="1896563"/>
-              <a:ext cx="6833128" cy="82021"/>
+              <a:ext cx="6959864" cy="82021"/>
             </a:xfrm>
             <a:prstGeom prst="rect">
               <a:avLst/>
@@ -5371,7 +5371,7 @@
                   <a:latin typeface="Helvetica"/>
                   <a:cs typeface="Helvetica"/>
                 </a:rPr>
-                <a:t>subHR per 0.1 ratio decline: 1.17 (0.92-1.48), p_Bonf = 1.000 (n = 6)  |  per IQR decline (Δ = 0.28): 1.54 (0.79-3.03)  |  IQR: [0.70, 0.98]</a:t>
+                <a:t>subHR per 10 % decline: 1.17 (0.92-1.48), p_Bonf = 1.000 (n = 6)  |  per IQR decline (Δ = 28.1 %): 1.54 (0.79-3.03)  |  IQR: [-30.1, -2.1] %</a:t>
               </a:r>
             </a:p>
           </p:txBody>

--- a/docs/pptx/auc3/jx-auc3-linsubhr-sens-throm2.pptx
+++ b/docs/pptx/auc3/jx-auc3-linsubhr-sens-throm2.pptx
@@ -2265,34 +2265,26 @@
         </p:sp>
         <p:sp>
           <p:nvSpPr>
-            <p:cNvPr id="4" name="pl4"/>
+            <p:cNvPr id="4" name="rc4"/>
             <p:cNvSpPr/>
             <p:nvPr/>
           </p:nvSpPr>
           <p:spPr>
             <a:xfrm>
-              <a:off x="817517" y="5142518"/>
-              <a:ext cx="7799693" cy="0"/>
+              <a:off x="457200" y="1600200"/>
+              <a:ext cx="8229600" cy="4525962"/>
             </a:xfrm>
-            <a:custGeom>
+            <a:prstGeom prst="rect">
               <a:avLst/>
-              <a:pathLst>
-                <a:path w="7799693" h="0">
-                  <a:moveTo>
-                    <a:pt x="0" y="0"/>
-                  </a:moveTo>
-                  <a:lnTo>
-                    <a:pt x="7799693" y="0"/>
-                  </a:lnTo>
-                  <a:lnTo>
-                    <a:pt x="7799693" y="0"/>
-                  </a:lnTo>
-                </a:path>
-              </a:pathLst>
-            </a:custGeom>
-            <a:ln w="6775" cap="flat">
+            </a:prstGeom>
+            <a:solidFill>
+              <a:srgbClr val="FFFFFF">
+                <a:alpha val="100000"/>
+              </a:srgbClr>
+            </a:solidFill>
+            <a:ln w="13550" cap="rnd">
               <a:solidFill>
-                <a:srgbClr val="EBEBEB">
+                <a:srgbClr val="FFFFFF">
                   <a:alpha val="100000"/>
                 </a:srgbClr>
               </a:solidFill>
@@ -2314,21 +2306,21 @@
           </p:nvSpPr>
           <p:spPr>
             <a:xfrm>
-              <a:off x="817517" y="4313054"/>
-              <a:ext cx="7799693" cy="0"/>
+              <a:off x="887106" y="3250627"/>
+              <a:ext cx="7660515" cy="0"/>
             </a:xfrm>
             <a:custGeom>
               <a:avLst/>
               <a:pathLst>
-                <a:path w="7799693" h="0">
+                <a:path w="7660515" h="0">
                   <a:moveTo>
                     <a:pt x="0" y="0"/>
                   </a:moveTo>
                   <a:lnTo>
-                    <a:pt x="7799693" y="0"/>
-                  </a:lnTo>
-                  <a:lnTo>
-                    <a:pt x="7799693" y="0"/>
+                    <a:pt x="7660515" y="0"/>
+                  </a:lnTo>
+                  <a:lnTo>
+                    <a:pt x="7660515" y="0"/>
                   </a:lnTo>
                 </a:path>
               </a:pathLst>
@@ -2357,21 +2349,21 @@
           </p:nvSpPr>
           <p:spPr>
             <a:xfrm>
-              <a:off x="817517" y="3483591"/>
-              <a:ext cx="7799693" cy="0"/>
+              <a:off x="887106" y="2951293"/>
+              <a:ext cx="7660515" cy="0"/>
             </a:xfrm>
             <a:custGeom>
               <a:avLst/>
               <a:pathLst>
-                <a:path w="7799693" h="0">
+                <a:path w="7660515" h="0">
                   <a:moveTo>
                     <a:pt x="0" y="0"/>
                   </a:moveTo>
                   <a:lnTo>
-                    <a:pt x="7799693" y="0"/>
-                  </a:lnTo>
-                  <a:lnTo>
-                    <a:pt x="7799693" y="0"/>
+                    <a:pt x="7660515" y="0"/>
+                  </a:lnTo>
+                  <a:lnTo>
+                    <a:pt x="7660515" y="0"/>
                   </a:lnTo>
                 </a:path>
               </a:pathLst>
@@ -2400,21 +2392,21 @@
           </p:nvSpPr>
           <p:spPr>
             <a:xfrm>
-              <a:off x="817517" y="2654127"/>
-              <a:ext cx="7799693" cy="0"/>
+              <a:off x="887106" y="2651959"/>
+              <a:ext cx="7660515" cy="0"/>
             </a:xfrm>
             <a:custGeom>
               <a:avLst/>
               <a:pathLst>
-                <a:path w="7799693" h="0">
+                <a:path w="7660515" h="0">
                   <a:moveTo>
                     <a:pt x="0" y="0"/>
                   </a:moveTo>
                   <a:lnTo>
-                    <a:pt x="7799693" y="0"/>
-                  </a:lnTo>
-                  <a:lnTo>
-                    <a:pt x="7799693" y="0"/>
+                    <a:pt x="7660515" y="0"/>
+                  </a:lnTo>
+                  <a:lnTo>
+                    <a:pt x="7660515" y="0"/>
                   </a:lnTo>
                 </a:path>
               </a:pathLst>
@@ -2443,21 +2435,21 @@
           </p:nvSpPr>
           <p:spPr>
             <a:xfrm>
-              <a:off x="1344837" y="2073503"/>
-              <a:ext cx="0" cy="3649639"/>
+              <a:off x="887106" y="2352625"/>
+              <a:ext cx="7660515" cy="0"/>
             </a:xfrm>
             <a:custGeom>
               <a:avLst/>
               <a:pathLst>
-                <a:path w="0" h="3649639">
+                <a:path w="7660515" h="0">
                   <a:moveTo>
-                    <a:pt x="0" y="3649639"/>
+                    <a:pt x="0" y="0"/>
                   </a:moveTo>
                   <a:lnTo>
-                    <a:pt x="0" y="0"/>
-                  </a:lnTo>
-                  <a:lnTo>
-                    <a:pt x="0" y="0"/>
+                    <a:pt x="7660515" y="0"/>
+                  </a:lnTo>
+                  <a:lnTo>
+                    <a:pt x="7660515" y="0"/>
                   </a:lnTo>
                 </a:path>
               </a:pathLst>
@@ -2486,15 +2478,15 @@
           </p:nvSpPr>
           <p:spPr>
             <a:xfrm>
-              <a:off x="3085958" y="2073503"/>
-              <a:ext cx="0" cy="3649639"/>
+              <a:off x="1405017" y="2143092"/>
+              <a:ext cx="0" cy="1317069"/>
             </a:xfrm>
             <a:custGeom>
               <a:avLst/>
               <a:pathLst>
-                <a:path w="0" h="3649639">
+                <a:path w="0" h="1317069">
                   <a:moveTo>
-                    <a:pt x="0" y="3649639"/>
+                    <a:pt x="0" y="1317069"/>
                   </a:moveTo>
                   <a:lnTo>
                     <a:pt x="0" y="0"/>
@@ -2529,15 +2521,15 @@
           </p:nvSpPr>
           <p:spPr>
             <a:xfrm>
-              <a:off x="4827079" y="2073503"/>
-              <a:ext cx="0" cy="3649639"/>
+              <a:off x="3115069" y="2143092"/>
+              <a:ext cx="0" cy="1317069"/>
             </a:xfrm>
             <a:custGeom>
               <a:avLst/>
               <a:pathLst>
-                <a:path w="0" h="3649639">
+                <a:path w="0" h="1317069">
                   <a:moveTo>
-                    <a:pt x="0" y="3649639"/>
+                    <a:pt x="0" y="1317069"/>
                   </a:moveTo>
                   <a:lnTo>
                     <a:pt x="0" y="0"/>
@@ -2572,15 +2564,15 @@
           </p:nvSpPr>
           <p:spPr>
             <a:xfrm>
-              <a:off x="6568199" y="2073503"/>
-              <a:ext cx="0" cy="3649639"/>
+              <a:off x="4825121" y="2143092"/>
+              <a:ext cx="0" cy="1317069"/>
             </a:xfrm>
             <a:custGeom>
               <a:avLst/>
               <a:pathLst>
-                <a:path w="0" h="3649639">
+                <a:path w="0" h="1317069">
                   <a:moveTo>
-                    <a:pt x="0" y="3649639"/>
+                    <a:pt x="0" y="1317069"/>
                   </a:moveTo>
                   <a:lnTo>
                     <a:pt x="0" y="0"/>
@@ -2615,15 +2607,15 @@
           </p:nvSpPr>
           <p:spPr>
             <a:xfrm>
-              <a:off x="8309320" y="2073503"/>
-              <a:ext cx="0" cy="3649639"/>
+              <a:off x="6535173" y="2143092"/>
+              <a:ext cx="0" cy="1317069"/>
             </a:xfrm>
             <a:custGeom>
               <a:avLst/>
               <a:pathLst>
-                <a:path w="0" h="3649639">
+                <a:path w="0" h="1317069">
                   <a:moveTo>
-                    <a:pt x="0" y="3649639"/>
+                    <a:pt x="0" y="1317069"/>
                   </a:moveTo>
                   <a:lnTo>
                     <a:pt x="0" y="0"/>
@@ -2658,26 +2650,26 @@
           </p:nvSpPr>
           <p:spPr>
             <a:xfrm>
-              <a:off x="817517" y="5557249"/>
-              <a:ext cx="7799693" cy="0"/>
+              <a:off x="8245225" y="2143092"/>
+              <a:ext cx="0" cy="1317069"/>
             </a:xfrm>
             <a:custGeom>
               <a:avLst/>
               <a:pathLst>
-                <a:path w="7799693" h="0">
+                <a:path w="0" h="1317069">
                   <a:moveTo>
+                    <a:pt x="0" y="1317069"/>
+                  </a:moveTo>
+                  <a:lnTo>
                     <a:pt x="0" y="0"/>
-                  </a:moveTo>
-                  <a:lnTo>
-                    <a:pt x="7799693" y="0"/>
-                  </a:lnTo>
-                  <a:lnTo>
-                    <a:pt x="7799693" y="0"/>
+                  </a:lnTo>
+                  <a:lnTo>
+                    <a:pt x="0" y="0"/>
                   </a:lnTo>
                 </a:path>
               </a:pathLst>
             </a:custGeom>
-            <a:ln w="13550" cap="flat">
+            <a:ln w="6775" cap="flat">
               <a:solidFill>
                 <a:srgbClr val="EBEBEB">
                   <a:alpha val="100000"/>
@@ -2701,21 +2693,21 @@
           </p:nvSpPr>
           <p:spPr>
             <a:xfrm>
-              <a:off x="817517" y="4727786"/>
-              <a:ext cx="7799693" cy="0"/>
+              <a:off x="887106" y="3400294"/>
+              <a:ext cx="7660515" cy="0"/>
             </a:xfrm>
             <a:custGeom>
               <a:avLst/>
               <a:pathLst>
-                <a:path w="7799693" h="0">
+                <a:path w="7660515" h="0">
                   <a:moveTo>
                     <a:pt x="0" y="0"/>
                   </a:moveTo>
                   <a:lnTo>
-                    <a:pt x="7799693" y="0"/>
-                  </a:lnTo>
-                  <a:lnTo>
-                    <a:pt x="7799693" y="0"/>
+                    <a:pt x="7660515" y="0"/>
+                  </a:lnTo>
+                  <a:lnTo>
+                    <a:pt x="7660515" y="0"/>
                   </a:lnTo>
                 </a:path>
               </a:pathLst>
@@ -2744,21 +2736,21 @@
           </p:nvSpPr>
           <p:spPr>
             <a:xfrm>
-              <a:off x="817517" y="3898322"/>
-              <a:ext cx="7799693" cy="0"/>
+              <a:off x="887106" y="3100960"/>
+              <a:ext cx="7660515" cy="0"/>
             </a:xfrm>
             <a:custGeom>
               <a:avLst/>
               <a:pathLst>
-                <a:path w="7799693" h="0">
+                <a:path w="7660515" h="0">
                   <a:moveTo>
                     <a:pt x="0" y="0"/>
                   </a:moveTo>
                   <a:lnTo>
-                    <a:pt x="7799693" y="0"/>
-                  </a:lnTo>
-                  <a:lnTo>
-                    <a:pt x="7799693" y="0"/>
+                    <a:pt x="7660515" y="0"/>
+                  </a:lnTo>
+                  <a:lnTo>
+                    <a:pt x="7660515" y="0"/>
                   </a:lnTo>
                 </a:path>
               </a:pathLst>
@@ -2787,21 +2779,21 @@
           </p:nvSpPr>
           <p:spPr>
             <a:xfrm>
-              <a:off x="817517" y="3068859"/>
-              <a:ext cx="7799693" cy="0"/>
+              <a:off x="887106" y="2801626"/>
+              <a:ext cx="7660515" cy="0"/>
             </a:xfrm>
             <a:custGeom>
               <a:avLst/>
               <a:pathLst>
-                <a:path w="7799693" h="0">
+                <a:path w="7660515" h="0">
                   <a:moveTo>
                     <a:pt x="0" y="0"/>
                   </a:moveTo>
                   <a:lnTo>
-                    <a:pt x="7799693" y="0"/>
-                  </a:lnTo>
-                  <a:lnTo>
-                    <a:pt x="7799693" y="0"/>
+                    <a:pt x="7660515" y="0"/>
+                  </a:lnTo>
+                  <a:lnTo>
+                    <a:pt x="7660515" y="0"/>
                   </a:lnTo>
                 </a:path>
               </a:pathLst>
@@ -2830,21 +2822,21 @@
           </p:nvSpPr>
           <p:spPr>
             <a:xfrm>
-              <a:off x="817517" y="2239395"/>
-              <a:ext cx="7799693" cy="0"/>
+              <a:off x="887106" y="2502292"/>
+              <a:ext cx="7660515" cy="0"/>
             </a:xfrm>
             <a:custGeom>
               <a:avLst/>
               <a:pathLst>
-                <a:path w="7799693" h="0">
+                <a:path w="7660515" h="0">
                   <a:moveTo>
                     <a:pt x="0" y="0"/>
                   </a:moveTo>
                   <a:lnTo>
-                    <a:pt x="7799693" y="0"/>
-                  </a:lnTo>
-                  <a:lnTo>
-                    <a:pt x="7799693" y="0"/>
+                    <a:pt x="7660515" y="0"/>
+                  </a:lnTo>
+                  <a:lnTo>
+                    <a:pt x="7660515" y="0"/>
                   </a:lnTo>
                 </a:path>
               </a:pathLst>
@@ -2873,21 +2865,21 @@
           </p:nvSpPr>
           <p:spPr>
             <a:xfrm>
-              <a:off x="2215398" y="2073503"/>
-              <a:ext cx="0" cy="3649639"/>
+              <a:off x="887106" y="2202958"/>
+              <a:ext cx="7660515" cy="0"/>
             </a:xfrm>
             <a:custGeom>
               <a:avLst/>
               <a:pathLst>
-                <a:path w="0" h="3649639">
+                <a:path w="7660515" h="0">
                   <a:moveTo>
-                    <a:pt x="0" y="3649639"/>
+                    <a:pt x="0" y="0"/>
                   </a:moveTo>
                   <a:lnTo>
-                    <a:pt x="0" y="0"/>
-                  </a:lnTo>
-                  <a:lnTo>
-                    <a:pt x="0" y="0"/>
+                    <a:pt x="7660515" y="0"/>
+                  </a:lnTo>
+                  <a:lnTo>
+                    <a:pt x="7660515" y="0"/>
                   </a:lnTo>
                 </a:path>
               </a:pathLst>
@@ -2916,15 +2908,15 @@
           </p:nvSpPr>
           <p:spPr>
             <a:xfrm>
-              <a:off x="3956518" y="2073503"/>
-              <a:ext cx="0" cy="3649639"/>
+              <a:off x="2260043" y="2143092"/>
+              <a:ext cx="0" cy="1317069"/>
             </a:xfrm>
             <a:custGeom>
               <a:avLst/>
               <a:pathLst>
-                <a:path w="0" h="3649639">
+                <a:path w="0" h="1317069">
                   <a:moveTo>
-                    <a:pt x="0" y="3649639"/>
+                    <a:pt x="0" y="1317069"/>
                   </a:moveTo>
                   <a:lnTo>
                     <a:pt x="0" y="0"/>
@@ -2959,15 +2951,15 @@
           </p:nvSpPr>
           <p:spPr>
             <a:xfrm>
-              <a:off x="5697639" y="2073503"/>
-              <a:ext cx="0" cy="3649639"/>
+              <a:off x="3970095" y="2143092"/>
+              <a:ext cx="0" cy="1317069"/>
             </a:xfrm>
             <a:custGeom>
               <a:avLst/>
               <a:pathLst>
-                <a:path w="0" h="3649639">
+                <a:path w="0" h="1317069">
                   <a:moveTo>
-                    <a:pt x="0" y="3649639"/>
+                    <a:pt x="0" y="1317069"/>
                   </a:moveTo>
                   <a:lnTo>
                     <a:pt x="0" y="0"/>
@@ -3002,15 +2994,15 @@
           </p:nvSpPr>
           <p:spPr>
             <a:xfrm>
-              <a:off x="7438760" y="2073503"/>
-              <a:ext cx="0" cy="3649639"/>
+              <a:off x="5680147" y="2143092"/>
+              <a:ext cx="0" cy="1317069"/>
             </a:xfrm>
             <a:custGeom>
               <a:avLst/>
               <a:pathLst>
-                <a:path w="0" h="3649639">
+                <a:path w="0" h="1317069">
                   <a:moveTo>
-                    <a:pt x="0" y="3649639"/>
+                    <a:pt x="0" y="1317069"/>
                   </a:moveTo>
                   <a:lnTo>
                     <a:pt x="0" y="0"/>
@@ -3039,618 +3031,661 @@
         </p:sp>
         <p:sp>
           <p:nvSpPr>
-            <p:cNvPr id="22" name="pg22"/>
+            <p:cNvPr id="22" name="pl22"/>
             <p:cNvSpPr/>
             <p:nvPr/>
           </p:nvSpPr>
           <p:spPr>
             <a:xfrm>
-              <a:off x="1172049" y="2142537"/>
-              <a:ext cx="7090630" cy="3277567"/>
+              <a:off x="7390199" y="2143092"/>
+              <a:ext cx="0" cy="1317069"/>
             </a:xfrm>
             <a:custGeom>
               <a:avLst/>
               <a:pathLst>
-                <a:path w="7090630" h="3277567">
+                <a:path w="0" h="1317069">
+                  <a:moveTo>
+                    <a:pt x="0" y="1317069"/>
+                  </a:moveTo>
+                  <a:lnTo>
+                    <a:pt x="0" y="0"/>
+                  </a:lnTo>
+                  <a:lnTo>
+                    <a:pt x="0" y="0"/>
+                  </a:lnTo>
+                </a:path>
+              </a:pathLst>
+            </a:custGeom>
+            <a:ln w="13550" cap="flat">
+              <a:solidFill>
+                <a:srgbClr val="EBEBEB">
+                  <a:alpha val="100000"/>
+                </a:srgbClr>
+              </a:solidFill>
+              <a:prstDash val="solid"/>
+              <a:round/>
+            </a:ln>
+          </p:spPr>
+          <p:txBody>
+            <a:bodyPr/>
+            <a:lstStyle/>
+            <a:p/>
+          </p:txBody>
+        </p:sp>
+        <p:sp>
+          <p:nvSpPr>
+            <p:cNvPr id="23" name="pg23"/>
+            <p:cNvSpPr/>
+            <p:nvPr/>
+          </p:nvSpPr>
+          <p:spPr>
+            <a:xfrm>
+              <a:off x="1235312" y="2168005"/>
+              <a:ext cx="6964104" cy="1182797"/>
+            </a:xfrm>
+            <a:custGeom>
+              <a:avLst/>
+              <a:pathLst>
+                <a:path w="6964104" h="1182797">
                   <a:moveTo>
                     <a:pt x="0" y="0"/>
                   </a:moveTo>
                   <a:lnTo>
-                    <a:pt x="71622" y="109104"/>
-                  </a:lnTo>
-                  <a:lnTo>
-                    <a:pt x="143245" y="214722"/>
-                  </a:lnTo>
-                  <a:lnTo>
-                    <a:pt x="214867" y="316966"/>
-                  </a:lnTo>
-                  <a:lnTo>
-                    <a:pt x="286490" y="415943"/>
-                  </a:lnTo>
-                  <a:lnTo>
-                    <a:pt x="358112" y="511757"/>
-                  </a:lnTo>
-                  <a:lnTo>
-                    <a:pt x="429735" y="604510"/>
-                  </a:lnTo>
-                  <a:lnTo>
-                    <a:pt x="501357" y="694300"/>
-                  </a:lnTo>
-                  <a:lnTo>
-                    <a:pt x="572980" y="781221"/>
-                  </a:lnTo>
-                  <a:lnTo>
-                    <a:pt x="644602" y="865364"/>
-                  </a:lnTo>
-                  <a:lnTo>
-                    <a:pt x="716225" y="946819"/>
-                  </a:lnTo>
-                  <a:lnTo>
-                    <a:pt x="787847" y="1025671"/>
-                  </a:lnTo>
-                  <a:lnTo>
-                    <a:pt x="859470" y="1102004"/>
-                  </a:lnTo>
-                  <a:lnTo>
-                    <a:pt x="931092" y="1175898"/>
-                  </a:lnTo>
-                  <a:lnTo>
-                    <a:pt x="1002715" y="1247431"/>
-                  </a:lnTo>
-                  <a:lnTo>
-                    <a:pt x="1074337" y="1316678"/>
-                  </a:lnTo>
-                  <a:lnTo>
-                    <a:pt x="1145960" y="1383713"/>
-                  </a:lnTo>
-                  <a:lnTo>
-                    <a:pt x="1217582" y="1448606"/>
-                  </a:lnTo>
-                  <a:lnTo>
-                    <a:pt x="1289205" y="1511426"/>
-                  </a:lnTo>
-                  <a:lnTo>
-                    <a:pt x="1360827" y="1572238"/>
-                  </a:lnTo>
-                  <a:lnTo>
-                    <a:pt x="1432450" y="1631107"/>
-                  </a:lnTo>
-                  <a:lnTo>
-                    <a:pt x="1504073" y="1688096"/>
-                  </a:lnTo>
-                  <a:lnTo>
-                    <a:pt x="1575695" y="1743263"/>
-                  </a:lnTo>
-                  <a:lnTo>
-                    <a:pt x="1647318" y="1796668"/>
-                  </a:lnTo>
-                  <a:lnTo>
-                    <a:pt x="1718940" y="1848367"/>
-                  </a:lnTo>
-                  <a:lnTo>
-                    <a:pt x="1790563" y="1898414"/>
-                  </a:lnTo>
-                  <a:lnTo>
-                    <a:pt x="1862185" y="1946861"/>
-                  </a:lnTo>
-                  <a:lnTo>
-                    <a:pt x="1933808" y="1993761"/>
-                  </a:lnTo>
-                  <a:lnTo>
-                    <a:pt x="2005430" y="2039162"/>
-                  </a:lnTo>
-                  <a:lnTo>
-                    <a:pt x="2077053" y="2083113"/>
-                  </a:lnTo>
-                  <a:lnTo>
-                    <a:pt x="2148675" y="2125659"/>
-                  </a:lnTo>
-                  <a:lnTo>
-                    <a:pt x="2220298" y="2166846"/>
-                  </a:lnTo>
-                  <a:lnTo>
-                    <a:pt x="2291920" y="2206717"/>
-                  </a:lnTo>
-                  <a:lnTo>
-                    <a:pt x="2363543" y="2245314"/>
-                  </a:lnTo>
-                  <a:lnTo>
-                    <a:pt x="2435165" y="2282678"/>
-                  </a:lnTo>
-                  <a:lnTo>
-                    <a:pt x="2506788" y="2318847"/>
-                  </a:lnTo>
-                  <a:lnTo>
-                    <a:pt x="2578410" y="2353862"/>
-                  </a:lnTo>
-                  <a:lnTo>
-                    <a:pt x="2650033" y="2387757"/>
-                  </a:lnTo>
-                  <a:lnTo>
-                    <a:pt x="2721655" y="2420570"/>
-                  </a:lnTo>
-                  <a:lnTo>
-                    <a:pt x="2793278" y="2452334"/>
-                  </a:lnTo>
-                  <a:lnTo>
-                    <a:pt x="2864901" y="2483083"/>
-                  </a:lnTo>
-                  <a:lnTo>
-                    <a:pt x="2936523" y="2512850"/>
-                  </a:lnTo>
-                  <a:lnTo>
-                    <a:pt x="3008146" y="2541665"/>
-                  </a:lnTo>
-                  <a:lnTo>
-                    <a:pt x="3079768" y="2569560"/>
-                  </a:lnTo>
-                  <a:lnTo>
-                    <a:pt x="3151391" y="2582767"/>
-                  </a:lnTo>
-                  <a:lnTo>
-                    <a:pt x="3223013" y="2576870"/>
-                  </a:lnTo>
-                  <a:lnTo>
-                    <a:pt x="3294636" y="2570932"/>
-                  </a:lnTo>
-                  <a:lnTo>
-                    <a:pt x="3366258" y="2564952"/>
-                  </a:lnTo>
-                  <a:lnTo>
-                    <a:pt x="3437881" y="2558929"/>
-                  </a:lnTo>
-                  <a:lnTo>
-                    <a:pt x="3509503" y="2552864"/>
-                  </a:lnTo>
-                  <a:lnTo>
-                    <a:pt x="3581126" y="2546755"/>
-                  </a:lnTo>
-                  <a:lnTo>
-                    <a:pt x="3652748" y="2540604"/>
-                  </a:lnTo>
-                  <a:lnTo>
-                    <a:pt x="3724371" y="2534409"/>
-                  </a:lnTo>
-                  <a:lnTo>
-                    <a:pt x="3795993" y="2528169"/>
-                  </a:lnTo>
-                  <a:lnTo>
-                    <a:pt x="3867616" y="2521886"/>
-                  </a:lnTo>
-                  <a:lnTo>
-                    <a:pt x="3939238" y="2515558"/>
-                  </a:lnTo>
-                  <a:lnTo>
-                    <a:pt x="4010861" y="2509185"/>
-                  </a:lnTo>
-                  <a:lnTo>
-                    <a:pt x="4082483" y="2502768"/>
-                  </a:lnTo>
-                  <a:lnTo>
-                    <a:pt x="4154106" y="2496304"/>
-                  </a:lnTo>
-                  <a:lnTo>
-                    <a:pt x="4225729" y="2489795"/>
-                  </a:lnTo>
-                  <a:lnTo>
-                    <a:pt x="4297351" y="2483240"/>
-                  </a:lnTo>
-                  <a:lnTo>
-                    <a:pt x="4368974" y="2476638"/>
-                  </a:lnTo>
-                  <a:lnTo>
-                    <a:pt x="4440596" y="2469989"/>
-                  </a:lnTo>
-                  <a:lnTo>
-                    <a:pt x="4512219" y="2463294"/>
-                  </a:lnTo>
-                  <a:lnTo>
-                    <a:pt x="4583841" y="2456550"/>
-                  </a:lnTo>
-                  <a:lnTo>
-                    <a:pt x="4655464" y="2449759"/>
-                  </a:lnTo>
-                  <a:lnTo>
-                    <a:pt x="4727086" y="2442920"/>
-                  </a:lnTo>
-                  <a:lnTo>
-                    <a:pt x="4798709" y="2436033"/>
-                  </a:lnTo>
-                  <a:lnTo>
-                    <a:pt x="4870331" y="2429096"/>
-                  </a:lnTo>
-                  <a:lnTo>
-                    <a:pt x="4941954" y="2422111"/>
-                  </a:lnTo>
-                  <a:lnTo>
-                    <a:pt x="5013576" y="2415076"/>
-                  </a:lnTo>
-                  <a:lnTo>
-                    <a:pt x="5085199" y="2407991"/>
-                  </a:lnTo>
-                  <a:lnTo>
-                    <a:pt x="5156821" y="2400856"/>
-                  </a:lnTo>
-                  <a:lnTo>
-                    <a:pt x="5228444" y="2393670"/>
-                  </a:lnTo>
-                  <a:lnTo>
-                    <a:pt x="5300066" y="2386433"/>
-                  </a:lnTo>
-                  <a:lnTo>
-                    <a:pt x="5371689" y="2379146"/>
-                  </a:lnTo>
-                  <a:lnTo>
-                    <a:pt x="5443311" y="2371806"/>
-                  </a:lnTo>
-                  <a:lnTo>
-                    <a:pt x="5514934" y="2364414"/>
-                  </a:lnTo>
-                  <a:lnTo>
-                    <a:pt x="5586557" y="2356970"/>
-                  </a:lnTo>
-                  <a:lnTo>
-                    <a:pt x="5658179" y="2349474"/>
-                  </a:lnTo>
-                  <a:lnTo>
-                    <a:pt x="5729802" y="2341924"/>
-                  </a:lnTo>
-                  <a:lnTo>
-                    <a:pt x="5801424" y="2334321"/>
-                  </a:lnTo>
-                  <a:lnTo>
-                    <a:pt x="5873047" y="2326663"/>
-                  </a:lnTo>
-                  <a:lnTo>
-                    <a:pt x="5944669" y="2318952"/>
-                  </a:lnTo>
-                  <a:lnTo>
-                    <a:pt x="6016292" y="2311186"/>
-                  </a:lnTo>
-                  <a:lnTo>
-                    <a:pt x="6087914" y="2303364"/>
-                  </a:lnTo>
-                  <a:lnTo>
-                    <a:pt x="6159537" y="2295488"/>
-                  </a:lnTo>
-                  <a:lnTo>
-                    <a:pt x="6231159" y="2287555"/>
-                  </a:lnTo>
-                  <a:lnTo>
-                    <a:pt x="6302782" y="2279566"/>
-                  </a:lnTo>
-                  <a:lnTo>
-                    <a:pt x="6374404" y="2271521"/>
-                  </a:lnTo>
-                  <a:lnTo>
-                    <a:pt x="6446027" y="2263419"/>
-                  </a:lnTo>
-                  <a:lnTo>
-                    <a:pt x="6517649" y="2255259"/>
-                  </a:lnTo>
-                  <a:lnTo>
-                    <a:pt x="6589272" y="2247041"/>
-                  </a:lnTo>
-                  <a:lnTo>
-                    <a:pt x="6660894" y="2238766"/>
-                  </a:lnTo>
-                  <a:lnTo>
-                    <a:pt x="6732517" y="2230431"/>
-                  </a:lnTo>
-                  <a:lnTo>
-                    <a:pt x="6804139" y="2222038"/>
-                  </a:lnTo>
-                  <a:lnTo>
-                    <a:pt x="6875762" y="2213584"/>
-                  </a:lnTo>
-                  <a:lnTo>
-                    <a:pt x="6947385" y="2205071"/>
-                  </a:lnTo>
-                  <a:lnTo>
-                    <a:pt x="7019007" y="2196498"/>
-                  </a:lnTo>
-                  <a:lnTo>
-                    <a:pt x="7090630" y="2187864"/>
-                  </a:lnTo>
-                  <a:lnTo>
-                    <a:pt x="7090630" y="3277567"/>
-                  </a:lnTo>
-                  <a:lnTo>
-                    <a:pt x="7019007" y="3273041"/>
-                  </a:lnTo>
-                  <a:lnTo>
-                    <a:pt x="6947385" y="3268365"/>
-                  </a:lnTo>
-                  <a:lnTo>
-                    <a:pt x="6875762" y="3263534"/>
-                  </a:lnTo>
-                  <a:lnTo>
-                    <a:pt x="6804139" y="3258545"/>
-                  </a:lnTo>
-                  <a:lnTo>
-                    <a:pt x="6732517" y="3253390"/>
-                  </a:lnTo>
-                  <a:lnTo>
-                    <a:pt x="6660894" y="3248066"/>
-                  </a:lnTo>
-                  <a:lnTo>
-                    <a:pt x="6589272" y="3242565"/>
-                  </a:lnTo>
-                  <a:lnTo>
-                    <a:pt x="6517649" y="3236883"/>
-                  </a:lnTo>
-                  <a:lnTo>
-                    <a:pt x="6446027" y="3231014"/>
-                  </a:lnTo>
-                  <a:lnTo>
-                    <a:pt x="6374404" y="3224951"/>
-                  </a:lnTo>
-                  <a:lnTo>
-                    <a:pt x="6302782" y="3218688"/>
-                  </a:lnTo>
-                  <a:lnTo>
-                    <a:pt x="6231159" y="3212218"/>
-                  </a:lnTo>
-                  <a:lnTo>
-                    <a:pt x="6159537" y="3205534"/>
-                  </a:lnTo>
-                  <a:lnTo>
-                    <a:pt x="6087914" y="3198630"/>
-                  </a:lnTo>
-                  <a:lnTo>
-                    <a:pt x="6016292" y="3191498"/>
-                  </a:lnTo>
-                  <a:lnTo>
-                    <a:pt x="5944669" y="3184131"/>
-                  </a:lnTo>
-                  <a:lnTo>
-                    <a:pt x="5873047" y="3176520"/>
-                  </a:lnTo>
-                  <a:lnTo>
-                    <a:pt x="5801424" y="3168659"/>
-                  </a:lnTo>
-                  <a:lnTo>
-                    <a:pt x="5729802" y="3160538"/>
-                  </a:lnTo>
-                  <a:lnTo>
-                    <a:pt x="5658179" y="3152148"/>
-                  </a:lnTo>
-                  <a:lnTo>
-                    <a:pt x="5586557" y="3143482"/>
-                  </a:lnTo>
-                  <a:lnTo>
-                    <a:pt x="5514934" y="3134530"/>
-                  </a:lnTo>
-                  <a:lnTo>
-                    <a:pt x="5443311" y="3125282"/>
-                  </a:lnTo>
-                  <a:lnTo>
-                    <a:pt x="5371689" y="3115729"/>
-                  </a:lnTo>
-                  <a:lnTo>
-                    <a:pt x="5300066" y="3105861"/>
-                  </a:lnTo>
-                  <a:lnTo>
-                    <a:pt x="5228444" y="3095667"/>
-                  </a:lnTo>
-                  <a:lnTo>
-                    <a:pt x="5156821" y="3085137"/>
-                  </a:lnTo>
-                  <a:lnTo>
-                    <a:pt x="5085199" y="3074259"/>
-                  </a:lnTo>
-                  <a:lnTo>
-                    <a:pt x="5013576" y="3063022"/>
-                  </a:lnTo>
-                  <a:lnTo>
-                    <a:pt x="4941954" y="3051414"/>
-                  </a:lnTo>
-                  <a:lnTo>
-                    <a:pt x="4870331" y="3039424"/>
-                  </a:lnTo>
-                  <a:lnTo>
-                    <a:pt x="4798709" y="3027037"/>
-                  </a:lnTo>
-                  <a:lnTo>
-                    <a:pt x="4727086" y="3014241"/>
-                  </a:lnTo>
-                  <a:lnTo>
-                    <a:pt x="4655464" y="3001023"/>
-                  </a:lnTo>
-                  <a:lnTo>
-                    <a:pt x="4583841" y="2987369"/>
-                  </a:lnTo>
-                  <a:lnTo>
-                    <a:pt x="4512219" y="2973264"/>
-                  </a:lnTo>
-                  <a:lnTo>
-                    <a:pt x="4440596" y="2958694"/>
-                  </a:lnTo>
-                  <a:lnTo>
-                    <a:pt x="4368974" y="2943643"/>
-                  </a:lnTo>
-                  <a:lnTo>
-                    <a:pt x="4297351" y="2928095"/>
-                  </a:lnTo>
-                  <a:lnTo>
-                    <a:pt x="4225729" y="2912034"/>
-                  </a:lnTo>
-                  <a:lnTo>
-                    <a:pt x="4154106" y="2895442"/>
-                  </a:lnTo>
-                  <a:lnTo>
-                    <a:pt x="4082483" y="2878303"/>
-                  </a:lnTo>
-                  <a:lnTo>
-                    <a:pt x="4010861" y="2860599"/>
-                  </a:lnTo>
-                  <a:lnTo>
-                    <a:pt x="3939238" y="2842310"/>
-                  </a:lnTo>
-                  <a:lnTo>
-                    <a:pt x="3867616" y="2823417"/>
-                  </a:lnTo>
-                  <a:lnTo>
-                    <a:pt x="3795993" y="2803901"/>
-                  </a:lnTo>
-                  <a:lnTo>
-                    <a:pt x="3724371" y="2783741"/>
-                  </a:lnTo>
-                  <a:lnTo>
-                    <a:pt x="3652748" y="2762915"/>
-                  </a:lnTo>
-                  <a:lnTo>
-                    <a:pt x="3581126" y="2741402"/>
-                  </a:lnTo>
-                  <a:lnTo>
-                    <a:pt x="3509503" y="2719179"/>
-                  </a:lnTo>
-                  <a:lnTo>
-                    <a:pt x="3437881" y="2696222"/>
-                  </a:lnTo>
-                  <a:lnTo>
-                    <a:pt x="3366258" y="2672508"/>
-                  </a:lnTo>
-                  <a:lnTo>
-                    <a:pt x="3294636" y="2648010"/>
-                  </a:lnTo>
-                  <a:lnTo>
-                    <a:pt x="3223013" y="2622705"/>
-                  </a:lnTo>
-                  <a:lnTo>
-                    <a:pt x="3151391" y="2596564"/>
-                  </a:lnTo>
-                  <a:lnTo>
-                    <a:pt x="3079768" y="2588622"/>
-                  </a:lnTo>
-                  <a:lnTo>
-                    <a:pt x="3008146" y="2594435"/>
-                  </a:lnTo>
-                  <a:lnTo>
-                    <a:pt x="2936523" y="2600208"/>
-                  </a:lnTo>
-                  <a:lnTo>
-                    <a:pt x="2864901" y="2605940"/>
-                  </a:lnTo>
-                  <a:lnTo>
-                    <a:pt x="2793278" y="2611632"/>
-                  </a:lnTo>
-                  <a:lnTo>
-                    <a:pt x="2721655" y="2617284"/>
-                  </a:lnTo>
-                  <a:lnTo>
-                    <a:pt x="2650033" y="2622896"/>
-                  </a:lnTo>
-                  <a:lnTo>
-                    <a:pt x="2578410" y="2628468"/>
-                  </a:lnTo>
-                  <a:lnTo>
-                    <a:pt x="2506788" y="2634001"/>
-                  </a:lnTo>
-                  <a:lnTo>
-                    <a:pt x="2435165" y="2639496"/>
-                  </a:lnTo>
-                  <a:lnTo>
-                    <a:pt x="2363543" y="2644951"/>
-                  </a:lnTo>
-                  <a:lnTo>
-                    <a:pt x="2291920" y="2650369"/>
-                  </a:lnTo>
-                  <a:lnTo>
-                    <a:pt x="2220298" y="2655748"/>
-                  </a:lnTo>
-                  <a:lnTo>
-                    <a:pt x="2148675" y="2661089"/>
-                  </a:lnTo>
-                  <a:lnTo>
-                    <a:pt x="2077053" y="2666393"/>
-                  </a:lnTo>
-                  <a:lnTo>
-                    <a:pt x="2005430" y="2671659"/>
-                  </a:lnTo>
-                  <a:lnTo>
-                    <a:pt x="1933808" y="2676889"/>
-                  </a:lnTo>
-                  <a:lnTo>
-                    <a:pt x="1862185" y="2682081"/>
-                  </a:lnTo>
-                  <a:lnTo>
-                    <a:pt x="1790563" y="2687237"/>
-                  </a:lnTo>
-                  <a:lnTo>
-                    <a:pt x="1718940" y="2692357"/>
-                  </a:lnTo>
-                  <a:lnTo>
-                    <a:pt x="1647318" y="2697440"/>
-                  </a:lnTo>
-                  <a:lnTo>
-                    <a:pt x="1575695" y="2702488"/>
-                  </a:lnTo>
-                  <a:lnTo>
-                    <a:pt x="1504073" y="2707501"/>
-                  </a:lnTo>
-                  <a:lnTo>
-                    <a:pt x="1432450" y="2712478"/>
-                  </a:lnTo>
-                  <a:lnTo>
-                    <a:pt x="1360827" y="2717420"/>
-                  </a:lnTo>
-                  <a:lnTo>
-                    <a:pt x="1289205" y="2722327"/>
-                  </a:lnTo>
-                  <a:lnTo>
-                    <a:pt x="1217582" y="2727200"/>
-                  </a:lnTo>
-                  <a:lnTo>
-                    <a:pt x="1145960" y="2732038"/>
-                  </a:lnTo>
-                  <a:lnTo>
-                    <a:pt x="1074337" y="2736843"/>
-                  </a:lnTo>
-                  <a:lnTo>
-                    <a:pt x="1002715" y="2741613"/>
-                  </a:lnTo>
-                  <a:lnTo>
-                    <a:pt x="931092" y="2746350"/>
-                  </a:lnTo>
-                  <a:lnTo>
-                    <a:pt x="859470" y="2751054"/>
-                  </a:lnTo>
-                  <a:lnTo>
-                    <a:pt x="787847" y="2755724"/>
-                  </a:lnTo>
-                  <a:lnTo>
-                    <a:pt x="716225" y="2760362"/>
-                  </a:lnTo>
-                  <a:lnTo>
-                    <a:pt x="644602" y="2764967"/>
-                  </a:lnTo>
-                  <a:lnTo>
-                    <a:pt x="572980" y="2769540"/>
-                  </a:lnTo>
-                  <a:lnTo>
-                    <a:pt x="501357" y="2774080"/>
-                  </a:lnTo>
-                  <a:lnTo>
-                    <a:pt x="429735" y="2778589"/>
-                  </a:lnTo>
-                  <a:lnTo>
-                    <a:pt x="358112" y="2783066"/>
-                  </a:lnTo>
-                  <a:lnTo>
-                    <a:pt x="286490" y="2787511"/>
-                  </a:lnTo>
-                  <a:lnTo>
-                    <a:pt x="214867" y="2791925"/>
-                  </a:lnTo>
-                  <a:lnTo>
-                    <a:pt x="143245" y="2796308"/>
-                  </a:lnTo>
-                  <a:lnTo>
-                    <a:pt x="71622" y="2800660"/>
-                  </a:lnTo>
-                  <a:lnTo>
-                    <a:pt x="0" y="2804981"/>
+                    <a:pt x="70344" y="39373"/>
+                  </a:lnTo>
+                  <a:lnTo>
+                    <a:pt x="140688" y="77488"/>
+                  </a:lnTo>
+                  <a:lnTo>
+                    <a:pt x="211033" y="114385"/>
+                  </a:lnTo>
+                  <a:lnTo>
+                    <a:pt x="281377" y="150104"/>
+                  </a:lnTo>
+                  <a:lnTo>
+                    <a:pt x="351722" y="184681"/>
+                  </a:lnTo>
+                  <a:lnTo>
+                    <a:pt x="422066" y="218153"/>
+                  </a:lnTo>
+                  <a:lnTo>
+                    <a:pt x="492411" y="250556"/>
+                  </a:lnTo>
+                  <a:lnTo>
+                    <a:pt x="562755" y="281924"/>
+                  </a:lnTo>
+                  <a:lnTo>
+                    <a:pt x="633100" y="312289"/>
+                  </a:lnTo>
+                  <a:lnTo>
+                    <a:pt x="703444" y="341684"/>
+                  </a:lnTo>
+                  <a:lnTo>
+                    <a:pt x="773789" y="370140"/>
+                  </a:lnTo>
+                  <a:lnTo>
+                    <a:pt x="844133" y="397687"/>
+                  </a:lnTo>
+                  <a:lnTo>
+                    <a:pt x="914478" y="424354"/>
+                  </a:lnTo>
+                  <a:lnTo>
+                    <a:pt x="984822" y="450168"/>
+                  </a:lnTo>
+                  <a:lnTo>
+                    <a:pt x="1055167" y="475158"/>
+                  </a:lnTo>
+                  <a:lnTo>
+                    <a:pt x="1125511" y="499349"/>
+                  </a:lnTo>
+                  <a:lnTo>
+                    <a:pt x="1195856" y="522768"/>
+                  </a:lnTo>
+                  <a:lnTo>
+                    <a:pt x="1266200" y="545438"/>
+                  </a:lnTo>
+                  <a:lnTo>
+                    <a:pt x="1336545" y="567383"/>
+                  </a:lnTo>
+                  <a:lnTo>
+                    <a:pt x="1406889" y="588628"/>
+                  </a:lnTo>
+                  <a:lnTo>
+                    <a:pt x="1477234" y="609194"/>
+                  </a:lnTo>
+                  <a:lnTo>
+                    <a:pt x="1547578" y="629102"/>
+                  </a:lnTo>
+                  <a:lnTo>
+                    <a:pt x="1617923" y="648375"/>
+                  </a:lnTo>
+                  <a:lnTo>
+                    <a:pt x="1688267" y="667032"/>
+                  </a:lnTo>
+                  <a:lnTo>
+                    <a:pt x="1758612" y="685092"/>
+                  </a:lnTo>
+                  <a:lnTo>
+                    <a:pt x="1828956" y="702576"/>
+                  </a:lnTo>
+                  <a:lnTo>
+                    <a:pt x="1899301" y="719501"/>
+                  </a:lnTo>
+                  <a:lnTo>
+                    <a:pt x="1969645" y="735885"/>
+                  </a:lnTo>
+                  <a:lnTo>
+                    <a:pt x="2039990" y="751746"/>
+                  </a:lnTo>
+                  <a:lnTo>
+                    <a:pt x="2110334" y="767100"/>
+                  </a:lnTo>
+                  <a:lnTo>
+                    <a:pt x="2180679" y="781963"/>
+                  </a:lnTo>
+                  <a:lnTo>
+                    <a:pt x="2251023" y="796352"/>
+                  </a:lnTo>
+                  <a:lnTo>
+                    <a:pt x="2321368" y="810281"/>
+                  </a:lnTo>
+                  <a:lnTo>
+                    <a:pt x="2391712" y="823764"/>
+                  </a:lnTo>
+                  <a:lnTo>
+                    <a:pt x="2462057" y="836817"/>
+                  </a:lnTo>
+                  <a:lnTo>
+                    <a:pt x="2532401" y="849453"/>
+                  </a:lnTo>
+                  <a:lnTo>
+                    <a:pt x="2602746" y="861685"/>
+                  </a:lnTo>
+                  <a:lnTo>
+                    <a:pt x="2673090" y="873526"/>
+                  </a:lnTo>
+                  <a:lnTo>
+                    <a:pt x="2743435" y="884989"/>
+                  </a:lnTo>
+                  <a:lnTo>
+                    <a:pt x="2813779" y="896086"/>
+                  </a:lnTo>
+                  <a:lnTo>
+                    <a:pt x="2884124" y="906828"/>
+                  </a:lnTo>
+                  <a:lnTo>
+                    <a:pt x="2954468" y="917227"/>
+                  </a:lnTo>
+                  <a:lnTo>
+                    <a:pt x="3024813" y="927294"/>
+                  </a:lnTo>
+                  <a:lnTo>
+                    <a:pt x="3095157" y="932059"/>
+                  </a:lnTo>
+                  <a:lnTo>
+                    <a:pt x="3165502" y="929932"/>
+                  </a:lnTo>
+                  <a:lnTo>
+                    <a:pt x="3235846" y="927789"/>
+                  </a:lnTo>
+                  <a:lnTo>
+                    <a:pt x="3306191" y="925630"/>
+                  </a:lnTo>
+                  <a:lnTo>
+                    <a:pt x="3376535" y="923457"/>
+                  </a:lnTo>
+                  <a:lnTo>
+                    <a:pt x="3446880" y="921268"/>
+                  </a:lnTo>
+                  <a:lnTo>
+                    <a:pt x="3517224" y="919064"/>
+                  </a:lnTo>
+                  <a:lnTo>
+                    <a:pt x="3587569" y="916844"/>
+                  </a:lnTo>
+                  <a:lnTo>
+                    <a:pt x="3657913" y="914608"/>
+                  </a:lnTo>
+                  <a:lnTo>
+                    <a:pt x="3728257" y="912357"/>
+                  </a:lnTo>
+                  <a:lnTo>
+                    <a:pt x="3798602" y="910089"/>
+                  </a:lnTo>
+                  <a:lnTo>
+                    <a:pt x="3868946" y="907805"/>
+                  </a:lnTo>
+                  <a:lnTo>
+                    <a:pt x="3939291" y="905506"/>
+                  </a:lnTo>
+                  <a:lnTo>
+                    <a:pt x="4009635" y="903190"/>
+                  </a:lnTo>
+                  <a:lnTo>
+                    <a:pt x="4079980" y="900857"/>
+                  </a:lnTo>
+                  <a:lnTo>
+                    <a:pt x="4150324" y="898508"/>
+                  </a:lnTo>
+                  <a:lnTo>
+                    <a:pt x="4220669" y="896142"/>
+                  </a:lnTo>
+                  <a:lnTo>
+                    <a:pt x="4291013" y="893760"/>
+                  </a:lnTo>
+                  <a:lnTo>
+                    <a:pt x="4361358" y="891361"/>
+                  </a:lnTo>
+                  <a:lnTo>
+                    <a:pt x="4431702" y="888944"/>
+                  </a:lnTo>
+                  <a:lnTo>
+                    <a:pt x="4502047" y="886511"/>
+                  </a:lnTo>
+                  <a:lnTo>
+                    <a:pt x="4572391" y="884060"/>
+                  </a:lnTo>
+                  <a:lnTo>
+                    <a:pt x="4642736" y="881592"/>
+                  </a:lnTo>
+                  <a:lnTo>
+                    <a:pt x="4713080" y="879107"/>
+                  </a:lnTo>
+                  <a:lnTo>
+                    <a:pt x="4783425" y="876603"/>
+                  </a:lnTo>
+                  <a:lnTo>
+                    <a:pt x="4853769" y="874083"/>
+                  </a:lnTo>
+                  <a:lnTo>
+                    <a:pt x="4924114" y="871544"/>
+                  </a:lnTo>
+                  <a:lnTo>
+                    <a:pt x="4994458" y="868987"/>
+                  </a:lnTo>
+                  <a:lnTo>
+                    <a:pt x="5064803" y="866412"/>
+                  </a:lnTo>
+                  <a:lnTo>
+                    <a:pt x="5135147" y="863819"/>
+                  </a:lnTo>
+                  <a:lnTo>
+                    <a:pt x="5205492" y="861207"/>
+                  </a:lnTo>
+                  <a:lnTo>
+                    <a:pt x="5275836" y="858577"/>
+                  </a:lnTo>
+                  <a:lnTo>
+                    <a:pt x="5346181" y="855929"/>
+                  </a:lnTo>
+                  <a:lnTo>
+                    <a:pt x="5416525" y="853261"/>
+                  </a:lnTo>
+                  <a:lnTo>
+                    <a:pt x="5486870" y="850575"/>
+                  </a:lnTo>
+                  <a:lnTo>
+                    <a:pt x="5557214" y="847869"/>
+                  </a:lnTo>
+                  <a:lnTo>
+                    <a:pt x="5627559" y="845145"/>
+                  </a:lnTo>
+                  <a:lnTo>
+                    <a:pt x="5697903" y="842401"/>
+                  </a:lnTo>
+                  <a:lnTo>
+                    <a:pt x="5768248" y="839638"/>
+                  </a:lnTo>
+                  <a:lnTo>
+                    <a:pt x="5838592" y="836855"/>
+                  </a:lnTo>
+                  <a:lnTo>
+                    <a:pt x="5908937" y="834052"/>
+                  </a:lnTo>
+                  <a:lnTo>
+                    <a:pt x="5979281" y="831230"/>
+                  </a:lnTo>
+                  <a:lnTo>
+                    <a:pt x="6049626" y="828387"/>
+                  </a:lnTo>
+                  <a:lnTo>
+                    <a:pt x="6119970" y="825525"/>
+                  </a:lnTo>
+                  <a:lnTo>
+                    <a:pt x="6190315" y="822642"/>
+                  </a:lnTo>
+                  <a:lnTo>
+                    <a:pt x="6260659" y="819738"/>
+                  </a:lnTo>
+                  <a:lnTo>
+                    <a:pt x="6331004" y="816814"/>
+                  </a:lnTo>
+                  <a:lnTo>
+                    <a:pt x="6401348" y="813870"/>
+                  </a:lnTo>
+                  <a:lnTo>
+                    <a:pt x="6471693" y="810904"/>
+                  </a:lnTo>
+                  <a:lnTo>
+                    <a:pt x="6542037" y="807918"/>
+                  </a:lnTo>
+                  <a:lnTo>
+                    <a:pt x="6612382" y="804910"/>
+                  </a:lnTo>
+                  <a:lnTo>
+                    <a:pt x="6682726" y="801881"/>
+                  </a:lnTo>
+                  <a:lnTo>
+                    <a:pt x="6753071" y="798830"/>
+                  </a:lnTo>
+                  <a:lnTo>
+                    <a:pt x="6823415" y="795758"/>
+                  </a:lnTo>
+                  <a:lnTo>
+                    <a:pt x="6893760" y="792664"/>
+                  </a:lnTo>
+                  <a:lnTo>
+                    <a:pt x="6964104" y="789548"/>
+                  </a:lnTo>
+                  <a:lnTo>
+                    <a:pt x="6964104" y="1182797"/>
+                  </a:lnTo>
+                  <a:lnTo>
+                    <a:pt x="6893760" y="1181163"/>
+                  </a:lnTo>
+                  <a:lnTo>
+                    <a:pt x="6823415" y="1179476"/>
+                  </a:lnTo>
+                  <a:lnTo>
+                    <a:pt x="6753071" y="1177732"/>
+                  </a:lnTo>
+                  <a:lnTo>
+                    <a:pt x="6682726" y="1175932"/>
+                  </a:lnTo>
+                  <a:lnTo>
+                    <a:pt x="6612382" y="1174072"/>
+                  </a:lnTo>
+                  <a:lnTo>
+                    <a:pt x="6542037" y="1172150"/>
+                  </a:lnTo>
+                  <a:lnTo>
+                    <a:pt x="6471693" y="1170165"/>
+                  </a:lnTo>
+                  <a:lnTo>
+                    <a:pt x="6401348" y="1168115"/>
+                  </a:lnTo>
+                  <a:lnTo>
+                    <a:pt x="6331004" y="1165997"/>
+                  </a:lnTo>
+                  <a:lnTo>
+                    <a:pt x="6260659" y="1163809"/>
+                  </a:lnTo>
+                  <a:lnTo>
+                    <a:pt x="6190315" y="1161548"/>
+                  </a:lnTo>
+                  <a:lnTo>
+                    <a:pt x="6119970" y="1159214"/>
+                  </a:lnTo>
+                  <a:lnTo>
+                    <a:pt x="6049626" y="1156802"/>
+                  </a:lnTo>
+                  <a:lnTo>
+                    <a:pt x="5979281" y="1154310"/>
+                  </a:lnTo>
+                  <a:lnTo>
+                    <a:pt x="5908937" y="1151736"/>
+                  </a:lnTo>
+                  <a:lnTo>
+                    <a:pt x="5838592" y="1149078"/>
+                  </a:lnTo>
+                  <a:lnTo>
+                    <a:pt x="5768248" y="1146331"/>
+                  </a:lnTo>
+                  <a:lnTo>
+                    <a:pt x="5697903" y="1143494"/>
+                  </a:lnTo>
+                  <a:lnTo>
+                    <a:pt x="5627559" y="1140563"/>
+                  </a:lnTo>
+                  <a:lnTo>
+                    <a:pt x="5557214" y="1137536"/>
+                  </a:lnTo>
+                  <a:lnTo>
+                    <a:pt x="5486870" y="1134408"/>
+                  </a:lnTo>
+                  <a:lnTo>
+                    <a:pt x="5416525" y="1131178"/>
+                  </a:lnTo>
+                  <a:lnTo>
+                    <a:pt x="5346181" y="1127841"/>
+                  </a:lnTo>
+                  <a:lnTo>
+                    <a:pt x="5275836" y="1124393"/>
+                  </a:lnTo>
+                  <a:lnTo>
+                    <a:pt x="5205492" y="1120832"/>
+                  </a:lnTo>
+                  <a:lnTo>
+                    <a:pt x="5135147" y="1117153"/>
+                  </a:lnTo>
+                  <a:lnTo>
+                    <a:pt x="5064803" y="1113353"/>
+                  </a:lnTo>
+                  <a:lnTo>
+                    <a:pt x="4994458" y="1109427"/>
+                  </a:lnTo>
+                  <a:lnTo>
+                    <a:pt x="4924114" y="1105372"/>
+                  </a:lnTo>
+                  <a:lnTo>
+                    <a:pt x="4853769" y="1101183"/>
+                  </a:lnTo>
+                  <a:lnTo>
+                    <a:pt x="4783425" y="1096856"/>
+                  </a:lnTo>
+                  <a:lnTo>
+                    <a:pt x="4713080" y="1092386"/>
+                  </a:lnTo>
+                  <a:lnTo>
+                    <a:pt x="4642736" y="1087768"/>
+                  </a:lnTo>
+                  <a:lnTo>
+                    <a:pt x="4572391" y="1082998"/>
+                  </a:lnTo>
+                  <a:lnTo>
+                    <a:pt x="4502047" y="1078071"/>
+                  </a:lnTo>
+                  <a:lnTo>
+                    <a:pt x="4431702" y="1072981"/>
+                  </a:lnTo>
+                  <a:lnTo>
+                    <a:pt x="4361358" y="1067723"/>
+                  </a:lnTo>
+                  <a:lnTo>
+                    <a:pt x="4291013" y="1062291"/>
+                  </a:lnTo>
+                  <a:lnTo>
+                    <a:pt x="4220669" y="1056680"/>
+                  </a:lnTo>
+                  <a:lnTo>
+                    <a:pt x="4150324" y="1050884"/>
+                  </a:lnTo>
+                  <a:lnTo>
+                    <a:pt x="4079980" y="1044897"/>
+                  </a:lnTo>
+                  <a:lnTo>
+                    <a:pt x="4009635" y="1038712"/>
+                  </a:lnTo>
+                  <a:lnTo>
+                    <a:pt x="3939291" y="1032322"/>
+                  </a:lnTo>
+                  <a:lnTo>
+                    <a:pt x="3868946" y="1025722"/>
+                  </a:lnTo>
+                  <a:lnTo>
+                    <a:pt x="3798602" y="1018904"/>
+                  </a:lnTo>
+                  <a:lnTo>
+                    <a:pt x="3728257" y="1011862"/>
+                  </a:lnTo>
+                  <a:lnTo>
+                    <a:pt x="3657913" y="1004586"/>
+                  </a:lnTo>
+                  <a:lnTo>
+                    <a:pt x="3587569" y="997071"/>
+                  </a:lnTo>
+                  <a:lnTo>
+                    <a:pt x="3517224" y="989307"/>
+                  </a:lnTo>
+                  <a:lnTo>
+                    <a:pt x="3446880" y="981287"/>
+                  </a:lnTo>
+                  <a:lnTo>
+                    <a:pt x="3376535" y="973003"/>
+                  </a:lnTo>
+                  <a:lnTo>
+                    <a:pt x="3306191" y="964445"/>
+                  </a:lnTo>
+                  <a:lnTo>
+                    <a:pt x="3235846" y="955604"/>
+                  </a:lnTo>
+                  <a:lnTo>
+                    <a:pt x="3165502" y="946472"/>
+                  </a:lnTo>
+                  <a:lnTo>
+                    <a:pt x="3095157" y="937039"/>
+                  </a:lnTo>
+                  <a:lnTo>
+                    <a:pt x="3024813" y="934172"/>
+                  </a:lnTo>
+                  <a:lnTo>
+                    <a:pt x="2954468" y="936270"/>
+                  </a:lnTo>
+                  <a:lnTo>
+                    <a:pt x="2884124" y="938354"/>
+                  </a:lnTo>
+                  <a:lnTo>
+                    <a:pt x="2813779" y="940422"/>
+                  </a:lnTo>
+                  <a:lnTo>
+                    <a:pt x="2743435" y="942476"/>
+                  </a:lnTo>
+                  <a:lnTo>
+                    <a:pt x="2673090" y="944516"/>
+                  </a:lnTo>
+                  <a:lnTo>
+                    <a:pt x="2602746" y="946541"/>
+                  </a:lnTo>
+                  <a:lnTo>
+                    <a:pt x="2532401" y="948552"/>
+                  </a:lnTo>
+                  <a:lnTo>
+                    <a:pt x="2462057" y="950549"/>
+                  </a:lnTo>
+                  <a:lnTo>
+                    <a:pt x="2391712" y="952532"/>
+                  </a:lnTo>
+                  <a:lnTo>
+                    <a:pt x="2321368" y="954500"/>
+                  </a:lnTo>
+                  <a:lnTo>
+                    <a:pt x="2251023" y="956455"/>
+                  </a:lnTo>
+                  <a:lnTo>
+                    <a:pt x="2180679" y="958397"/>
+                  </a:lnTo>
+                  <a:lnTo>
+                    <a:pt x="2110334" y="960324"/>
+                  </a:lnTo>
+                  <a:lnTo>
+                    <a:pt x="2039990" y="962238"/>
+                  </a:lnTo>
+                  <a:lnTo>
+                    <a:pt x="1969645" y="964139"/>
+                  </a:lnTo>
+                  <a:lnTo>
+                    <a:pt x="1899301" y="966026"/>
+                  </a:lnTo>
+                  <a:lnTo>
+                    <a:pt x="1828956" y="967900"/>
+                  </a:lnTo>
+                  <a:lnTo>
+                    <a:pt x="1758612" y="969760"/>
+                  </a:lnTo>
+                  <a:lnTo>
+                    <a:pt x="1688267" y="971608"/>
+                  </a:lnTo>
+                  <a:lnTo>
+                    <a:pt x="1617923" y="973442"/>
+                  </a:lnTo>
+                  <a:lnTo>
+                    <a:pt x="1547578" y="975264"/>
+                  </a:lnTo>
+                  <a:lnTo>
+                    <a:pt x="1477234" y="977073"/>
+                  </a:lnTo>
+                  <a:lnTo>
+                    <a:pt x="1406889" y="978869"/>
+                  </a:lnTo>
+                  <a:lnTo>
+                    <a:pt x="1336545" y="980653"/>
+                  </a:lnTo>
+                  <a:lnTo>
+                    <a:pt x="1266200" y="982423"/>
+                  </a:lnTo>
+                  <a:lnTo>
+                    <a:pt x="1195856" y="984182"/>
+                  </a:lnTo>
+                  <a:lnTo>
+                    <a:pt x="1125511" y="985928"/>
+                  </a:lnTo>
+                  <a:lnTo>
+                    <a:pt x="1055167" y="987662"/>
+                  </a:lnTo>
+                  <a:lnTo>
+                    <a:pt x="984822" y="989383"/>
+                  </a:lnTo>
+                  <a:lnTo>
+                    <a:pt x="914478" y="991093"/>
+                  </a:lnTo>
+                  <a:lnTo>
+                    <a:pt x="844133" y="992790"/>
+                  </a:lnTo>
+                  <a:lnTo>
+                    <a:pt x="773789" y="994476"/>
+                  </a:lnTo>
+                  <a:lnTo>
+                    <a:pt x="703444" y="996149"/>
+                  </a:lnTo>
+                  <a:lnTo>
+                    <a:pt x="633100" y="997811"/>
+                  </a:lnTo>
+                  <a:lnTo>
+                    <a:pt x="562755" y="999461"/>
+                  </a:lnTo>
+                  <a:lnTo>
+                    <a:pt x="492411" y="1001100"/>
+                  </a:lnTo>
+                  <a:lnTo>
+                    <a:pt x="422066" y="1002727"/>
+                  </a:lnTo>
+                  <a:lnTo>
+                    <a:pt x="351722" y="1004343"/>
+                  </a:lnTo>
+                  <a:lnTo>
+                    <a:pt x="281377" y="1005947"/>
+                  </a:lnTo>
+                  <a:lnTo>
+                    <a:pt x="211033" y="1007540"/>
+                  </a:lnTo>
+                  <a:lnTo>
+                    <a:pt x="140688" y="1009121"/>
+                  </a:lnTo>
+                  <a:lnTo>
+                    <a:pt x="70344" y="1010692"/>
+                  </a:lnTo>
+                  <a:lnTo>
+                    <a:pt x="0" y="1012251"/>
                   </a:lnTo>
                   <a:close/>
                 </a:path>
@@ -3670,643 +3705,318 @@
         </p:sp>
         <p:sp>
           <p:nvSpPr>
-            <p:cNvPr id="23" name="pl23"/>
-            <p:cNvSpPr/>
-            <p:nvPr/>
-          </p:nvSpPr>
-          <p:spPr>
-            <a:xfrm>
-              <a:off x="1172049" y="2142537"/>
-              <a:ext cx="7090630" cy="2582767"/>
-            </a:xfrm>
-            <a:custGeom>
-              <a:avLst/>
-              <a:pathLst>
-                <a:path w="7090630" h="2582767">
-                  <a:moveTo>
-                    <a:pt x="0" y="0"/>
-                  </a:moveTo>
-                  <a:lnTo>
-                    <a:pt x="71622" y="109104"/>
-                  </a:lnTo>
-                  <a:lnTo>
-                    <a:pt x="143245" y="214722"/>
-                  </a:lnTo>
-                  <a:lnTo>
-                    <a:pt x="214867" y="316966"/>
-                  </a:lnTo>
-                  <a:lnTo>
-                    <a:pt x="286490" y="415943"/>
-                  </a:lnTo>
-                  <a:lnTo>
-                    <a:pt x="358112" y="511757"/>
-                  </a:lnTo>
-                  <a:lnTo>
-                    <a:pt x="429735" y="604510"/>
-                  </a:lnTo>
-                  <a:lnTo>
-                    <a:pt x="501357" y="694300"/>
-                  </a:lnTo>
-                  <a:lnTo>
-                    <a:pt x="572980" y="781221"/>
-                  </a:lnTo>
-                  <a:lnTo>
-                    <a:pt x="644602" y="865364"/>
-                  </a:lnTo>
-                  <a:lnTo>
-                    <a:pt x="716225" y="946819"/>
-                  </a:lnTo>
-                  <a:lnTo>
-                    <a:pt x="787847" y="1025671"/>
-                  </a:lnTo>
-                  <a:lnTo>
-                    <a:pt x="859470" y="1102004"/>
-                  </a:lnTo>
-                  <a:lnTo>
-                    <a:pt x="931092" y="1175898"/>
-                  </a:lnTo>
-                  <a:lnTo>
-                    <a:pt x="1002715" y="1247431"/>
-                  </a:lnTo>
-                  <a:lnTo>
-                    <a:pt x="1074337" y="1316678"/>
-                  </a:lnTo>
-                  <a:lnTo>
-                    <a:pt x="1145960" y="1383713"/>
-                  </a:lnTo>
-                  <a:lnTo>
-                    <a:pt x="1217582" y="1448606"/>
-                  </a:lnTo>
-                  <a:lnTo>
-                    <a:pt x="1289205" y="1511426"/>
-                  </a:lnTo>
-                  <a:lnTo>
-                    <a:pt x="1360827" y="1572238"/>
-                  </a:lnTo>
-                  <a:lnTo>
-                    <a:pt x="1432450" y="1631107"/>
-                  </a:lnTo>
-                  <a:lnTo>
-                    <a:pt x="1504073" y="1688096"/>
-                  </a:lnTo>
-                  <a:lnTo>
-                    <a:pt x="1575695" y="1743263"/>
-                  </a:lnTo>
-                  <a:lnTo>
-                    <a:pt x="1647318" y="1796668"/>
-                  </a:lnTo>
-                  <a:lnTo>
-                    <a:pt x="1718940" y="1848367"/>
-                  </a:lnTo>
-                  <a:lnTo>
-                    <a:pt x="1790563" y="1898414"/>
-                  </a:lnTo>
-                  <a:lnTo>
-                    <a:pt x="1862185" y="1946861"/>
-                  </a:lnTo>
-                  <a:lnTo>
-                    <a:pt x="1933808" y="1993761"/>
-                  </a:lnTo>
-                  <a:lnTo>
-                    <a:pt x="2005430" y="2039162"/>
-                  </a:lnTo>
-                  <a:lnTo>
-                    <a:pt x="2077053" y="2083113"/>
-                  </a:lnTo>
-                  <a:lnTo>
-                    <a:pt x="2148675" y="2125659"/>
-                  </a:lnTo>
-                  <a:lnTo>
-                    <a:pt x="2220298" y="2166846"/>
-                  </a:lnTo>
-                  <a:lnTo>
-                    <a:pt x="2291920" y="2206717"/>
-                  </a:lnTo>
-                  <a:lnTo>
-                    <a:pt x="2363543" y="2245314"/>
-                  </a:lnTo>
-                  <a:lnTo>
-                    <a:pt x="2435165" y="2282678"/>
-                  </a:lnTo>
-                  <a:lnTo>
-                    <a:pt x="2506788" y="2318847"/>
-                  </a:lnTo>
-                  <a:lnTo>
-                    <a:pt x="2578410" y="2353862"/>
-                  </a:lnTo>
-                  <a:lnTo>
-                    <a:pt x="2650033" y="2387757"/>
-                  </a:lnTo>
-                  <a:lnTo>
-                    <a:pt x="2721655" y="2420570"/>
-                  </a:lnTo>
-                  <a:lnTo>
-                    <a:pt x="2793278" y="2452334"/>
-                  </a:lnTo>
-                  <a:lnTo>
-                    <a:pt x="2864901" y="2483083"/>
-                  </a:lnTo>
-                  <a:lnTo>
-                    <a:pt x="2936523" y="2512850"/>
-                  </a:lnTo>
-                  <a:lnTo>
-                    <a:pt x="3008146" y="2541665"/>
-                  </a:lnTo>
-                  <a:lnTo>
-                    <a:pt x="3079768" y="2569560"/>
-                  </a:lnTo>
-                  <a:lnTo>
-                    <a:pt x="3151391" y="2582767"/>
-                  </a:lnTo>
-                  <a:lnTo>
-                    <a:pt x="3223013" y="2576870"/>
-                  </a:lnTo>
-                  <a:lnTo>
-                    <a:pt x="3294636" y="2570932"/>
-                  </a:lnTo>
-                  <a:lnTo>
-                    <a:pt x="3366258" y="2564952"/>
-                  </a:lnTo>
-                  <a:lnTo>
-                    <a:pt x="3437881" y="2558929"/>
-                  </a:lnTo>
-                  <a:lnTo>
-                    <a:pt x="3509503" y="2552864"/>
-                  </a:lnTo>
-                  <a:lnTo>
-                    <a:pt x="3581126" y="2546755"/>
-                  </a:lnTo>
-                  <a:lnTo>
-                    <a:pt x="3652748" y="2540604"/>
-                  </a:lnTo>
-                  <a:lnTo>
-                    <a:pt x="3724371" y="2534409"/>
-                  </a:lnTo>
-                  <a:lnTo>
-                    <a:pt x="3795993" y="2528169"/>
-                  </a:lnTo>
-                  <a:lnTo>
-                    <a:pt x="3867616" y="2521886"/>
-                  </a:lnTo>
-                  <a:lnTo>
-                    <a:pt x="3939238" y="2515558"/>
-                  </a:lnTo>
-                  <a:lnTo>
-                    <a:pt x="4010861" y="2509185"/>
-                  </a:lnTo>
-                  <a:lnTo>
-                    <a:pt x="4082483" y="2502768"/>
-                  </a:lnTo>
-                  <a:lnTo>
-                    <a:pt x="4154106" y="2496304"/>
-                  </a:lnTo>
-                  <a:lnTo>
-                    <a:pt x="4225729" y="2489795"/>
-                  </a:lnTo>
-                  <a:lnTo>
-                    <a:pt x="4297351" y="2483240"/>
-                  </a:lnTo>
-                  <a:lnTo>
-                    <a:pt x="4368974" y="2476638"/>
-                  </a:lnTo>
-                  <a:lnTo>
-                    <a:pt x="4440596" y="2469989"/>
-                  </a:lnTo>
-                  <a:lnTo>
-                    <a:pt x="4512219" y="2463294"/>
-                  </a:lnTo>
-                  <a:lnTo>
-                    <a:pt x="4583841" y="2456550"/>
-                  </a:lnTo>
-                  <a:lnTo>
-                    <a:pt x="4655464" y="2449759"/>
-                  </a:lnTo>
-                  <a:lnTo>
-                    <a:pt x="4727086" y="2442920"/>
-                  </a:lnTo>
-                  <a:lnTo>
-                    <a:pt x="4798709" y="2436033"/>
-                  </a:lnTo>
-                  <a:lnTo>
-                    <a:pt x="4870331" y="2429096"/>
-                  </a:lnTo>
-                  <a:lnTo>
-                    <a:pt x="4941954" y="2422111"/>
-                  </a:lnTo>
-                  <a:lnTo>
-                    <a:pt x="5013576" y="2415076"/>
-                  </a:lnTo>
-                  <a:lnTo>
-                    <a:pt x="5085199" y="2407991"/>
-                  </a:lnTo>
-                  <a:lnTo>
-                    <a:pt x="5156821" y="2400856"/>
-                  </a:lnTo>
-                  <a:lnTo>
-                    <a:pt x="5228444" y="2393670"/>
-                  </a:lnTo>
-                  <a:lnTo>
-                    <a:pt x="5300066" y="2386433"/>
-                  </a:lnTo>
-                  <a:lnTo>
-                    <a:pt x="5371689" y="2379146"/>
-                  </a:lnTo>
-                  <a:lnTo>
-                    <a:pt x="5443311" y="2371806"/>
-                  </a:lnTo>
-                  <a:lnTo>
-                    <a:pt x="5514934" y="2364414"/>
-                  </a:lnTo>
-                  <a:lnTo>
-                    <a:pt x="5586557" y="2356970"/>
-                  </a:lnTo>
-                  <a:lnTo>
-                    <a:pt x="5658179" y="2349474"/>
-                  </a:lnTo>
-                  <a:lnTo>
-                    <a:pt x="5729802" y="2341924"/>
-                  </a:lnTo>
-                  <a:lnTo>
-                    <a:pt x="5801424" y="2334321"/>
-                  </a:lnTo>
-                  <a:lnTo>
-                    <a:pt x="5873047" y="2326663"/>
-                  </a:lnTo>
-                  <a:lnTo>
-                    <a:pt x="5944669" y="2318952"/>
-                  </a:lnTo>
-                  <a:lnTo>
-                    <a:pt x="6016292" y="2311186"/>
-                  </a:lnTo>
-                  <a:lnTo>
-                    <a:pt x="6087914" y="2303364"/>
-                  </a:lnTo>
-                  <a:lnTo>
-                    <a:pt x="6159537" y="2295488"/>
-                  </a:lnTo>
-                  <a:lnTo>
-                    <a:pt x="6231159" y="2287555"/>
-                  </a:lnTo>
-                  <a:lnTo>
-                    <a:pt x="6302782" y="2279566"/>
-                  </a:lnTo>
-                  <a:lnTo>
-                    <a:pt x="6374404" y="2271521"/>
-                  </a:lnTo>
-                  <a:lnTo>
-                    <a:pt x="6446027" y="2263419"/>
-                  </a:lnTo>
-                  <a:lnTo>
-                    <a:pt x="6517649" y="2255259"/>
-                  </a:lnTo>
-                  <a:lnTo>
-                    <a:pt x="6589272" y="2247041"/>
-                  </a:lnTo>
-                  <a:lnTo>
-                    <a:pt x="6660894" y="2238766"/>
-                  </a:lnTo>
-                  <a:lnTo>
-                    <a:pt x="6732517" y="2230431"/>
-                  </a:lnTo>
-                  <a:lnTo>
-                    <a:pt x="6804139" y="2222038"/>
-                  </a:lnTo>
-                  <a:lnTo>
-                    <a:pt x="6875762" y="2213584"/>
-                  </a:lnTo>
-                  <a:lnTo>
-                    <a:pt x="6947385" y="2205071"/>
-                  </a:lnTo>
-                  <a:lnTo>
-                    <a:pt x="7019007" y="2196498"/>
-                  </a:lnTo>
-                  <a:lnTo>
-                    <a:pt x="7090630" y="2187864"/>
-                  </a:lnTo>
-                </a:path>
-              </a:pathLst>
-            </a:custGeom>
-          </p:spPr>
-          <p:txBody>
-            <a:bodyPr/>
-            <a:lstStyle/>
-            <a:p/>
-          </p:txBody>
-        </p:sp>
-        <p:sp>
-          <p:nvSpPr>
             <p:cNvPr id="24" name="pl24"/>
             <p:cNvSpPr/>
             <p:nvPr/>
           </p:nvSpPr>
           <p:spPr>
             <a:xfrm>
-              <a:off x="1172049" y="4731159"/>
-              <a:ext cx="7090630" cy="688945"/>
+              <a:off x="1235312" y="2168005"/>
+              <a:ext cx="6964104" cy="932059"/>
             </a:xfrm>
             <a:custGeom>
               <a:avLst/>
               <a:pathLst>
-                <a:path w="7090630" h="688945">
+                <a:path w="6964104" h="932059">
                   <a:moveTo>
-                    <a:pt x="7090630" y="688945"/>
+                    <a:pt x="0" y="0"/>
                   </a:moveTo>
                   <a:lnTo>
-                    <a:pt x="7019007" y="684419"/>
-                  </a:lnTo>
-                  <a:lnTo>
-                    <a:pt x="6947385" y="679743"/>
-                  </a:lnTo>
-                  <a:lnTo>
-                    <a:pt x="6875762" y="674912"/>
-                  </a:lnTo>
-                  <a:lnTo>
-                    <a:pt x="6804139" y="669923"/>
-                  </a:lnTo>
-                  <a:lnTo>
-                    <a:pt x="6732517" y="664768"/>
-                  </a:lnTo>
-                  <a:lnTo>
-                    <a:pt x="6660894" y="659444"/>
-                  </a:lnTo>
-                  <a:lnTo>
-                    <a:pt x="6589272" y="653943"/>
-                  </a:lnTo>
-                  <a:lnTo>
-                    <a:pt x="6517649" y="648261"/>
-                  </a:lnTo>
-                  <a:lnTo>
-                    <a:pt x="6446027" y="642392"/>
-                  </a:lnTo>
-                  <a:lnTo>
-                    <a:pt x="6374404" y="636329"/>
-                  </a:lnTo>
-                  <a:lnTo>
-                    <a:pt x="6302782" y="630066"/>
-                  </a:lnTo>
-                  <a:lnTo>
-                    <a:pt x="6231159" y="623596"/>
-                  </a:lnTo>
-                  <a:lnTo>
-                    <a:pt x="6159537" y="616912"/>
-                  </a:lnTo>
-                  <a:lnTo>
-                    <a:pt x="6087914" y="610008"/>
-                  </a:lnTo>
-                  <a:lnTo>
-                    <a:pt x="6016292" y="602876"/>
-                  </a:lnTo>
-                  <a:lnTo>
-                    <a:pt x="5944669" y="595509"/>
-                  </a:lnTo>
-                  <a:lnTo>
-                    <a:pt x="5873047" y="587898"/>
-                  </a:lnTo>
-                  <a:lnTo>
-                    <a:pt x="5801424" y="580037"/>
-                  </a:lnTo>
-                  <a:lnTo>
-                    <a:pt x="5729802" y="571915"/>
-                  </a:lnTo>
-                  <a:lnTo>
-                    <a:pt x="5658179" y="563526"/>
-                  </a:lnTo>
-                  <a:lnTo>
-                    <a:pt x="5586557" y="554860"/>
-                  </a:lnTo>
-                  <a:lnTo>
-                    <a:pt x="5514934" y="545908"/>
-                  </a:lnTo>
-                  <a:lnTo>
-                    <a:pt x="5443311" y="536660"/>
-                  </a:lnTo>
-                  <a:lnTo>
-                    <a:pt x="5371689" y="527107"/>
-                  </a:lnTo>
-                  <a:lnTo>
-                    <a:pt x="5300066" y="517239"/>
-                  </a:lnTo>
-                  <a:lnTo>
-                    <a:pt x="5228444" y="507045"/>
-                  </a:lnTo>
-                  <a:lnTo>
-                    <a:pt x="5156821" y="496515"/>
-                  </a:lnTo>
-                  <a:lnTo>
-                    <a:pt x="5085199" y="485637"/>
-                  </a:lnTo>
-                  <a:lnTo>
-                    <a:pt x="5013576" y="474400"/>
-                  </a:lnTo>
-                  <a:lnTo>
-                    <a:pt x="4941954" y="462792"/>
-                  </a:lnTo>
-                  <a:lnTo>
-                    <a:pt x="4870331" y="450801"/>
-                  </a:lnTo>
-                  <a:lnTo>
-                    <a:pt x="4798709" y="438415"/>
-                  </a:lnTo>
-                  <a:lnTo>
-                    <a:pt x="4727086" y="425619"/>
-                  </a:lnTo>
-                  <a:lnTo>
-                    <a:pt x="4655464" y="412401"/>
-                  </a:lnTo>
-                  <a:lnTo>
-                    <a:pt x="4583841" y="398747"/>
-                  </a:lnTo>
-                  <a:lnTo>
-                    <a:pt x="4512219" y="384642"/>
-                  </a:lnTo>
-                  <a:lnTo>
-                    <a:pt x="4440596" y="370072"/>
-                  </a:lnTo>
-                  <a:lnTo>
-                    <a:pt x="4368974" y="355021"/>
-                  </a:lnTo>
-                  <a:lnTo>
-                    <a:pt x="4297351" y="339473"/>
-                  </a:lnTo>
-                  <a:lnTo>
-                    <a:pt x="4225729" y="323412"/>
-                  </a:lnTo>
-                  <a:lnTo>
-                    <a:pt x="4154106" y="306820"/>
-                  </a:lnTo>
-                  <a:lnTo>
-                    <a:pt x="4082483" y="289681"/>
-                  </a:lnTo>
-                  <a:lnTo>
-                    <a:pt x="4010861" y="271977"/>
-                  </a:lnTo>
-                  <a:lnTo>
-                    <a:pt x="3939238" y="253688"/>
-                  </a:lnTo>
-                  <a:lnTo>
-                    <a:pt x="3867616" y="234795"/>
-                  </a:lnTo>
-                  <a:lnTo>
-                    <a:pt x="3795993" y="215279"/>
-                  </a:lnTo>
-                  <a:lnTo>
-                    <a:pt x="3724371" y="195119"/>
-                  </a:lnTo>
-                  <a:lnTo>
-                    <a:pt x="3652748" y="174293"/>
-                  </a:lnTo>
-                  <a:lnTo>
-                    <a:pt x="3581126" y="152780"/>
-                  </a:lnTo>
-                  <a:lnTo>
-                    <a:pt x="3509503" y="130557"/>
-                  </a:lnTo>
-                  <a:lnTo>
-                    <a:pt x="3437881" y="107600"/>
-                  </a:lnTo>
-                  <a:lnTo>
-                    <a:pt x="3366258" y="83886"/>
-                  </a:lnTo>
-                  <a:lnTo>
-                    <a:pt x="3294636" y="59388"/>
-                  </a:lnTo>
-                  <a:lnTo>
-                    <a:pt x="3223013" y="34083"/>
-                  </a:lnTo>
-                  <a:lnTo>
-                    <a:pt x="3151391" y="7942"/>
-                  </a:lnTo>
-                  <a:lnTo>
-                    <a:pt x="3079768" y="0"/>
-                  </a:lnTo>
-                  <a:lnTo>
-                    <a:pt x="3008146" y="5813"/>
-                  </a:lnTo>
-                  <a:lnTo>
-                    <a:pt x="2936523" y="11586"/>
-                  </a:lnTo>
-                  <a:lnTo>
-                    <a:pt x="2864901" y="17318"/>
-                  </a:lnTo>
-                  <a:lnTo>
-                    <a:pt x="2793278" y="23010"/>
-                  </a:lnTo>
-                  <a:lnTo>
-                    <a:pt x="2721655" y="28662"/>
-                  </a:lnTo>
-                  <a:lnTo>
-                    <a:pt x="2650033" y="34274"/>
-                  </a:lnTo>
-                  <a:lnTo>
-                    <a:pt x="2578410" y="39846"/>
-                  </a:lnTo>
-                  <a:lnTo>
-                    <a:pt x="2506788" y="45379"/>
-                  </a:lnTo>
-                  <a:lnTo>
-                    <a:pt x="2435165" y="50874"/>
-                  </a:lnTo>
-                  <a:lnTo>
-                    <a:pt x="2363543" y="56329"/>
-                  </a:lnTo>
-                  <a:lnTo>
-                    <a:pt x="2291920" y="61747"/>
-                  </a:lnTo>
-                  <a:lnTo>
-                    <a:pt x="2220298" y="67126"/>
-                  </a:lnTo>
-                  <a:lnTo>
-                    <a:pt x="2148675" y="72467"/>
-                  </a:lnTo>
-                  <a:lnTo>
-                    <a:pt x="2077053" y="77771"/>
-                  </a:lnTo>
-                  <a:lnTo>
-                    <a:pt x="2005430" y="83037"/>
-                  </a:lnTo>
-                  <a:lnTo>
-                    <a:pt x="1933808" y="88267"/>
-                  </a:lnTo>
-                  <a:lnTo>
-                    <a:pt x="1862185" y="93459"/>
-                  </a:lnTo>
-                  <a:lnTo>
-                    <a:pt x="1790563" y="98615"/>
-                  </a:lnTo>
-                  <a:lnTo>
-                    <a:pt x="1718940" y="103735"/>
-                  </a:lnTo>
-                  <a:lnTo>
-                    <a:pt x="1647318" y="108818"/>
-                  </a:lnTo>
-                  <a:lnTo>
-                    <a:pt x="1575695" y="113866"/>
-                  </a:lnTo>
-                  <a:lnTo>
-                    <a:pt x="1504073" y="118879"/>
-                  </a:lnTo>
-                  <a:lnTo>
-                    <a:pt x="1432450" y="123856"/>
-                  </a:lnTo>
-                  <a:lnTo>
-                    <a:pt x="1360827" y="128798"/>
-                  </a:lnTo>
-                  <a:lnTo>
-                    <a:pt x="1289205" y="133705"/>
-                  </a:lnTo>
-                  <a:lnTo>
-                    <a:pt x="1217582" y="138578"/>
-                  </a:lnTo>
-                  <a:lnTo>
-                    <a:pt x="1145960" y="143416"/>
-                  </a:lnTo>
-                  <a:lnTo>
-                    <a:pt x="1074337" y="148221"/>
-                  </a:lnTo>
-                  <a:lnTo>
-                    <a:pt x="1002715" y="152991"/>
-                  </a:lnTo>
-                  <a:lnTo>
-                    <a:pt x="931092" y="157728"/>
-                  </a:lnTo>
-                  <a:lnTo>
-                    <a:pt x="859470" y="162432"/>
-                  </a:lnTo>
-                  <a:lnTo>
-                    <a:pt x="787847" y="167102"/>
-                  </a:lnTo>
-                  <a:lnTo>
-                    <a:pt x="716225" y="171740"/>
-                  </a:lnTo>
-                  <a:lnTo>
-                    <a:pt x="644602" y="176345"/>
-                  </a:lnTo>
-                  <a:lnTo>
-                    <a:pt x="572980" y="180918"/>
-                  </a:lnTo>
-                  <a:lnTo>
-                    <a:pt x="501357" y="185458"/>
-                  </a:lnTo>
-                  <a:lnTo>
-                    <a:pt x="429735" y="189967"/>
-                  </a:lnTo>
-                  <a:lnTo>
-                    <a:pt x="358112" y="194443"/>
-                  </a:lnTo>
-                  <a:lnTo>
-                    <a:pt x="286490" y="198889"/>
-                  </a:lnTo>
-                  <a:lnTo>
-                    <a:pt x="214867" y="203303"/>
-                  </a:lnTo>
-                  <a:lnTo>
-                    <a:pt x="143245" y="207686"/>
-                  </a:lnTo>
-                  <a:lnTo>
-                    <a:pt x="71622" y="212038"/>
-                  </a:lnTo>
-                  <a:lnTo>
-                    <a:pt x="0" y="216359"/>
+                    <a:pt x="70344" y="39373"/>
+                  </a:lnTo>
+                  <a:lnTo>
+                    <a:pt x="140688" y="77488"/>
+                  </a:lnTo>
+                  <a:lnTo>
+                    <a:pt x="211033" y="114385"/>
+                  </a:lnTo>
+                  <a:lnTo>
+                    <a:pt x="281377" y="150104"/>
+                  </a:lnTo>
+                  <a:lnTo>
+                    <a:pt x="351722" y="184681"/>
+                  </a:lnTo>
+                  <a:lnTo>
+                    <a:pt x="422066" y="218153"/>
+                  </a:lnTo>
+                  <a:lnTo>
+                    <a:pt x="492411" y="250556"/>
+                  </a:lnTo>
+                  <a:lnTo>
+                    <a:pt x="562755" y="281924"/>
+                  </a:lnTo>
+                  <a:lnTo>
+                    <a:pt x="633100" y="312289"/>
+                  </a:lnTo>
+                  <a:lnTo>
+                    <a:pt x="703444" y="341684"/>
+                  </a:lnTo>
+                  <a:lnTo>
+                    <a:pt x="773789" y="370140"/>
+                  </a:lnTo>
+                  <a:lnTo>
+                    <a:pt x="844133" y="397687"/>
+                  </a:lnTo>
+                  <a:lnTo>
+                    <a:pt x="914478" y="424354"/>
+                  </a:lnTo>
+                  <a:lnTo>
+                    <a:pt x="984822" y="450168"/>
+                  </a:lnTo>
+                  <a:lnTo>
+                    <a:pt x="1055167" y="475158"/>
+                  </a:lnTo>
+                  <a:lnTo>
+                    <a:pt x="1125511" y="499349"/>
+                  </a:lnTo>
+                  <a:lnTo>
+                    <a:pt x="1195856" y="522768"/>
+                  </a:lnTo>
+                  <a:lnTo>
+                    <a:pt x="1266200" y="545438"/>
+                  </a:lnTo>
+                  <a:lnTo>
+                    <a:pt x="1336545" y="567383"/>
+                  </a:lnTo>
+                  <a:lnTo>
+                    <a:pt x="1406889" y="588628"/>
+                  </a:lnTo>
+                  <a:lnTo>
+                    <a:pt x="1477234" y="609194"/>
+                  </a:lnTo>
+                  <a:lnTo>
+                    <a:pt x="1547578" y="629102"/>
+                  </a:lnTo>
+                  <a:lnTo>
+                    <a:pt x="1617923" y="648375"/>
+                  </a:lnTo>
+                  <a:lnTo>
+                    <a:pt x="1688267" y="667032"/>
+                  </a:lnTo>
+                  <a:lnTo>
+                    <a:pt x="1758612" y="685092"/>
+                  </a:lnTo>
+                  <a:lnTo>
+                    <a:pt x="1828956" y="702576"/>
+                  </a:lnTo>
+                  <a:lnTo>
+                    <a:pt x="1899301" y="719501"/>
+                  </a:lnTo>
+                  <a:lnTo>
+                    <a:pt x="1969645" y="735885"/>
+                  </a:lnTo>
+                  <a:lnTo>
+                    <a:pt x="2039990" y="751746"/>
+                  </a:lnTo>
+                  <a:lnTo>
+                    <a:pt x="2110334" y="767100"/>
+                  </a:lnTo>
+                  <a:lnTo>
+                    <a:pt x="2180679" y="781963"/>
+                  </a:lnTo>
+                  <a:lnTo>
+                    <a:pt x="2251023" y="796352"/>
+                  </a:lnTo>
+                  <a:lnTo>
+                    <a:pt x="2321368" y="810281"/>
+                  </a:lnTo>
+                  <a:lnTo>
+                    <a:pt x="2391712" y="823764"/>
+                  </a:lnTo>
+                  <a:lnTo>
+                    <a:pt x="2462057" y="836817"/>
+                  </a:lnTo>
+                  <a:lnTo>
+                    <a:pt x="2532401" y="849453"/>
+                  </a:lnTo>
+                  <a:lnTo>
+                    <a:pt x="2602746" y="861685"/>
+                  </a:lnTo>
+                  <a:lnTo>
+                    <a:pt x="2673090" y="873526"/>
+                  </a:lnTo>
+                  <a:lnTo>
+                    <a:pt x="2743435" y="884989"/>
+                  </a:lnTo>
+                  <a:lnTo>
+                    <a:pt x="2813779" y="896086"/>
+                  </a:lnTo>
+                  <a:lnTo>
+                    <a:pt x="2884124" y="906828"/>
+                  </a:lnTo>
+                  <a:lnTo>
+                    <a:pt x="2954468" y="917227"/>
+                  </a:lnTo>
+                  <a:lnTo>
+                    <a:pt x="3024813" y="927294"/>
+                  </a:lnTo>
+                  <a:lnTo>
+                    <a:pt x="3095157" y="932059"/>
+                  </a:lnTo>
+                  <a:lnTo>
+                    <a:pt x="3165502" y="929932"/>
+                  </a:lnTo>
+                  <a:lnTo>
+                    <a:pt x="3235846" y="927789"/>
+                  </a:lnTo>
+                  <a:lnTo>
+                    <a:pt x="3306191" y="925630"/>
+                  </a:lnTo>
+                  <a:lnTo>
+                    <a:pt x="3376535" y="923457"/>
+                  </a:lnTo>
+                  <a:lnTo>
+                    <a:pt x="3446880" y="921268"/>
+                  </a:lnTo>
+                  <a:lnTo>
+                    <a:pt x="3517224" y="919064"/>
+                  </a:lnTo>
+                  <a:lnTo>
+                    <a:pt x="3587569" y="916844"/>
+                  </a:lnTo>
+                  <a:lnTo>
+                    <a:pt x="3657913" y="914608"/>
+                  </a:lnTo>
+                  <a:lnTo>
+                    <a:pt x="3728257" y="912357"/>
+                  </a:lnTo>
+                  <a:lnTo>
+                    <a:pt x="3798602" y="910089"/>
+                  </a:lnTo>
+                  <a:lnTo>
+                    <a:pt x="3868946" y="907805"/>
+                  </a:lnTo>
+                  <a:lnTo>
+                    <a:pt x="3939291" y="905506"/>
+                  </a:lnTo>
+                  <a:lnTo>
+                    <a:pt x="4009635" y="903190"/>
+                  </a:lnTo>
+                  <a:lnTo>
+                    <a:pt x="4079980" y="900857"/>
+                  </a:lnTo>
+                  <a:lnTo>
+                    <a:pt x="4150324" y="898508"/>
+                  </a:lnTo>
+                  <a:lnTo>
+                    <a:pt x="4220669" y="896142"/>
+                  </a:lnTo>
+                  <a:lnTo>
+                    <a:pt x="4291013" y="893760"/>
+                  </a:lnTo>
+                  <a:lnTo>
+                    <a:pt x="4361358" y="891361"/>
+                  </a:lnTo>
+                  <a:lnTo>
+                    <a:pt x="4431702" y="888944"/>
+                  </a:lnTo>
+                  <a:lnTo>
+                    <a:pt x="4502047" y="886511"/>
+                  </a:lnTo>
+                  <a:lnTo>
+                    <a:pt x="4572391" y="884060"/>
+                  </a:lnTo>
+                  <a:lnTo>
+                    <a:pt x="4642736" y="881592"/>
+                  </a:lnTo>
+                  <a:lnTo>
+                    <a:pt x="4713080" y="879107"/>
+                  </a:lnTo>
+                  <a:lnTo>
+                    <a:pt x="4783425" y="876603"/>
+                  </a:lnTo>
+                  <a:lnTo>
+                    <a:pt x="4853769" y="874083"/>
+                  </a:lnTo>
+                  <a:lnTo>
+                    <a:pt x="4924114" y="871544"/>
+                  </a:lnTo>
+                  <a:lnTo>
+                    <a:pt x="4994458" y="868987"/>
+                  </a:lnTo>
+                  <a:lnTo>
+                    <a:pt x="5064803" y="866412"/>
+                  </a:lnTo>
+                  <a:lnTo>
+                    <a:pt x="5135147" y="863819"/>
+                  </a:lnTo>
+                  <a:lnTo>
+                    <a:pt x="5205492" y="861207"/>
+                  </a:lnTo>
+                  <a:lnTo>
+                    <a:pt x="5275836" y="858577"/>
+                  </a:lnTo>
+                  <a:lnTo>
+                    <a:pt x="5346181" y="855929"/>
+                  </a:lnTo>
+                  <a:lnTo>
+                    <a:pt x="5416525" y="853261"/>
+                  </a:lnTo>
+                  <a:lnTo>
+                    <a:pt x="5486870" y="850575"/>
+                  </a:lnTo>
+                  <a:lnTo>
+                    <a:pt x="5557214" y="847869"/>
+                  </a:lnTo>
+                  <a:lnTo>
+                    <a:pt x="5627559" y="845145"/>
+                  </a:lnTo>
+                  <a:lnTo>
+                    <a:pt x="5697903" y="842401"/>
+                  </a:lnTo>
+                  <a:lnTo>
+                    <a:pt x="5768248" y="839638"/>
+                  </a:lnTo>
+                  <a:lnTo>
+                    <a:pt x="5838592" y="836855"/>
+                  </a:lnTo>
+                  <a:lnTo>
+                    <a:pt x="5908937" y="834052"/>
+                  </a:lnTo>
+                  <a:lnTo>
+                    <a:pt x="5979281" y="831230"/>
+                  </a:lnTo>
+                  <a:lnTo>
+                    <a:pt x="6049626" y="828387"/>
+                  </a:lnTo>
+                  <a:lnTo>
+                    <a:pt x="6119970" y="825525"/>
+                  </a:lnTo>
+                  <a:lnTo>
+                    <a:pt x="6190315" y="822642"/>
+                  </a:lnTo>
+                  <a:lnTo>
+                    <a:pt x="6260659" y="819738"/>
+                  </a:lnTo>
+                  <a:lnTo>
+                    <a:pt x="6331004" y="816814"/>
+                  </a:lnTo>
+                  <a:lnTo>
+                    <a:pt x="6401348" y="813870"/>
+                  </a:lnTo>
+                  <a:lnTo>
+                    <a:pt x="6471693" y="810904"/>
+                  </a:lnTo>
+                  <a:lnTo>
+                    <a:pt x="6542037" y="807918"/>
+                  </a:lnTo>
+                  <a:lnTo>
+                    <a:pt x="6612382" y="804910"/>
+                  </a:lnTo>
+                  <a:lnTo>
+                    <a:pt x="6682726" y="801881"/>
+                  </a:lnTo>
+                  <a:lnTo>
+                    <a:pt x="6753071" y="798830"/>
+                  </a:lnTo>
+                  <a:lnTo>
+                    <a:pt x="6823415" y="795758"/>
+                  </a:lnTo>
+                  <a:lnTo>
+                    <a:pt x="6893760" y="792664"/>
+                  </a:lnTo>
+                  <a:lnTo>
+                    <a:pt x="6964104" y="789548"/>
                   </a:lnTo>
                 </a:path>
               </a:pathLst>
@@ -4326,312 +4036,637 @@
           </p:nvSpPr>
           <p:spPr>
             <a:xfrm>
-              <a:off x="1172049" y="4114317"/>
-              <a:ext cx="7090630" cy="1032742"/>
+              <a:off x="1235312" y="3102177"/>
+              <a:ext cx="6964104" cy="248624"/>
             </a:xfrm>
             <a:custGeom>
               <a:avLst/>
               <a:pathLst>
-                <a:path w="7090630" h="1032742">
+                <a:path w="6964104" h="248624">
+                  <a:moveTo>
+                    <a:pt x="6964104" y="248624"/>
+                  </a:moveTo>
+                  <a:lnTo>
+                    <a:pt x="6893760" y="246990"/>
+                  </a:lnTo>
+                  <a:lnTo>
+                    <a:pt x="6823415" y="245303"/>
+                  </a:lnTo>
+                  <a:lnTo>
+                    <a:pt x="6753071" y="243560"/>
+                  </a:lnTo>
+                  <a:lnTo>
+                    <a:pt x="6682726" y="241759"/>
+                  </a:lnTo>
+                  <a:lnTo>
+                    <a:pt x="6612382" y="239899"/>
+                  </a:lnTo>
+                  <a:lnTo>
+                    <a:pt x="6542037" y="237977"/>
+                  </a:lnTo>
+                  <a:lnTo>
+                    <a:pt x="6471693" y="235992"/>
+                  </a:lnTo>
+                  <a:lnTo>
+                    <a:pt x="6401348" y="233942"/>
+                  </a:lnTo>
+                  <a:lnTo>
+                    <a:pt x="6331004" y="231824"/>
+                  </a:lnTo>
+                  <a:lnTo>
+                    <a:pt x="6260659" y="229636"/>
+                  </a:lnTo>
+                  <a:lnTo>
+                    <a:pt x="6190315" y="227376"/>
+                  </a:lnTo>
+                  <a:lnTo>
+                    <a:pt x="6119970" y="225041"/>
+                  </a:lnTo>
+                  <a:lnTo>
+                    <a:pt x="6049626" y="222629"/>
+                  </a:lnTo>
+                  <a:lnTo>
+                    <a:pt x="5979281" y="220137"/>
+                  </a:lnTo>
+                  <a:lnTo>
+                    <a:pt x="5908937" y="217564"/>
+                  </a:lnTo>
+                  <a:lnTo>
+                    <a:pt x="5838592" y="214905"/>
+                  </a:lnTo>
+                  <a:lnTo>
+                    <a:pt x="5768248" y="212158"/>
+                  </a:lnTo>
+                  <a:lnTo>
+                    <a:pt x="5697903" y="209321"/>
+                  </a:lnTo>
+                  <a:lnTo>
+                    <a:pt x="5627559" y="206391"/>
+                  </a:lnTo>
+                  <a:lnTo>
+                    <a:pt x="5557214" y="203363"/>
+                  </a:lnTo>
+                  <a:lnTo>
+                    <a:pt x="5486870" y="200236"/>
+                  </a:lnTo>
+                  <a:lnTo>
+                    <a:pt x="5416525" y="197005"/>
+                  </a:lnTo>
+                  <a:lnTo>
+                    <a:pt x="5346181" y="193668"/>
+                  </a:lnTo>
+                  <a:lnTo>
+                    <a:pt x="5275836" y="190220"/>
+                  </a:lnTo>
+                  <a:lnTo>
+                    <a:pt x="5205492" y="186659"/>
+                  </a:lnTo>
+                  <a:lnTo>
+                    <a:pt x="5135147" y="182980"/>
+                  </a:lnTo>
+                  <a:lnTo>
+                    <a:pt x="5064803" y="179180"/>
+                  </a:lnTo>
+                  <a:lnTo>
+                    <a:pt x="4994458" y="175255"/>
+                  </a:lnTo>
+                  <a:lnTo>
+                    <a:pt x="4924114" y="171200"/>
+                  </a:lnTo>
+                  <a:lnTo>
+                    <a:pt x="4853769" y="167011"/>
+                  </a:lnTo>
+                  <a:lnTo>
+                    <a:pt x="4783425" y="162683"/>
+                  </a:lnTo>
+                  <a:lnTo>
+                    <a:pt x="4713080" y="158213"/>
+                  </a:lnTo>
+                  <a:lnTo>
+                    <a:pt x="4642736" y="153596"/>
+                  </a:lnTo>
+                  <a:lnTo>
+                    <a:pt x="4572391" y="148826"/>
+                  </a:lnTo>
+                  <a:lnTo>
+                    <a:pt x="4502047" y="143898"/>
+                  </a:lnTo>
+                  <a:lnTo>
+                    <a:pt x="4431702" y="138808"/>
+                  </a:lnTo>
+                  <a:lnTo>
+                    <a:pt x="4361358" y="133550"/>
+                  </a:lnTo>
+                  <a:lnTo>
+                    <a:pt x="4291013" y="128118"/>
+                  </a:lnTo>
+                  <a:lnTo>
+                    <a:pt x="4220669" y="122507"/>
+                  </a:lnTo>
+                  <a:lnTo>
+                    <a:pt x="4150324" y="116711"/>
+                  </a:lnTo>
+                  <a:lnTo>
+                    <a:pt x="4079980" y="110724"/>
+                  </a:lnTo>
+                  <a:lnTo>
+                    <a:pt x="4009635" y="104539"/>
+                  </a:lnTo>
+                  <a:lnTo>
+                    <a:pt x="3939291" y="98150"/>
+                  </a:lnTo>
+                  <a:lnTo>
+                    <a:pt x="3868946" y="91550"/>
+                  </a:lnTo>
+                  <a:lnTo>
+                    <a:pt x="3798602" y="84732"/>
+                  </a:lnTo>
+                  <a:lnTo>
+                    <a:pt x="3728257" y="77689"/>
+                  </a:lnTo>
+                  <a:lnTo>
+                    <a:pt x="3657913" y="70413"/>
+                  </a:lnTo>
+                  <a:lnTo>
+                    <a:pt x="3587569" y="62898"/>
+                  </a:lnTo>
+                  <a:lnTo>
+                    <a:pt x="3517224" y="55134"/>
+                  </a:lnTo>
+                  <a:lnTo>
+                    <a:pt x="3446880" y="47114"/>
+                  </a:lnTo>
+                  <a:lnTo>
+                    <a:pt x="3376535" y="38830"/>
+                  </a:lnTo>
+                  <a:lnTo>
+                    <a:pt x="3306191" y="30272"/>
+                  </a:lnTo>
+                  <a:lnTo>
+                    <a:pt x="3235846" y="21432"/>
+                  </a:lnTo>
+                  <a:lnTo>
+                    <a:pt x="3165502" y="12299"/>
+                  </a:lnTo>
+                  <a:lnTo>
+                    <a:pt x="3095157" y="2866"/>
+                  </a:lnTo>
+                  <a:lnTo>
+                    <a:pt x="3024813" y="0"/>
+                  </a:lnTo>
+                  <a:lnTo>
+                    <a:pt x="2954468" y="2098"/>
+                  </a:lnTo>
+                  <a:lnTo>
+                    <a:pt x="2884124" y="4181"/>
+                  </a:lnTo>
+                  <a:lnTo>
+                    <a:pt x="2813779" y="6249"/>
+                  </a:lnTo>
+                  <a:lnTo>
+                    <a:pt x="2743435" y="8303"/>
+                  </a:lnTo>
+                  <a:lnTo>
+                    <a:pt x="2673090" y="10343"/>
+                  </a:lnTo>
+                  <a:lnTo>
+                    <a:pt x="2602746" y="12368"/>
+                  </a:lnTo>
+                  <a:lnTo>
+                    <a:pt x="2532401" y="14379"/>
+                  </a:lnTo>
+                  <a:lnTo>
+                    <a:pt x="2462057" y="16376"/>
+                  </a:lnTo>
+                  <a:lnTo>
+                    <a:pt x="2391712" y="18359"/>
+                  </a:lnTo>
+                  <a:lnTo>
+                    <a:pt x="2321368" y="20328"/>
+                  </a:lnTo>
+                  <a:lnTo>
+                    <a:pt x="2251023" y="22283"/>
+                  </a:lnTo>
+                  <a:lnTo>
+                    <a:pt x="2180679" y="24224"/>
+                  </a:lnTo>
+                  <a:lnTo>
+                    <a:pt x="2110334" y="26151"/>
+                  </a:lnTo>
+                  <a:lnTo>
+                    <a:pt x="2039990" y="28065"/>
+                  </a:lnTo>
+                  <a:lnTo>
+                    <a:pt x="1969645" y="29966"/>
+                  </a:lnTo>
+                  <a:lnTo>
+                    <a:pt x="1899301" y="31853"/>
+                  </a:lnTo>
+                  <a:lnTo>
+                    <a:pt x="1828956" y="33727"/>
+                  </a:lnTo>
+                  <a:lnTo>
+                    <a:pt x="1758612" y="35588"/>
+                  </a:lnTo>
+                  <a:lnTo>
+                    <a:pt x="1688267" y="37435"/>
+                  </a:lnTo>
+                  <a:lnTo>
+                    <a:pt x="1617923" y="39270"/>
+                  </a:lnTo>
+                  <a:lnTo>
+                    <a:pt x="1547578" y="41091"/>
+                  </a:lnTo>
+                  <a:lnTo>
+                    <a:pt x="1477234" y="42900"/>
+                  </a:lnTo>
+                  <a:lnTo>
+                    <a:pt x="1406889" y="44696"/>
+                  </a:lnTo>
+                  <a:lnTo>
+                    <a:pt x="1336545" y="46480"/>
+                  </a:lnTo>
+                  <a:lnTo>
+                    <a:pt x="1266200" y="48251"/>
+                  </a:lnTo>
+                  <a:lnTo>
+                    <a:pt x="1195856" y="50009"/>
+                  </a:lnTo>
+                  <a:lnTo>
+                    <a:pt x="1125511" y="51755"/>
+                  </a:lnTo>
+                  <a:lnTo>
+                    <a:pt x="1055167" y="53489"/>
+                  </a:lnTo>
+                  <a:lnTo>
+                    <a:pt x="984822" y="55211"/>
+                  </a:lnTo>
+                  <a:lnTo>
+                    <a:pt x="914478" y="56920"/>
+                  </a:lnTo>
+                  <a:lnTo>
+                    <a:pt x="844133" y="58617"/>
+                  </a:lnTo>
+                  <a:lnTo>
+                    <a:pt x="773789" y="60303"/>
+                  </a:lnTo>
+                  <a:lnTo>
+                    <a:pt x="703444" y="61977"/>
+                  </a:lnTo>
+                  <a:lnTo>
+                    <a:pt x="633100" y="63638"/>
+                  </a:lnTo>
+                  <a:lnTo>
+                    <a:pt x="562755" y="65289"/>
+                  </a:lnTo>
+                  <a:lnTo>
+                    <a:pt x="492411" y="66927"/>
+                  </a:lnTo>
+                  <a:lnTo>
+                    <a:pt x="422066" y="68554"/>
+                  </a:lnTo>
+                  <a:lnTo>
+                    <a:pt x="351722" y="70170"/>
+                  </a:lnTo>
+                  <a:lnTo>
+                    <a:pt x="281377" y="71774"/>
+                  </a:lnTo>
+                  <a:lnTo>
+                    <a:pt x="211033" y="73367"/>
+                  </a:lnTo>
+                  <a:lnTo>
+                    <a:pt x="140688" y="74949"/>
+                  </a:lnTo>
+                  <a:lnTo>
+                    <a:pt x="70344" y="76519"/>
+                  </a:lnTo>
+                  <a:lnTo>
+                    <a:pt x="0" y="78079"/>
+                  </a:lnTo>
+                </a:path>
+              </a:pathLst>
+            </a:custGeom>
+          </p:spPr>
+          <p:txBody>
+            <a:bodyPr/>
+            <a:lstStyle/>
+            <a:p/>
+          </p:txBody>
+        </p:sp>
+        <p:sp>
+          <p:nvSpPr>
+            <p:cNvPr id="26" name="pl26"/>
+            <p:cNvSpPr/>
+            <p:nvPr/>
+          </p:nvSpPr>
+          <p:spPr>
+            <a:xfrm>
+              <a:off x="1235312" y="2879573"/>
+              <a:ext cx="6964104" cy="372692"/>
+            </a:xfrm>
+            <a:custGeom>
+              <a:avLst/>
+              <a:pathLst>
+                <a:path w="6964104" h="372692">
                   <a:moveTo>
                     <a:pt x="0" y="0"/>
                   </a:moveTo>
                   <a:lnTo>
-                    <a:pt x="71622" y="18216"/>
-                  </a:lnTo>
-                  <a:lnTo>
-                    <a:pt x="143245" y="36203"/>
-                  </a:lnTo>
-                  <a:lnTo>
-                    <a:pt x="214867" y="53963"/>
-                  </a:lnTo>
-                  <a:lnTo>
-                    <a:pt x="286490" y="71498"/>
-                  </a:lnTo>
-                  <a:lnTo>
-                    <a:pt x="358112" y="88812"/>
-                  </a:lnTo>
-                  <a:lnTo>
-                    <a:pt x="429735" y="105908"/>
-                  </a:lnTo>
-                  <a:lnTo>
-                    <a:pt x="501357" y="122787"/>
-                  </a:lnTo>
-                  <a:lnTo>
-                    <a:pt x="572980" y="139454"/>
-                  </a:lnTo>
-                  <a:lnTo>
-                    <a:pt x="644602" y="155910"/>
-                  </a:lnTo>
-                  <a:lnTo>
-                    <a:pt x="716225" y="172159"/>
-                  </a:lnTo>
-                  <a:lnTo>
-                    <a:pt x="787847" y="188202"/>
-                  </a:lnTo>
-                  <a:lnTo>
-                    <a:pt x="859470" y="204043"/>
-                  </a:lnTo>
-                  <a:lnTo>
-                    <a:pt x="931092" y="219683"/>
-                  </a:lnTo>
-                  <a:lnTo>
-                    <a:pt x="1002715" y="235127"/>
-                  </a:lnTo>
-                  <a:lnTo>
-                    <a:pt x="1074337" y="250375"/>
-                  </a:lnTo>
-                  <a:lnTo>
-                    <a:pt x="1145960" y="265431"/>
-                  </a:lnTo>
-                  <a:lnTo>
-                    <a:pt x="1217582" y="280297"/>
-                  </a:lnTo>
-                  <a:lnTo>
-                    <a:pt x="1289205" y="294975"/>
-                  </a:lnTo>
-                  <a:lnTo>
-                    <a:pt x="1360827" y="309467"/>
-                  </a:lnTo>
-                  <a:lnTo>
-                    <a:pt x="1432450" y="323777"/>
-                  </a:lnTo>
-                  <a:lnTo>
-                    <a:pt x="1504073" y="337906"/>
-                  </a:lnTo>
-                  <a:lnTo>
-                    <a:pt x="1575695" y="351857"/>
-                  </a:lnTo>
-                  <a:lnTo>
-                    <a:pt x="1647318" y="365632"/>
-                  </a:lnTo>
-                  <a:lnTo>
-                    <a:pt x="1718940" y="379232"/>
-                  </a:lnTo>
-                  <a:lnTo>
-                    <a:pt x="1790563" y="392661"/>
-                  </a:lnTo>
-                  <a:lnTo>
-                    <a:pt x="1862185" y="405921"/>
-                  </a:lnTo>
-                  <a:lnTo>
-                    <a:pt x="1933808" y="419013"/>
-                  </a:lnTo>
-                  <a:lnTo>
-                    <a:pt x="2005430" y="431940"/>
-                  </a:lnTo>
-                  <a:lnTo>
-                    <a:pt x="2077053" y="444703"/>
-                  </a:lnTo>
-                  <a:lnTo>
-                    <a:pt x="2148675" y="457306"/>
-                  </a:lnTo>
-                  <a:lnTo>
-                    <a:pt x="2220298" y="469749"/>
-                  </a:lnTo>
-                  <a:lnTo>
-                    <a:pt x="2291920" y="482035"/>
-                  </a:lnTo>
-                  <a:lnTo>
-                    <a:pt x="2363543" y="494166"/>
-                  </a:lnTo>
-                  <a:lnTo>
-                    <a:pt x="2435165" y="506144"/>
-                  </a:lnTo>
-                  <a:lnTo>
-                    <a:pt x="2506788" y="517971"/>
-                  </a:lnTo>
-                  <a:lnTo>
-                    <a:pt x="2578410" y="529649"/>
-                  </a:lnTo>
-                  <a:lnTo>
-                    <a:pt x="2650033" y="541179"/>
-                  </a:lnTo>
-                  <a:lnTo>
-                    <a:pt x="2721655" y="552563"/>
-                  </a:lnTo>
-                  <a:lnTo>
-                    <a:pt x="2793278" y="563804"/>
-                  </a:lnTo>
-                  <a:lnTo>
-                    <a:pt x="2864901" y="574903"/>
-                  </a:lnTo>
-                  <a:lnTo>
-                    <a:pt x="2936523" y="585861"/>
-                  </a:lnTo>
-                  <a:lnTo>
-                    <a:pt x="3008146" y="596682"/>
-                  </a:lnTo>
-                  <a:lnTo>
-                    <a:pt x="3079768" y="607366"/>
-                  </a:lnTo>
-                  <a:lnTo>
-                    <a:pt x="3151391" y="617914"/>
-                  </a:lnTo>
-                  <a:lnTo>
-                    <a:pt x="3223013" y="628330"/>
-                  </a:lnTo>
-                  <a:lnTo>
-                    <a:pt x="3294636" y="638614"/>
-                  </a:lnTo>
-                  <a:lnTo>
-                    <a:pt x="3366258" y="648769"/>
-                  </a:lnTo>
-                  <a:lnTo>
-                    <a:pt x="3437881" y="658795"/>
-                  </a:lnTo>
-                  <a:lnTo>
-                    <a:pt x="3509503" y="668694"/>
-                  </a:lnTo>
-                  <a:lnTo>
-                    <a:pt x="3581126" y="678469"/>
-                  </a:lnTo>
-                  <a:lnTo>
-                    <a:pt x="3652748" y="688120"/>
-                  </a:lnTo>
-                  <a:lnTo>
-                    <a:pt x="3724371" y="697650"/>
-                  </a:lnTo>
-                  <a:lnTo>
-                    <a:pt x="3795993" y="707059"/>
-                  </a:lnTo>
-                  <a:lnTo>
-                    <a:pt x="3867616" y="716349"/>
-                  </a:lnTo>
-                  <a:lnTo>
-                    <a:pt x="3939238" y="725522"/>
-                  </a:lnTo>
-                  <a:lnTo>
-                    <a:pt x="4010861" y="734579"/>
-                  </a:lnTo>
-                  <a:lnTo>
-                    <a:pt x="4082483" y="743522"/>
-                  </a:lnTo>
-                  <a:lnTo>
-                    <a:pt x="4154106" y="752352"/>
-                  </a:lnTo>
-                  <a:lnTo>
-                    <a:pt x="4225729" y="761070"/>
-                  </a:lnTo>
-                  <a:lnTo>
-                    <a:pt x="4297351" y="769679"/>
-                  </a:lnTo>
-                  <a:lnTo>
-                    <a:pt x="4368974" y="778178"/>
-                  </a:lnTo>
-                  <a:lnTo>
-                    <a:pt x="4440596" y="786571"/>
-                  </a:lnTo>
-                  <a:lnTo>
-                    <a:pt x="4512219" y="794857"/>
-                  </a:lnTo>
-                  <a:lnTo>
-                    <a:pt x="4583841" y="803039"/>
-                  </a:lnTo>
-                  <a:lnTo>
-                    <a:pt x="4655464" y="811118"/>
-                  </a:lnTo>
-                  <a:lnTo>
-                    <a:pt x="4727086" y="819094"/>
-                  </a:lnTo>
-                  <a:lnTo>
-                    <a:pt x="4798709" y="826970"/>
-                  </a:lnTo>
-                  <a:lnTo>
-                    <a:pt x="4870331" y="834746"/>
-                  </a:lnTo>
-                  <a:lnTo>
-                    <a:pt x="4941954" y="842425"/>
-                  </a:lnTo>
-                  <a:lnTo>
-                    <a:pt x="5013576" y="850006"/>
-                  </a:lnTo>
-                  <a:lnTo>
-                    <a:pt x="5085199" y="857491"/>
-                  </a:lnTo>
-                  <a:lnTo>
-                    <a:pt x="5156821" y="864882"/>
-                  </a:lnTo>
-                  <a:lnTo>
-                    <a:pt x="5228444" y="872180"/>
-                  </a:lnTo>
-                  <a:lnTo>
-                    <a:pt x="5300066" y="879386"/>
-                  </a:lnTo>
-                  <a:lnTo>
-                    <a:pt x="5371689" y="886501"/>
-                  </a:lnTo>
-                  <a:lnTo>
-                    <a:pt x="5443311" y="893525"/>
-                  </a:lnTo>
-                  <a:lnTo>
-                    <a:pt x="5514934" y="900462"/>
-                  </a:lnTo>
-                  <a:lnTo>
-                    <a:pt x="5586557" y="907310"/>
-                  </a:lnTo>
-                  <a:lnTo>
-                    <a:pt x="5658179" y="914072"/>
-                  </a:lnTo>
-                  <a:lnTo>
-                    <a:pt x="5729802" y="920749"/>
-                  </a:lnTo>
-                  <a:lnTo>
-                    <a:pt x="5801424" y="927342"/>
-                  </a:lnTo>
-                  <a:lnTo>
-                    <a:pt x="5873047" y="933851"/>
-                  </a:lnTo>
-                  <a:lnTo>
-                    <a:pt x="5944669" y="940278"/>
-                  </a:lnTo>
-                  <a:lnTo>
-                    <a:pt x="6016292" y="946624"/>
-                  </a:lnTo>
-                  <a:lnTo>
-                    <a:pt x="6087914" y="952890"/>
-                  </a:lnTo>
-                  <a:lnTo>
-                    <a:pt x="6159537" y="959076"/>
-                  </a:lnTo>
-                  <a:lnTo>
-                    <a:pt x="6231159" y="965185"/>
-                  </a:lnTo>
-                  <a:lnTo>
-                    <a:pt x="6302782" y="971216"/>
-                  </a:lnTo>
-                  <a:lnTo>
-                    <a:pt x="6374404" y="977172"/>
-                  </a:lnTo>
-                  <a:lnTo>
-                    <a:pt x="6446027" y="983052"/>
-                  </a:lnTo>
-                  <a:lnTo>
-                    <a:pt x="6517649" y="988858"/>
-                  </a:lnTo>
-                  <a:lnTo>
-                    <a:pt x="6589272" y="994590"/>
-                  </a:lnTo>
-                  <a:lnTo>
-                    <a:pt x="6660894" y="1000250"/>
-                  </a:lnTo>
-                  <a:lnTo>
-                    <a:pt x="6732517" y="1005839"/>
-                  </a:lnTo>
-                  <a:lnTo>
-                    <a:pt x="6804139" y="1011357"/>
-                  </a:lnTo>
-                  <a:lnTo>
-                    <a:pt x="6875762" y="1016806"/>
-                  </a:lnTo>
-                  <a:lnTo>
-                    <a:pt x="6947385" y="1022186"/>
-                  </a:lnTo>
-                  <a:lnTo>
-                    <a:pt x="7019007" y="1027498"/>
-                  </a:lnTo>
-                  <a:lnTo>
-                    <a:pt x="7090630" y="1032742"/>
+                    <a:pt x="70344" y="6573"/>
+                  </a:lnTo>
+                  <a:lnTo>
+                    <a:pt x="140688" y="13065"/>
+                  </a:lnTo>
+                  <a:lnTo>
+                    <a:pt x="211033" y="19474"/>
+                  </a:lnTo>
+                  <a:lnTo>
+                    <a:pt x="281377" y="25802"/>
+                  </a:lnTo>
+                  <a:lnTo>
+                    <a:pt x="351722" y="32050"/>
+                  </a:lnTo>
+                  <a:lnTo>
+                    <a:pt x="422066" y="38219"/>
+                  </a:lnTo>
+                  <a:lnTo>
+                    <a:pt x="492411" y="44311"/>
+                  </a:lnTo>
+                  <a:lnTo>
+                    <a:pt x="562755" y="50325"/>
+                  </a:lnTo>
+                  <a:lnTo>
+                    <a:pt x="633100" y="56264"/>
+                  </a:lnTo>
+                  <a:lnTo>
+                    <a:pt x="703444" y="62128"/>
+                  </a:lnTo>
+                  <a:lnTo>
+                    <a:pt x="773789" y="67917"/>
+                  </a:lnTo>
+                  <a:lnTo>
+                    <a:pt x="844133" y="73634"/>
+                  </a:lnTo>
+                  <a:lnTo>
+                    <a:pt x="914478" y="79278"/>
+                  </a:lnTo>
+                  <a:lnTo>
+                    <a:pt x="984822" y="84851"/>
+                  </a:lnTo>
+                  <a:lnTo>
+                    <a:pt x="1055167" y="90354"/>
+                  </a:lnTo>
+                  <a:lnTo>
+                    <a:pt x="1125511" y="95787"/>
+                  </a:lnTo>
+                  <a:lnTo>
+                    <a:pt x="1195856" y="101152"/>
+                  </a:lnTo>
+                  <a:lnTo>
+                    <a:pt x="1266200" y="106449"/>
+                  </a:lnTo>
+                  <a:lnTo>
+                    <a:pt x="1336545" y="111679"/>
+                  </a:lnTo>
+                  <a:lnTo>
+                    <a:pt x="1406889" y="116843"/>
+                  </a:lnTo>
+                  <a:lnTo>
+                    <a:pt x="1477234" y="121942"/>
+                  </a:lnTo>
+                  <a:lnTo>
+                    <a:pt x="1547578" y="126977"/>
+                  </a:lnTo>
+                  <a:lnTo>
+                    <a:pt x="1617923" y="131948"/>
+                  </a:lnTo>
+                  <a:lnTo>
+                    <a:pt x="1688267" y="136856"/>
+                  </a:lnTo>
+                  <a:lnTo>
+                    <a:pt x="1758612" y="141702"/>
+                  </a:lnTo>
+                  <a:lnTo>
+                    <a:pt x="1828956" y="146487"/>
+                  </a:lnTo>
+                  <a:lnTo>
+                    <a:pt x="1899301" y="151212"/>
+                  </a:lnTo>
+                  <a:lnTo>
+                    <a:pt x="1969645" y="155877"/>
+                  </a:lnTo>
+                  <a:lnTo>
+                    <a:pt x="2039990" y="160483"/>
+                  </a:lnTo>
+                  <a:lnTo>
+                    <a:pt x="2110334" y="165031"/>
+                  </a:lnTo>
+                  <a:lnTo>
+                    <a:pt x="2180679" y="169521"/>
+                  </a:lnTo>
+                  <a:lnTo>
+                    <a:pt x="2251023" y="173955"/>
+                  </a:lnTo>
+                  <a:lnTo>
+                    <a:pt x="2321368" y="178333"/>
+                  </a:lnTo>
+                  <a:lnTo>
+                    <a:pt x="2391712" y="182655"/>
+                  </a:lnTo>
+                  <a:lnTo>
+                    <a:pt x="2462057" y="186923"/>
+                  </a:lnTo>
+                  <a:lnTo>
+                    <a:pt x="2532401" y="191137"/>
+                  </a:lnTo>
+                  <a:lnTo>
+                    <a:pt x="2602746" y="195298"/>
+                  </a:lnTo>
+                  <a:lnTo>
+                    <a:pt x="2673090" y="199407"/>
+                  </a:lnTo>
+                  <a:lnTo>
+                    <a:pt x="2743435" y="203463"/>
+                  </a:lnTo>
+                  <a:lnTo>
+                    <a:pt x="2813779" y="207469"/>
+                  </a:lnTo>
+                  <a:lnTo>
+                    <a:pt x="2884124" y="211423"/>
+                  </a:lnTo>
+                  <a:lnTo>
+                    <a:pt x="2954468" y="215328"/>
+                  </a:lnTo>
+                  <a:lnTo>
+                    <a:pt x="3024813" y="219184"/>
+                  </a:lnTo>
+                  <a:lnTo>
+                    <a:pt x="3095157" y="222990"/>
+                  </a:lnTo>
+                  <a:lnTo>
+                    <a:pt x="3165502" y="226749"/>
+                  </a:lnTo>
+                  <a:lnTo>
+                    <a:pt x="3235846" y="230461"/>
+                  </a:lnTo>
+                  <a:lnTo>
+                    <a:pt x="3306191" y="234125"/>
+                  </a:lnTo>
+                  <a:lnTo>
+                    <a:pt x="3376535" y="237743"/>
+                  </a:lnTo>
+                  <a:lnTo>
+                    <a:pt x="3446880" y="241316"/>
+                  </a:lnTo>
+                  <a:lnTo>
+                    <a:pt x="3517224" y="244843"/>
+                  </a:lnTo>
+                  <a:lnTo>
+                    <a:pt x="3587569" y="248326"/>
+                  </a:lnTo>
+                  <a:lnTo>
+                    <a:pt x="3657913" y="251765"/>
+                  </a:lnTo>
+                  <a:lnTo>
+                    <a:pt x="3728257" y="255161"/>
+                  </a:lnTo>
+                  <a:lnTo>
+                    <a:pt x="3798602" y="258513"/>
+                  </a:lnTo>
+                  <a:lnTo>
+                    <a:pt x="3868946" y="261823"/>
+                  </a:lnTo>
+                  <a:lnTo>
+                    <a:pt x="3939291" y="265092"/>
+                  </a:lnTo>
+                  <a:lnTo>
+                    <a:pt x="4009635" y="268319"/>
+                  </a:lnTo>
+                  <a:lnTo>
+                    <a:pt x="4079980" y="271506"/>
+                  </a:lnTo>
+                  <a:lnTo>
+                    <a:pt x="4150324" y="274652"/>
+                  </a:lnTo>
+                  <a:lnTo>
+                    <a:pt x="4220669" y="277759"/>
+                  </a:lnTo>
+                  <a:lnTo>
+                    <a:pt x="4291013" y="280826"/>
+                  </a:lnTo>
+                  <a:lnTo>
+                    <a:pt x="4361358" y="283855"/>
+                  </a:lnTo>
+                  <a:lnTo>
+                    <a:pt x="4431702" y="286845"/>
+                  </a:lnTo>
+                  <a:lnTo>
+                    <a:pt x="4502047" y="289798"/>
+                  </a:lnTo>
+                  <a:lnTo>
+                    <a:pt x="4572391" y="292713"/>
+                  </a:lnTo>
+                  <a:lnTo>
+                    <a:pt x="4642736" y="295591"/>
+                  </a:lnTo>
+                  <a:lnTo>
+                    <a:pt x="4713080" y="298434"/>
+                  </a:lnTo>
+                  <a:lnTo>
+                    <a:pt x="4783425" y="301240"/>
+                  </a:lnTo>
+                  <a:lnTo>
+                    <a:pt x="4853769" y="304011"/>
+                  </a:lnTo>
+                  <a:lnTo>
+                    <a:pt x="4924114" y="306747"/>
+                  </a:lnTo>
+                  <a:lnTo>
+                    <a:pt x="4994458" y="309448"/>
+                  </a:lnTo>
+                  <a:lnTo>
+                    <a:pt x="5064803" y="312115"/>
+                  </a:lnTo>
+                  <a:lnTo>
+                    <a:pt x="5135147" y="314749"/>
+                  </a:lnTo>
+                  <a:lnTo>
+                    <a:pt x="5205492" y="317349"/>
+                  </a:lnTo>
+                  <a:lnTo>
+                    <a:pt x="5275836" y="319917"/>
+                  </a:lnTo>
+                  <a:lnTo>
+                    <a:pt x="5346181" y="322452"/>
+                  </a:lnTo>
+                  <a:lnTo>
+                    <a:pt x="5416525" y="324955"/>
+                  </a:lnTo>
+                  <a:lnTo>
+                    <a:pt x="5486870" y="327427"/>
+                  </a:lnTo>
+                  <a:lnTo>
+                    <a:pt x="5557214" y="329867"/>
+                  </a:lnTo>
+                  <a:lnTo>
+                    <a:pt x="5627559" y="332276"/>
+                  </a:lnTo>
+                  <a:lnTo>
+                    <a:pt x="5697903" y="334655"/>
+                  </a:lnTo>
+                  <a:lnTo>
+                    <a:pt x="5768248" y="337004"/>
+                  </a:lnTo>
+                  <a:lnTo>
+                    <a:pt x="5838592" y="339324"/>
+                  </a:lnTo>
+                  <a:lnTo>
+                    <a:pt x="5908937" y="341614"/>
+                  </a:lnTo>
+                  <a:lnTo>
+                    <a:pt x="5979281" y="343875"/>
+                  </a:lnTo>
+                  <a:lnTo>
+                    <a:pt x="6049626" y="346108"/>
+                  </a:lnTo>
+                  <a:lnTo>
+                    <a:pt x="6119970" y="348312"/>
+                  </a:lnTo>
+                  <a:lnTo>
+                    <a:pt x="6190315" y="350489"/>
+                  </a:lnTo>
+                  <a:lnTo>
+                    <a:pt x="6260659" y="352638"/>
+                  </a:lnTo>
+                  <a:lnTo>
+                    <a:pt x="6331004" y="354760"/>
+                  </a:lnTo>
+                  <a:lnTo>
+                    <a:pt x="6401348" y="356855"/>
+                  </a:lnTo>
+                  <a:lnTo>
+                    <a:pt x="6471693" y="358924"/>
+                  </a:lnTo>
+                  <a:lnTo>
+                    <a:pt x="6542037" y="360967"/>
+                  </a:lnTo>
+                  <a:lnTo>
+                    <a:pt x="6612382" y="362983"/>
+                  </a:lnTo>
+                  <a:lnTo>
+                    <a:pt x="6682726" y="364975"/>
+                  </a:lnTo>
+                  <a:lnTo>
+                    <a:pt x="6753071" y="366941"/>
+                  </a:lnTo>
+                  <a:lnTo>
+                    <a:pt x="6823415" y="368882"/>
+                  </a:lnTo>
+                  <a:lnTo>
+                    <a:pt x="6893760" y="370799"/>
+                  </a:lnTo>
+                  <a:lnTo>
+                    <a:pt x="6964104" y="372692"/>
                   </a:lnTo>
                 </a:path>
               </a:pathLst>
@@ -4654,27 +4689,27 @@
         </p:sp>
         <p:sp>
           <p:nvSpPr>
-            <p:cNvPr id="26" name="pl26"/>
+            <p:cNvPr id="27" name="pl27"/>
             <p:cNvSpPr/>
             <p:nvPr/>
           </p:nvSpPr>
           <p:spPr>
             <a:xfrm>
-              <a:off x="817517" y="4727786"/>
-              <a:ext cx="7799693" cy="0"/>
+              <a:off x="887106" y="3100960"/>
+              <a:ext cx="7660515" cy="0"/>
             </a:xfrm>
             <a:custGeom>
               <a:avLst/>
               <a:pathLst>
-                <a:path w="7799693" h="0">
+                <a:path w="7660515" h="0">
                   <a:moveTo>
                     <a:pt x="0" y="0"/>
                   </a:moveTo>
                   <a:lnTo>
-                    <a:pt x="7799693" y="0"/>
-                  </a:lnTo>
-                  <a:lnTo>
-                    <a:pt x="7799693" y="0"/>
+                    <a:pt x="7660515" y="0"/>
+                  </a:lnTo>
+                  <a:lnTo>
+                    <a:pt x="7660515" y="0"/>
                   </a:lnTo>
                 </a:path>
               </a:pathLst>
@@ -4697,21 +4732,21 @@
         </p:sp>
         <p:sp>
           <p:nvSpPr>
-            <p:cNvPr id="27" name="pl27"/>
+            <p:cNvPr id="28" name="pl28"/>
             <p:cNvSpPr/>
             <p:nvPr/>
           </p:nvSpPr>
           <p:spPr>
             <a:xfrm>
-              <a:off x="4293144" y="2073503"/>
-              <a:ext cx="0" cy="3649639"/>
+              <a:off x="4300713" y="2143092"/>
+              <a:ext cx="0" cy="1317069"/>
             </a:xfrm>
             <a:custGeom>
               <a:avLst/>
               <a:pathLst>
-                <a:path w="0" h="3649639">
+                <a:path w="0" h="1317069">
                   <a:moveTo>
-                    <a:pt x="0" y="3649639"/>
+                    <a:pt x="0" y="1317069"/>
                   </a:moveTo>
                   <a:lnTo>
                     <a:pt x="0" y="0"/>
@@ -4740,21 +4775,21 @@
         </p:sp>
         <p:sp>
           <p:nvSpPr>
-            <p:cNvPr id="28" name="pl28"/>
+            <p:cNvPr id="29" name="pl29"/>
             <p:cNvSpPr/>
             <p:nvPr/>
           </p:nvSpPr>
           <p:spPr>
             <a:xfrm>
-              <a:off x="3074393" y="2073503"/>
-              <a:ext cx="0" cy="3649639"/>
+              <a:off x="3103710" y="2143092"/>
+              <a:ext cx="0" cy="1317069"/>
             </a:xfrm>
             <a:custGeom>
               <a:avLst/>
               <a:pathLst>
-                <a:path w="0" h="3649639">
+                <a:path w="0" h="1317069">
                   <a:moveTo>
-                    <a:pt x="0" y="3649639"/>
+                    <a:pt x="0" y="1317069"/>
                   </a:moveTo>
                   <a:lnTo>
                     <a:pt x="0" y="0"/>
@@ -4783,21 +4818,21 @@
         </p:sp>
         <p:sp>
           <p:nvSpPr>
-            <p:cNvPr id="29" name="pl29"/>
+            <p:cNvPr id="30" name="pl30"/>
             <p:cNvSpPr/>
             <p:nvPr/>
           </p:nvSpPr>
           <p:spPr>
             <a:xfrm>
-              <a:off x="5518580" y="2073503"/>
-              <a:ext cx="0" cy="3649639"/>
+              <a:off x="5504283" y="2143092"/>
+              <a:ext cx="0" cy="1317069"/>
             </a:xfrm>
             <a:custGeom>
               <a:avLst/>
               <a:pathLst>
-                <a:path w="0" h="3649639">
+                <a:path w="0" h="1317069">
                   <a:moveTo>
-                    <a:pt x="0" y="3649639"/>
+                    <a:pt x="0" y="1317069"/>
                   </a:moveTo>
                   <a:lnTo>
                     <a:pt x="0" y="0"/>
@@ -4826,13 +4861,13 @@
         </p:sp>
         <p:sp>
           <p:nvSpPr>
-            <p:cNvPr id="30" name="tx30"/>
+            <p:cNvPr id="31" name="tx31"/>
             <p:cNvSpPr/>
             <p:nvPr/>
           </p:nvSpPr>
           <p:spPr>
             <a:xfrm>
-              <a:off x="692708" y="5517199"/>
+              <a:off x="762297" y="3360243"/>
               <a:ext cx="62179" cy="80101"/>
             </a:xfrm>
             <a:prstGeom prst="rect">
@@ -4872,13 +4907,13 @@
         </p:sp>
         <p:sp>
           <p:nvSpPr>
-            <p:cNvPr id="31" name="tx31"/>
+            <p:cNvPr id="32" name="tx32"/>
             <p:cNvSpPr/>
             <p:nvPr/>
           </p:nvSpPr>
           <p:spPr>
             <a:xfrm>
-              <a:off x="692708" y="4687735"/>
+              <a:off x="762297" y="3060909"/>
               <a:ext cx="62179" cy="80101"/>
             </a:xfrm>
             <a:prstGeom prst="rect">
@@ -4918,13 +4953,13 @@
         </p:sp>
         <p:sp>
           <p:nvSpPr>
-            <p:cNvPr id="32" name="tx32"/>
+            <p:cNvPr id="33" name="tx33"/>
             <p:cNvSpPr/>
             <p:nvPr/>
           </p:nvSpPr>
           <p:spPr>
             <a:xfrm>
-              <a:off x="692708" y="3858272"/>
+              <a:off x="762297" y="2761575"/>
               <a:ext cx="62179" cy="80101"/>
             </a:xfrm>
             <a:prstGeom prst="rect">
@@ -4964,13 +4999,13 @@
         </p:sp>
         <p:sp>
           <p:nvSpPr>
-            <p:cNvPr id="33" name="tx33"/>
+            <p:cNvPr id="34" name="tx34"/>
             <p:cNvSpPr/>
             <p:nvPr/>
           </p:nvSpPr>
           <p:spPr>
             <a:xfrm>
-              <a:off x="692708" y="3028808"/>
+              <a:off x="762297" y="2462242"/>
               <a:ext cx="62179" cy="80101"/>
             </a:xfrm>
             <a:prstGeom prst="rect">
@@ -5010,13 +5045,13 @@
         </p:sp>
         <p:sp>
           <p:nvSpPr>
-            <p:cNvPr id="34" name="tx34"/>
+            <p:cNvPr id="35" name="tx35"/>
             <p:cNvSpPr/>
             <p:nvPr/>
           </p:nvSpPr>
           <p:spPr>
             <a:xfrm>
-              <a:off x="692708" y="2199345"/>
+              <a:off x="762297" y="2162908"/>
               <a:ext cx="62179" cy="80101"/>
             </a:xfrm>
             <a:prstGeom prst="rect">
@@ -5056,13 +5091,13 @@
         </p:sp>
         <p:sp>
           <p:nvSpPr>
-            <p:cNvPr id="35" name="tx35"/>
+            <p:cNvPr id="36" name="tx36"/>
             <p:cNvSpPr/>
             <p:nvPr/>
           </p:nvSpPr>
           <p:spPr>
             <a:xfrm>
-              <a:off x="2134610" y="5785772"/>
+              <a:off x="2179256" y="3522791"/>
               <a:ext cx="161574" cy="80101"/>
             </a:xfrm>
             <a:prstGeom prst="rect">
@@ -5102,13 +5137,13 @@
         </p:sp>
         <p:sp>
           <p:nvSpPr>
-            <p:cNvPr id="36" name="tx36"/>
+            <p:cNvPr id="37" name="tx37"/>
             <p:cNvSpPr/>
             <p:nvPr/>
           </p:nvSpPr>
           <p:spPr>
             <a:xfrm>
-              <a:off x="3875731" y="5785772"/>
+              <a:off x="3889308" y="3522791"/>
               <a:ext cx="161574" cy="80101"/>
             </a:xfrm>
             <a:prstGeom prst="rect">
@@ -5148,13 +5183,13 @@
         </p:sp>
         <p:sp>
           <p:nvSpPr>
-            <p:cNvPr id="37" name="tx37"/>
+            <p:cNvPr id="38" name="tx38"/>
             <p:cNvSpPr/>
             <p:nvPr/>
           </p:nvSpPr>
           <p:spPr>
             <a:xfrm>
-              <a:off x="5666549" y="5785772"/>
+              <a:off x="5649057" y="3522791"/>
               <a:ext cx="62179" cy="80101"/>
             </a:xfrm>
             <a:prstGeom prst="rect">
@@ -5194,13 +5229,13 @@
         </p:sp>
         <p:sp>
           <p:nvSpPr>
-            <p:cNvPr id="38" name="tx38"/>
+            <p:cNvPr id="39" name="tx39"/>
             <p:cNvSpPr/>
             <p:nvPr/>
           </p:nvSpPr>
           <p:spPr>
             <a:xfrm>
-              <a:off x="7376580" y="5785772"/>
+              <a:off x="7328020" y="3522791"/>
               <a:ext cx="124358" cy="80101"/>
             </a:xfrm>
             <a:prstGeom prst="rect">
@@ -5240,13 +5275,13 @@
         </p:sp>
         <p:sp>
           <p:nvSpPr>
-            <p:cNvPr id="39" name="tx39"/>
+            <p:cNvPr id="40" name="tx40"/>
             <p:cNvSpPr/>
             <p:nvPr/>
           </p:nvSpPr>
           <p:spPr>
             <a:xfrm>
-              <a:off x="1561815" y="5925448"/>
+              <a:off x="1561815" y="3662467"/>
               <a:ext cx="6311097" cy="100218"/>
             </a:xfrm>
             <a:prstGeom prst="rect">
@@ -5286,13 +5321,13 @@
         </p:sp>
         <p:sp>
           <p:nvSpPr>
-            <p:cNvPr id="40" name="tx40"/>
+            <p:cNvPr id="41" name="tx41"/>
             <p:cNvSpPr/>
             <p:nvPr/>
           </p:nvSpPr>
           <p:spPr>
             <a:xfrm rot="-5400000">
-              <a:off x="68446" y="3848213"/>
+              <a:off x="138035" y="2751517"/>
               <a:ext cx="1016904" cy="100218"/>
             </a:xfrm>
             <a:prstGeom prst="rect">
@@ -5332,13 +5367,13 @@
         </p:sp>
         <p:sp>
           <p:nvSpPr>
-            <p:cNvPr id="41" name="tx41"/>
+            <p:cNvPr id="42" name="tx42"/>
             <p:cNvSpPr/>
             <p:nvPr/>
           </p:nvSpPr>
           <p:spPr>
             <a:xfrm>
-              <a:off x="817517" y="1896563"/>
+              <a:off x="887106" y="1966152"/>
               <a:ext cx="6959864" cy="82021"/>
             </a:xfrm>
             <a:prstGeom prst="rect">
@@ -5378,13 +5413,3789 @@
         </p:sp>
         <p:sp>
           <p:nvSpPr>
-            <p:cNvPr id="42" name="tx42"/>
+            <p:cNvPr id="43" name="tx43"/>
             <p:cNvSpPr/>
             <p:nvPr/>
           </p:nvSpPr>
           <p:spPr>
             <a:xfrm>
-              <a:off x="817517" y="1669789"/>
+              <a:off x="887106" y="1739378"/>
+              <a:ext cx="4579863" cy="120152"/>
+            </a:xfrm>
+            <a:prstGeom prst="rect">
+              <a:avLst/>
+            </a:prstGeom>
+            <a:noFill/>
+          </p:spPr>
+          <p:txBody>
+            <a:bodyPr lIns="0" rIns="0" tIns="0" bIns="0" anchorCtr="1" anchor="ctr" wrap="none"/>
+            <a:lstStyle/>
+            <a:p>
+              <a:pPr algn="l" marL="0" marR="0" indent="0">
+                <a:lnSpc>
+                  <a:spcPts val="1320"/>
+                </a:lnSpc>
+                <a:spcBef>
+                  <a:spcPts val="0"/>
+                </a:spcBef>
+                <a:spcAft>
+                  <a:spcPts val="0"/>
+                </a:spcAft>
+              </a:pPr>
+              <a:r>
+                <a:rPr sz="1320">
+                  <a:solidFill>
+                    <a:srgbClr val="000000">
+                      <a:alpha val="100000"/>
+                    </a:srgbClr>
+                  </a:solidFill>
+                  <a:latin typeface="Helvetica"/>
+                  <a:cs typeface="Helvetica"/>
+                </a:rPr>
+                <a:t>Thrombocytopenia Grade 2 (Sensitivity, Carboplatin AUC ≥ 3)</a:t>
+              </a:r>
+            </a:p>
+          </p:txBody>
+        </p:sp>
+        <p:sp>
+          <p:nvSpPr>
+            <p:cNvPr id="44" name="pl44"/>
+            <p:cNvSpPr/>
+            <p:nvPr/>
+          </p:nvSpPr>
+          <p:spPr>
+            <a:xfrm>
+              <a:off x="887106" y="5444019"/>
+              <a:ext cx="7660515" cy="0"/>
+            </a:xfrm>
+            <a:custGeom>
+              <a:avLst/>
+              <a:pathLst>
+                <a:path w="7660515" h="0">
+                  <a:moveTo>
+                    <a:pt x="0" y="0"/>
+                  </a:moveTo>
+                  <a:lnTo>
+                    <a:pt x="7660515" y="0"/>
+                  </a:lnTo>
+                  <a:lnTo>
+                    <a:pt x="7660515" y="0"/>
+                  </a:lnTo>
+                </a:path>
+              </a:pathLst>
+            </a:custGeom>
+            <a:ln w="6775" cap="flat">
+              <a:solidFill>
+                <a:srgbClr val="EBEBEB">
+                  <a:alpha val="100000"/>
+                </a:srgbClr>
+              </a:solidFill>
+              <a:prstDash val="solid"/>
+              <a:round/>
+            </a:ln>
+          </p:spPr>
+          <p:txBody>
+            <a:bodyPr/>
+            <a:lstStyle/>
+            <a:p/>
+          </p:txBody>
+        </p:sp>
+        <p:sp>
+          <p:nvSpPr>
+            <p:cNvPr id="45" name="pl45"/>
+            <p:cNvSpPr/>
+            <p:nvPr/>
+          </p:nvSpPr>
+          <p:spPr>
+            <a:xfrm>
+              <a:off x="887106" y="5144686"/>
+              <a:ext cx="7660515" cy="0"/>
+            </a:xfrm>
+            <a:custGeom>
+              <a:avLst/>
+              <a:pathLst>
+                <a:path w="7660515" h="0">
+                  <a:moveTo>
+                    <a:pt x="0" y="0"/>
+                  </a:moveTo>
+                  <a:lnTo>
+                    <a:pt x="7660515" y="0"/>
+                  </a:lnTo>
+                  <a:lnTo>
+                    <a:pt x="7660515" y="0"/>
+                  </a:lnTo>
+                </a:path>
+              </a:pathLst>
+            </a:custGeom>
+            <a:ln w="6775" cap="flat">
+              <a:solidFill>
+                <a:srgbClr val="EBEBEB">
+                  <a:alpha val="100000"/>
+                </a:srgbClr>
+              </a:solidFill>
+              <a:prstDash val="solid"/>
+              <a:round/>
+            </a:ln>
+          </p:spPr>
+          <p:txBody>
+            <a:bodyPr/>
+            <a:lstStyle/>
+            <a:p/>
+          </p:txBody>
+        </p:sp>
+        <p:sp>
+          <p:nvSpPr>
+            <p:cNvPr id="46" name="pl46"/>
+            <p:cNvSpPr/>
+            <p:nvPr/>
+          </p:nvSpPr>
+          <p:spPr>
+            <a:xfrm>
+              <a:off x="887106" y="4845352"/>
+              <a:ext cx="7660515" cy="0"/>
+            </a:xfrm>
+            <a:custGeom>
+              <a:avLst/>
+              <a:pathLst>
+                <a:path w="7660515" h="0">
+                  <a:moveTo>
+                    <a:pt x="0" y="0"/>
+                  </a:moveTo>
+                  <a:lnTo>
+                    <a:pt x="7660515" y="0"/>
+                  </a:lnTo>
+                  <a:lnTo>
+                    <a:pt x="7660515" y="0"/>
+                  </a:lnTo>
+                </a:path>
+              </a:pathLst>
+            </a:custGeom>
+            <a:ln w="6775" cap="flat">
+              <a:solidFill>
+                <a:srgbClr val="EBEBEB">
+                  <a:alpha val="100000"/>
+                </a:srgbClr>
+              </a:solidFill>
+              <a:prstDash val="solid"/>
+              <a:round/>
+            </a:ln>
+          </p:spPr>
+          <p:txBody>
+            <a:bodyPr/>
+            <a:lstStyle/>
+            <a:p/>
+          </p:txBody>
+        </p:sp>
+        <p:sp>
+          <p:nvSpPr>
+            <p:cNvPr id="47" name="pl47"/>
+            <p:cNvSpPr/>
+            <p:nvPr/>
+          </p:nvSpPr>
+          <p:spPr>
+            <a:xfrm>
+              <a:off x="887106" y="4546018"/>
+              <a:ext cx="7660515" cy="0"/>
+            </a:xfrm>
+            <a:custGeom>
+              <a:avLst/>
+              <a:pathLst>
+                <a:path w="7660515" h="0">
+                  <a:moveTo>
+                    <a:pt x="0" y="0"/>
+                  </a:moveTo>
+                  <a:lnTo>
+                    <a:pt x="7660515" y="0"/>
+                  </a:lnTo>
+                  <a:lnTo>
+                    <a:pt x="7660515" y="0"/>
+                  </a:lnTo>
+                </a:path>
+              </a:pathLst>
+            </a:custGeom>
+            <a:ln w="6775" cap="flat">
+              <a:solidFill>
+                <a:srgbClr val="EBEBEB">
+                  <a:alpha val="100000"/>
+                </a:srgbClr>
+              </a:solidFill>
+              <a:prstDash val="solid"/>
+              <a:round/>
+            </a:ln>
+          </p:spPr>
+          <p:txBody>
+            <a:bodyPr/>
+            <a:lstStyle/>
+            <a:p/>
+          </p:txBody>
+        </p:sp>
+        <p:sp>
+          <p:nvSpPr>
+            <p:cNvPr id="48" name="pl48"/>
+            <p:cNvSpPr/>
+            <p:nvPr/>
+          </p:nvSpPr>
+          <p:spPr>
+            <a:xfrm>
+              <a:off x="977504" y="4336484"/>
+              <a:ext cx="0" cy="1317069"/>
+            </a:xfrm>
+            <a:custGeom>
+              <a:avLst/>
+              <a:pathLst>
+                <a:path w="0" h="1317069">
+                  <a:moveTo>
+                    <a:pt x="0" y="1317069"/>
+                  </a:moveTo>
+                  <a:lnTo>
+                    <a:pt x="0" y="0"/>
+                  </a:lnTo>
+                  <a:lnTo>
+                    <a:pt x="0" y="0"/>
+                  </a:lnTo>
+                </a:path>
+              </a:pathLst>
+            </a:custGeom>
+            <a:ln w="6775" cap="flat">
+              <a:solidFill>
+                <a:srgbClr val="EBEBEB">
+                  <a:alpha val="100000"/>
+                </a:srgbClr>
+              </a:solidFill>
+              <a:prstDash val="solid"/>
+              <a:round/>
+            </a:ln>
+          </p:spPr>
+          <p:txBody>
+            <a:bodyPr/>
+            <a:lstStyle/>
+            <a:p/>
+          </p:txBody>
+        </p:sp>
+        <p:sp>
+          <p:nvSpPr>
+            <p:cNvPr id="49" name="pl49"/>
+            <p:cNvSpPr/>
+            <p:nvPr/>
+          </p:nvSpPr>
+          <p:spPr>
+            <a:xfrm>
+              <a:off x="1832530" y="4336484"/>
+              <a:ext cx="0" cy="1317069"/>
+            </a:xfrm>
+            <a:custGeom>
+              <a:avLst/>
+              <a:pathLst>
+                <a:path w="0" h="1317069">
+                  <a:moveTo>
+                    <a:pt x="0" y="1317069"/>
+                  </a:moveTo>
+                  <a:lnTo>
+                    <a:pt x="0" y="0"/>
+                  </a:lnTo>
+                  <a:lnTo>
+                    <a:pt x="0" y="0"/>
+                  </a:lnTo>
+                </a:path>
+              </a:pathLst>
+            </a:custGeom>
+            <a:ln w="6775" cap="flat">
+              <a:solidFill>
+                <a:srgbClr val="EBEBEB">
+                  <a:alpha val="100000"/>
+                </a:srgbClr>
+              </a:solidFill>
+              <a:prstDash val="solid"/>
+              <a:round/>
+            </a:ln>
+          </p:spPr>
+          <p:txBody>
+            <a:bodyPr/>
+            <a:lstStyle/>
+            <a:p/>
+          </p:txBody>
+        </p:sp>
+        <p:sp>
+          <p:nvSpPr>
+            <p:cNvPr id="50" name="pl50"/>
+            <p:cNvSpPr/>
+            <p:nvPr/>
+          </p:nvSpPr>
+          <p:spPr>
+            <a:xfrm>
+              <a:off x="2687556" y="4336484"/>
+              <a:ext cx="0" cy="1317069"/>
+            </a:xfrm>
+            <a:custGeom>
+              <a:avLst/>
+              <a:pathLst>
+                <a:path w="0" h="1317069">
+                  <a:moveTo>
+                    <a:pt x="0" y="1317069"/>
+                  </a:moveTo>
+                  <a:lnTo>
+                    <a:pt x="0" y="0"/>
+                  </a:lnTo>
+                  <a:lnTo>
+                    <a:pt x="0" y="0"/>
+                  </a:lnTo>
+                </a:path>
+              </a:pathLst>
+            </a:custGeom>
+            <a:ln w="6775" cap="flat">
+              <a:solidFill>
+                <a:srgbClr val="EBEBEB">
+                  <a:alpha val="100000"/>
+                </a:srgbClr>
+              </a:solidFill>
+              <a:prstDash val="solid"/>
+              <a:round/>
+            </a:ln>
+          </p:spPr>
+          <p:txBody>
+            <a:bodyPr/>
+            <a:lstStyle/>
+            <a:p/>
+          </p:txBody>
+        </p:sp>
+        <p:sp>
+          <p:nvSpPr>
+            <p:cNvPr id="51" name="pl51"/>
+            <p:cNvSpPr/>
+            <p:nvPr/>
+          </p:nvSpPr>
+          <p:spPr>
+            <a:xfrm>
+              <a:off x="3542582" y="4336484"/>
+              <a:ext cx="0" cy="1317069"/>
+            </a:xfrm>
+            <a:custGeom>
+              <a:avLst/>
+              <a:pathLst>
+                <a:path w="0" h="1317069">
+                  <a:moveTo>
+                    <a:pt x="0" y="1317069"/>
+                  </a:moveTo>
+                  <a:lnTo>
+                    <a:pt x="0" y="0"/>
+                  </a:lnTo>
+                  <a:lnTo>
+                    <a:pt x="0" y="0"/>
+                  </a:lnTo>
+                </a:path>
+              </a:pathLst>
+            </a:custGeom>
+            <a:ln w="6775" cap="flat">
+              <a:solidFill>
+                <a:srgbClr val="EBEBEB">
+                  <a:alpha val="100000"/>
+                </a:srgbClr>
+              </a:solidFill>
+              <a:prstDash val="solid"/>
+              <a:round/>
+            </a:ln>
+          </p:spPr>
+          <p:txBody>
+            <a:bodyPr/>
+            <a:lstStyle/>
+            <a:p/>
+          </p:txBody>
+        </p:sp>
+        <p:sp>
+          <p:nvSpPr>
+            <p:cNvPr id="52" name="pl52"/>
+            <p:cNvSpPr/>
+            <p:nvPr/>
+          </p:nvSpPr>
+          <p:spPr>
+            <a:xfrm>
+              <a:off x="4397608" y="4336484"/>
+              <a:ext cx="0" cy="1317069"/>
+            </a:xfrm>
+            <a:custGeom>
+              <a:avLst/>
+              <a:pathLst>
+                <a:path w="0" h="1317069">
+                  <a:moveTo>
+                    <a:pt x="0" y="1317069"/>
+                  </a:moveTo>
+                  <a:lnTo>
+                    <a:pt x="0" y="0"/>
+                  </a:lnTo>
+                  <a:lnTo>
+                    <a:pt x="0" y="0"/>
+                  </a:lnTo>
+                </a:path>
+              </a:pathLst>
+            </a:custGeom>
+            <a:ln w="6775" cap="flat">
+              <a:solidFill>
+                <a:srgbClr val="EBEBEB">
+                  <a:alpha val="100000"/>
+                </a:srgbClr>
+              </a:solidFill>
+              <a:prstDash val="solid"/>
+              <a:round/>
+            </a:ln>
+          </p:spPr>
+          <p:txBody>
+            <a:bodyPr/>
+            <a:lstStyle/>
+            <a:p/>
+          </p:txBody>
+        </p:sp>
+        <p:sp>
+          <p:nvSpPr>
+            <p:cNvPr id="53" name="pl53"/>
+            <p:cNvSpPr/>
+            <p:nvPr/>
+          </p:nvSpPr>
+          <p:spPr>
+            <a:xfrm>
+              <a:off x="5252634" y="4336484"/>
+              <a:ext cx="0" cy="1317069"/>
+            </a:xfrm>
+            <a:custGeom>
+              <a:avLst/>
+              <a:pathLst>
+                <a:path w="0" h="1317069">
+                  <a:moveTo>
+                    <a:pt x="0" y="1317069"/>
+                  </a:moveTo>
+                  <a:lnTo>
+                    <a:pt x="0" y="0"/>
+                  </a:lnTo>
+                  <a:lnTo>
+                    <a:pt x="0" y="0"/>
+                  </a:lnTo>
+                </a:path>
+              </a:pathLst>
+            </a:custGeom>
+            <a:ln w="6775" cap="flat">
+              <a:solidFill>
+                <a:srgbClr val="EBEBEB">
+                  <a:alpha val="100000"/>
+                </a:srgbClr>
+              </a:solidFill>
+              <a:prstDash val="solid"/>
+              <a:round/>
+            </a:ln>
+          </p:spPr>
+          <p:txBody>
+            <a:bodyPr/>
+            <a:lstStyle/>
+            <a:p/>
+          </p:txBody>
+        </p:sp>
+        <p:sp>
+          <p:nvSpPr>
+            <p:cNvPr id="54" name="pl54"/>
+            <p:cNvSpPr/>
+            <p:nvPr/>
+          </p:nvSpPr>
+          <p:spPr>
+            <a:xfrm>
+              <a:off x="6107660" y="4336484"/>
+              <a:ext cx="0" cy="1317069"/>
+            </a:xfrm>
+            <a:custGeom>
+              <a:avLst/>
+              <a:pathLst>
+                <a:path w="0" h="1317069">
+                  <a:moveTo>
+                    <a:pt x="0" y="1317069"/>
+                  </a:moveTo>
+                  <a:lnTo>
+                    <a:pt x="0" y="0"/>
+                  </a:lnTo>
+                  <a:lnTo>
+                    <a:pt x="0" y="0"/>
+                  </a:lnTo>
+                </a:path>
+              </a:pathLst>
+            </a:custGeom>
+            <a:ln w="6775" cap="flat">
+              <a:solidFill>
+                <a:srgbClr val="EBEBEB">
+                  <a:alpha val="100000"/>
+                </a:srgbClr>
+              </a:solidFill>
+              <a:prstDash val="solid"/>
+              <a:round/>
+            </a:ln>
+          </p:spPr>
+          <p:txBody>
+            <a:bodyPr/>
+            <a:lstStyle/>
+            <a:p/>
+          </p:txBody>
+        </p:sp>
+        <p:sp>
+          <p:nvSpPr>
+            <p:cNvPr id="55" name="pl55"/>
+            <p:cNvSpPr/>
+            <p:nvPr/>
+          </p:nvSpPr>
+          <p:spPr>
+            <a:xfrm>
+              <a:off x="6962686" y="4336484"/>
+              <a:ext cx="0" cy="1317069"/>
+            </a:xfrm>
+            <a:custGeom>
+              <a:avLst/>
+              <a:pathLst>
+                <a:path w="0" h="1317069">
+                  <a:moveTo>
+                    <a:pt x="0" y="1317069"/>
+                  </a:moveTo>
+                  <a:lnTo>
+                    <a:pt x="0" y="0"/>
+                  </a:lnTo>
+                  <a:lnTo>
+                    <a:pt x="0" y="0"/>
+                  </a:lnTo>
+                </a:path>
+              </a:pathLst>
+            </a:custGeom>
+            <a:ln w="6775" cap="flat">
+              <a:solidFill>
+                <a:srgbClr val="EBEBEB">
+                  <a:alpha val="100000"/>
+                </a:srgbClr>
+              </a:solidFill>
+              <a:prstDash val="solid"/>
+              <a:round/>
+            </a:ln>
+          </p:spPr>
+          <p:txBody>
+            <a:bodyPr/>
+            <a:lstStyle/>
+            <a:p/>
+          </p:txBody>
+        </p:sp>
+        <p:sp>
+          <p:nvSpPr>
+            <p:cNvPr id="56" name="pl56"/>
+            <p:cNvSpPr/>
+            <p:nvPr/>
+          </p:nvSpPr>
+          <p:spPr>
+            <a:xfrm>
+              <a:off x="7817712" y="4336484"/>
+              <a:ext cx="0" cy="1317069"/>
+            </a:xfrm>
+            <a:custGeom>
+              <a:avLst/>
+              <a:pathLst>
+                <a:path w="0" h="1317069">
+                  <a:moveTo>
+                    <a:pt x="0" y="1317069"/>
+                  </a:moveTo>
+                  <a:lnTo>
+                    <a:pt x="0" y="0"/>
+                  </a:lnTo>
+                  <a:lnTo>
+                    <a:pt x="0" y="0"/>
+                  </a:lnTo>
+                </a:path>
+              </a:pathLst>
+            </a:custGeom>
+            <a:ln w="6775" cap="flat">
+              <a:solidFill>
+                <a:srgbClr val="EBEBEB">
+                  <a:alpha val="100000"/>
+                </a:srgbClr>
+              </a:solidFill>
+              <a:prstDash val="solid"/>
+              <a:round/>
+            </a:ln>
+          </p:spPr>
+          <p:txBody>
+            <a:bodyPr/>
+            <a:lstStyle/>
+            <a:p/>
+          </p:txBody>
+        </p:sp>
+        <p:sp>
+          <p:nvSpPr>
+            <p:cNvPr id="57" name="pl57"/>
+            <p:cNvSpPr/>
+            <p:nvPr/>
+          </p:nvSpPr>
+          <p:spPr>
+            <a:xfrm>
+              <a:off x="887106" y="5593686"/>
+              <a:ext cx="7660515" cy="0"/>
+            </a:xfrm>
+            <a:custGeom>
+              <a:avLst/>
+              <a:pathLst>
+                <a:path w="7660515" h="0">
+                  <a:moveTo>
+                    <a:pt x="0" y="0"/>
+                  </a:moveTo>
+                  <a:lnTo>
+                    <a:pt x="7660515" y="0"/>
+                  </a:lnTo>
+                  <a:lnTo>
+                    <a:pt x="7660515" y="0"/>
+                  </a:lnTo>
+                </a:path>
+              </a:pathLst>
+            </a:custGeom>
+            <a:ln w="13550" cap="flat">
+              <a:solidFill>
+                <a:srgbClr val="EBEBEB">
+                  <a:alpha val="100000"/>
+                </a:srgbClr>
+              </a:solidFill>
+              <a:prstDash val="solid"/>
+              <a:round/>
+            </a:ln>
+          </p:spPr>
+          <p:txBody>
+            <a:bodyPr/>
+            <a:lstStyle/>
+            <a:p/>
+          </p:txBody>
+        </p:sp>
+        <p:sp>
+          <p:nvSpPr>
+            <p:cNvPr id="58" name="pl58"/>
+            <p:cNvSpPr/>
+            <p:nvPr/>
+          </p:nvSpPr>
+          <p:spPr>
+            <a:xfrm>
+              <a:off x="887106" y="5294352"/>
+              <a:ext cx="7660515" cy="0"/>
+            </a:xfrm>
+            <a:custGeom>
+              <a:avLst/>
+              <a:pathLst>
+                <a:path w="7660515" h="0">
+                  <a:moveTo>
+                    <a:pt x="0" y="0"/>
+                  </a:moveTo>
+                  <a:lnTo>
+                    <a:pt x="7660515" y="0"/>
+                  </a:lnTo>
+                  <a:lnTo>
+                    <a:pt x="7660515" y="0"/>
+                  </a:lnTo>
+                </a:path>
+              </a:pathLst>
+            </a:custGeom>
+            <a:ln w="13550" cap="flat">
+              <a:solidFill>
+                <a:srgbClr val="EBEBEB">
+                  <a:alpha val="100000"/>
+                </a:srgbClr>
+              </a:solidFill>
+              <a:prstDash val="solid"/>
+              <a:round/>
+            </a:ln>
+          </p:spPr>
+          <p:txBody>
+            <a:bodyPr/>
+            <a:lstStyle/>
+            <a:p/>
+          </p:txBody>
+        </p:sp>
+        <p:sp>
+          <p:nvSpPr>
+            <p:cNvPr id="59" name="pl59"/>
+            <p:cNvSpPr/>
+            <p:nvPr/>
+          </p:nvSpPr>
+          <p:spPr>
+            <a:xfrm>
+              <a:off x="887106" y="4995019"/>
+              <a:ext cx="7660515" cy="0"/>
+            </a:xfrm>
+            <a:custGeom>
+              <a:avLst/>
+              <a:pathLst>
+                <a:path w="7660515" h="0">
+                  <a:moveTo>
+                    <a:pt x="0" y="0"/>
+                  </a:moveTo>
+                  <a:lnTo>
+                    <a:pt x="7660515" y="0"/>
+                  </a:lnTo>
+                  <a:lnTo>
+                    <a:pt x="7660515" y="0"/>
+                  </a:lnTo>
+                </a:path>
+              </a:pathLst>
+            </a:custGeom>
+            <a:ln w="13550" cap="flat">
+              <a:solidFill>
+                <a:srgbClr val="EBEBEB">
+                  <a:alpha val="100000"/>
+                </a:srgbClr>
+              </a:solidFill>
+              <a:prstDash val="solid"/>
+              <a:round/>
+            </a:ln>
+          </p:spPr>
+          <p:txBody>
+            <a:bodyPr/>
+            <a:lstStyle/>
+            <a:p/>
+          </p:txBody>
+        </p:sp>
+        <p:sp>
+          <p:nvSpPr>
+            <p:cNvPr id="60" name="pl60"/>
+            <p:cNvSpPr/>
+            <p:nvPr/>
+          </p:nvSpPr>
+          <p:spPr>
+            <a:xfrm>
+              <a:off x="887106" y="4695685"/>
+              <a:ext cx="7660515" cy="0"/>
+            </a:xfrm>
+            <a:custGeom>
+              <a:avLst/>
+              <a:pathLst>
+                <a:path w="7660515" h="0">
+                  <a:moveTo>
+                    <a:pt x="0" y="0"/>
+                  </a:moveTo>
+                  <a:lnTo>
+                    <a:pt x="7660515" y="0"/>
+                  </a:lnTo>
+                  <a:lnTo>
+                    <a:pt x="7660515" y="0"/>
+                  </a:lnTo>
+                </a:path>
+              </a:pathLst>
+            </a:custGeom>
+            <a:ln w="13550" cap="flat">
+              <a:solidFill>
+                <a:srgbClr val="EBEBEB">
+                  <a:alpha val="100000"/>
+                </a:srgbClr>
+              </a:solidFill>
+              <a:prstDash val="solid"/>
+              <a:round/>
+            </a:ln>
+          </p:spPr>
+          <p:txBody>
+            <a:bodyPr/>
+            <a:lstStyle/>
+            <a:p/>
+          </p:txBody>
+        </p:sp>
+        <p:sp>
+          <p:nvSpPr>
+            <p:cNvPr id="61" name="pl61"/>
+            <p:cNvSpPr/>
+            <p:nvPr/>
+          </p:nvSpPr>
+          <p:spPr>
+            <a:xfrm>
+              <a:off x="887106" y="4396351"/>
+              <a:ext cx="7660515" cy="0"/>
+            </a:xfrm>
+            <a:custGeom>
+              <a:avLst/>
+              <a:pathLst>
+                <a:path w="7660515" h="0">
+                  <a:moveTo>
+                    <a:pt x="0" y="0"/>
+                  </a:moveTo>
+                  <a:lnTo>
+                    <a:pt x="7660515" y="0"/>
+                  </a:lnTo>
+                  <a:lnTo>
+                    <a:pt x="7660515" y="0"/>
+                  </a:lnTo>
+                </a:path>
+              </a:pathLst>
+            </a:custGeom>
+            <a:ln w="13550" cap="flat">
+              <a:solidFill>
+                <a:srgbClr val="EBEBEB">
+                  <a:alpha val="100000"/>
+                </a:srgbClr>
+              </a:solidFill>
+              <a:prstDash val="solid"/>
+              <a:round/>
+            </a:ln>
+          </p:spPr>
+          <p:txBody>
+            <a:bodyPr/>
+            <a:lstStyle/>
+            <a:p/>
+          </p:txBody>
+        </p:sp>
+        <p:sp>
+          <p:nvSpPr>
+            <p:cNvPr id="62" name="pl62"/>
+            <p:cNvSpPr/>
+            <p:nvPr/>
+          </p:nvSpPr>
+          <p:spPr>
+            <a:xfrm>
+              <a:off x="1405017" y="4336484"/>
+              <a:ext cx="0" cy="1317069"/>
+            </a:xfrm>
+            <a:custGeom>
+              <a:avLst/>
+              <a:pathLst>
+                <a:path w="0" h="1317069">
+                  <a:moveTo>
+                    <a:pt x="0" y="1317069"/>
+                  </a:moveTo>
+                  <a:lnTo>
+                    <a:pt x="0" y="0"/>
+                  </a:lnTo>
+                  <a:lnTo>
+                    <a:pt x="0" y="0"/>
+                  </a:lnTo>
+                </a:path>
+              </a:pathLst>
+            </a:custGeom>
+            <a:ln w="13550" cap="flat">
+              <a:solidFill>
+                <a:srgbClr val="EBEBEB">
+                  <a:alpha val="100000"/>
+                </a:srgbClr>
+              </a:solidFill>
+              <a:prstDash val="solid"/>
+              <a:round/>
+            </a:ln>
+          </p:spPr>
+          <p:txBody>
+            <a:bodyPr/>
+            <a:lstStyle/>
+            <a:p/>
+          </p:txBody>
+        </p:sp>
+        <p:sp>
+          <p:nvSpPr>
+            <p:cNvPr id="63" name="pl63"/>
+            <p:cNvSpPr/>
+            <p:nvPr/>
+          </p:nvSpPr>
+          <p:spPr>
+            <a:xfrm>
+              <a:off x="2260043" y="4336484"/>
+              <a:ext cx="0" cy="1317069"/>
+            </a:xfrm>
+            <a:custGeom>
+              <a:avLst/>
+              <a:pathLst>
+                <a:path w="0" h="1317069">
+                  <a:moveTo>
+                    <a:pt x="0" y="1317069"/>
+                  </a:moveTo>
+                  <a:lnTo>
+                    <a:pt x="0" y="0"/>
+                  </a:lnTo>
+                  <a:lnTo>
+                    <a:pt x="0" y="0"/>
+                  </a:lnTo>
+                </a:path>
+              </a:pathLst>
+            </a:custGeom>
+            <a:ln w="13550" cap="flat">
+              <a:solidFill>
+                <a:srgbClr val="EBEBEB">
+                  <a:alpha val="100000"/>
+                </a:srgbClr>
+              </a:solidFill>
+              <a:prstDash val="solid"/>
+              <a:round/>
+            </a:ln>
+          </p:spPr>
+          <p:txBody>
+            <a:bodyPr/>
+            <a:lstStyle/>
+            <a:p/>
+          </p:txBody>
+        </p:sp>
+        <p:sp>
+          <p:nvSpPr>
+            <p:cNvPr id="64" name="pl64"/>
+            <p:cNvSpPr/>
+            <p:nvPr/>
+          </p:nvSpPr>
+          <p:spPr>
+            <a:xfrm>
+              <a:off x="3115069" y="4336484"/>
+              <a:ext cx="0" cy="1317069"/>
+            </a:xfrm>
+            <a:custGeom>
+              <a:avLst/>
+              <a:pathLst>
+                <a:path w="0" h="1317069">
+                  <a:moveTo>
+                    <a:pt x="0" y="1317069"/>
+                  </a:moveTo>
+                  <a:lnTo>
+                    <a:pt x="0" y="0"/>
+                  </a:lnTo>
+                  <a:lnTo>
+                    <a:pt x="0" y="0"/>
+                  </a:lnTo>
+                </a:path>
+              </a:pathLst>
+            </a:custGeom>
+            <a:ln w="13550" cap="flat">
+              <a:solidFill>
+                <a:srgbClr val="EBEBEB">
+                  <a:alpha val="100000"/>
+                </a:srgbClr>
+              </a:solidFill>
+              <a:prstDash val="solid"/>
+              <a:round/>
+            </a:ln>
+          </p:spPr>
+          <p:txBody>
+            <a:bodyPr/>
+            <a:lstStyle/>
+            <a:p/>
+          </p:txBody>
+        </p:sp>
+        <p:sp>
+          <p:nvSpPr>
+            <p:cNvPr id="65" name="pl65"/>
+            <p:cNvSpPr/>
+            <p:nvPr/>
+          </p:nvSpPr>
+          <p:spPr>
+            <a:xfrm>
+              <a:off x="3970095" y="4336484"/>
+              <a:ext cx="0" cy="1317069"/>
+            </a:xfrm>
+            <a:custGeom>
+              <a:avLst/>
+              <a:pathLst>
+                <a:path w="0" h="1317069">
+                  <a:moveTo>
+                    <a:pt x="0" y="1317069"/>
+                  </a:moveTo>
+                  <a:lnTo>
+                    <a:pt x="0" y="0"/>
+                  </a:lnTo>
+                  <a:lnTo>
+                    <a:pt x="0" y="0"/>
+                  </a:lnTo>
+                </a:path>
+              </a:pathLst>
+            </a:custGeom>
+            <a:ln w="13550" cap="flat">
+              <a:solidFill>
+                <a:srgbClr val="EBEBEB">
+                  <a:alpha val="100000"/>
+                </a:srgbClr>
+              </a:solidFill>
+              <a:prstDash val="solid"/>
+              <a:round/>
+            </a:ln>
+          </p:spPr>
+          <p:txBody>
+            <a:bodyPr/>
+            <a:lstStyle/>
+            <a:p/>
+          </p:txBody>
+        </p:sp>
+        <p:sp>
+          <p:nvSpPr>
+            <p:cNvPr id="66" name="pl66"/>
+            <p:cNvSpPr/>
+            <p:nvPr/>
+          </p:nvSpPr>
+          <p:spPr>
+            <a:xfrm>
+              <a:off x="4825121" y="4336484"/>
+              <a:ext cx="0" cy="1317069"/>
+            </a:xfrm>
+            <a:custGeom>
+              <a:avLst/>
+              <a:pathLst>
+                <a:path w="0" h="1317069">
+                  <a:moveTo>
+                    <a:pt x="0" y="1317069"/>
+                  </a:moveTo>
+                  <a:lnTo>
+                    <a:pt x="0" y="0"/>
+                  </a:lnTo>
+                  <a:lnTo>
+                    <a:pt x="0" y="0"/>
+                  </a:lnTo>
+                </a:path>
+              </a:pathLst>
+            </a:custGeom>
+            <a:ln w="13550" cap="flat">
+              <a:solidFill>
+                <a:srgbClr val="EBEBEB">
+                  <a:alpha val="100000"/>
+                </a:srgbClr>
+              </a:solidFill>
+              <a:prstDash val="solid"/>
+              <a:round/>
+            </a:ln>
+          </p:spPr>
+          <p:txBody>
+            <a:bodyPr/>
+            <a:lstStyle/>
+            <a:p/>
+          </p:txBody>
+        </p:sp>
+        <p:sp>
+          <p:nvSpPr>
+            <p:cNvPr id="67" name="pl67"/>
+            <p:cNvSpPr/>
+            <p:nvPr/>
+          </p:nvSpPr>
+          <p:spPr>
+            <a:xfrm>
+              <a:off x="5680147" y="4336484"/>
+              <a:ext cx="0" cy="1317069"/>
+            </a:xfrm>
+            <a:custGeom>
+              <a:avLst/>
+              <a:pathLst>
+                <a:path w="0" h="1317069">
+                  <a:moveTo>
+                    <a:pt x="0" y="1317069"/>
+                  </a:moveTo>
+                  <a:lnTo>
+                    <a:pt x="0" y="0"/>
+                  </a:lnTo>
+                  <a:lnTo>
+                    <a:pt x="0" y="0"/>
+                  </a:lnTo>
+                </a:path>
+              </a:pathLst>
+            </a:custGeom>
+            <a:ln w="13550" cap="flat">
+              <a:solidFill>
+                <a:srgbClr val="EBEBEB">
+                  <a:alpha val="100000"/>
+                </a:srgbClr>
+              </a:solidFill>
+              <a:prstDash val="solid"/>
+              <a:round/>
+            </a:ln>
+          </p:spPr>
+          <p:txBody>
+            <a:bodyPr/>
+            <a:lstStyle/>
+            <a:p/>
+          </p:txBody>
+        </p:sp>
+        <p:sp>
+          <p:nvSpPr>
+            <p:cNvPr id="68" name="pl68"/>
+            <p:cNvSpPr/>
+            <p:nvPr/>
+          </p:nvSpPr>
+          <p:spPr>
+            <a:xfrm>
+              <a:off x="6535173" y="4336484"/>
+              <a:ext cx="0" cy="1317069"/>
+            </a:xfrm>
+            <a:custGeom>
+              <a:avLst/>
+              <a:pathLst>
+                <a:path w="0" h="1317069">
+                  <a:moveTo>
+                    <a:pt x="0" y="1317069"/>
+                  </a:moveTo>
+                  <a:lnTo>
+                    <a:pt x="0" y="0"/>
+                  </a:lnTo>
+                  <a:lnTo>
+                    <a:pt x="0" y="0"/>
+                  </a:lnTo>
+                </a:path>
+              </a:pathLst>
+            </a:custGeom>
+            <a:ln w="13550" cap="flat">
+              <a:solidFill>
+                <a:srgbClr val="EBEBEB">
+                  <a:alpha val="100000"/>
+                </a:srgbClr>
+              </a:solidFill>
+              <a:prstDash val="solid"/>
+              <a:round/>
+            </a:ln>
+          </p:spPr>
+          <p:txBody>
+            <a:bodyPr/>
+            <a:lstStyle/>
+            <a:p/>
+          </p:txBody>
+        </p:sp>
+        <p:sp>
+          <p:nvSpPr>
+            <p:cNvPr id="69" name="pl69"/>
+            <p:cNvSpPr/>
+            <p:nvPr/>
+          </p:nvSpPr>
+          <p:spPr>
+            <a:xfrm>
+              <a:off x="7390199" y="4336484"/>
+              <a:ext cx="0" cy="1317069"/>
+            </a:xfrm>
+            <a:custGeom>
+              <a:avLst/>
+              <a:pathLst>
+                <a:path w="0" h="1317069">
+                  <a:moveTo>
+                    <a:pt x="0" y="1317069"/>
+                  </a:moveTo>
+                  <a:lnTo>
+                    <a:pt x="0" y="0"/>
+                  </a:lnTo>
+                  <a:lnTo>
+                    <a:pt x="0" y="0"/>
+                  </a:lnTo>
+                </a:path>
+              </a:pathLst>
+            </a:custGeom>
+            <a:ln w="13550" cap="flat">
+              <a:solidFill>
+                <a:srgbClr val="EBEBEB">
+                  <a:alpha val="100000"/>
+                </a:srgbClr>
+              </a:solidFill>
+              <a:prstDash val="solid"/>
+              <a:round/>
+            </a:ln>
+          </p:spPr>
+          <p:txBody>
+            <a:bodyPr/>
+            <a:lstStyle/>
+            <a:p/>
+          </p:txBody>
+        </p:sp>
+        <p:sp>
+          <p:nvSpPr>
+            <p:cNvPr id="70" name="pl70"/>
+            <p:cNvSpPr/>
+            <p:nvPr/>
+          </p:nvSpPr>
+          <p:spPr>
+            <a:xfrm>
+              <a:off x="8245225" y="4336484"/>
+              <a:ext cx="0" cy="1317069"/>
+            </a:xfrm>
+            <a:custGeom>
+              <a:avLst/>
+              <a:pathLst>
+                <a:path w="0" h="1317069">
+                  <a:moveTo>
+                    <a:pt x="0" y="1317069"/>
+                  </a:moveTo>
+                  <a:lnTo>
+                    <a:pt x="0" y="0"/>
+                  </a:lnTo>
+                  <a:lnTo>
+                    <a:pt x="0" y="0"/>
+                  </a:lnTo>
+                </a:path>
+              </a:pathLst>
+            </a:custGeom>
+            <a:ln w="13550" cap="flat">
+              <a:solidFill>
+                <a:srgbClr val="EBEBEB">
+                  <a:alpha val="100000"/>
+                </a:srgbClr>
+              </a:solidFill>
+              <a:prstDash val="solid"/>
+              <a:round/>
+            </a:ln>
+          </p:spPr>
+          <p:txBody>
+            <a:bodyPr/>
+            <a:lstStyle/>
+            <a:p/>
+          </p:txBody>
+        </p:sp>
+        <p:sp>
+          <p:nvSpPr>
+            <p:cNvPr id="71" name="pg71"/>
+            <p:cNvSpPr/>
+            <p:nvPr/>
+          </p:nvSpPr>
+          <p:spPr>
+            <a:xfrm>
+              <a:off x="1235312" y="4361397"/>
+              <a:ext cx="6964104" cy="1182797"/>
+            </a:xfrm>
+            <a:custGeom>
+              <a:avLst/>
+              <a:pathLst>
+                <a:path w="6964104" h="1182797">
+                  <a:moveTo>
+                    <a:pt x="0" y="0"/>
+                  </a:moveTo>
+                  <a:lnTo>
+                    <a:pt x="70344" y="39373"/>
+                  </a:lnTo>
+                  <a:lnTo>
+                    <a:pt x="140688" y="77488"/>
+                  </a:lnTo>
+                  <a:lnTo>
+                    <a:pt x="211033" y="114385"/>
+                  </a:lnTo>
+                  <a:lnTo>
+                    <a:pt x="281377" y="150104"/>
+                  </a:lnTo>
+                  <a:lnTo>
+                    <a:pt x="351722" y="184681"/>
+                  </a:lnTo>
+                  <a:lnTo>
+                    <a:pt x="422066" y="218153"/>
+                  </a:lnTo>
+                  <a:lnTo>
+                    <a:pt x="492411" y="250556"/>
+                  </a:lnTo>
+                  <a:lnTo>
+                    <a:pt x="562755" y="281924"/>
+                  </a:lnTo>
+                  <a:lnTo>
+                    <a:pt x="633100" y="312289"/>
+                  </a:lnTo>
+                  <a:lnTo>
+                    <a:pt x="703444" y="341684"/>
+                  </a:lnTo>
+                  <a:lnTo>
+                    <a:pt x="773789" y="370140"/>
+                  </a:lnTo>
+                  <a:lnTo>
+                    <a:pt x="844133" y="397687"/>
+                  </a:lnTo>
+                  <a:lnTo>
+                    <a:pt x="914478" y="424354"/>
+                  </a:lnTo>
+                  <a:lnTo>
+                    <a:pt x="984822" y="450168"/>
+                  </a:lnTo>
+                  <a:lnTo>
+                    <a:pt x="1055167" y="475158"/>
+                  </a:lnTo>
+                  <a:lnTo>
+                    <a:pt x="1125511" y="499349"/>
+                  </a:lnTo>
+                  <a:lnTo>
+                    <a:pt x="1195856" y="522768"/>
+                  </a:lnTo>
+                  <a:lnTo>
+                    <a:pt x="1266200" y="545438"/>
+                  </a:lnTo>
+                  <a:lnTo>
+                    <a:pt x="1336545" y="567383"/>
+                  </a:lnTo>
+                  <a:lnTo>
+                    <a:pt x="1406889" y="588628"/>
+                  </a:lnTo>
+                  <a:lnTo>
+                    <a:pt x="1477234" y="609194"/>
+                  </a:lnTo>
+                  <a:lnTo>
+                    <a:pt x="1547578" y="629102"/>
+                  </a:lnTo>
+                  <a:lnTo>
+                    <a:pt x="1617923" y="648375"/>
+                  </a:lnTo>
+                  <a:lnTo>
+                    <a:pt x="1688267" y="667032"/>
+                  </a:lnTo>
+                  <a:lnTo>
+                    <a:pt x="1758612" y="685092"/>
+                  </a:lnTo>
+                  <a:lnTo>
+                    <a:pt x="1828956" y="702576"/>
+                  </a:lnTo>
+                  <a:lnTo>
+                    <a:pt x="1899301" y="719501"/>
+                  </a:lnTo>
+                  <a:lnTo>
+                    <a:pt x="1969645" y="735885"/>
+                  </a:lnTo>
+                  <a:lnTo>
+                    <a:pt x="2039990" y="751746"/>
+                  </a:lnTo>
+                  <a:lnTo>
+                    <a:pt x="2110334" y="767100"/>
+                  </a:lnTo>
+                  <a:lnTo>
+                    <a:pt x="2180679" y="781963"/>
+                  </a:lnTo>
+                  <a:lnTo>
+                    <a:pt x="2251023" y="796352"/>
+                  </a:lnTo>
+                  <a:lnTo>
+                    <a:pt x="2321368" y="810281"/>
+                  </a:lnTo>
+                  <a:lnTo>
+                    <a:pt x="2391712" y="823764"/>
+                  </a:lnTo>
+                  <a:lnTo>
+                    <a:pt x="2462057" y="836817"/>
+                  </a:lnTo>
+                  <a:lnTo>
+                    <a:pt x="2532401" y="849453"/>
+                  </a:lnTo>
+                  <a:lnTo>
+                    <a:pt x="2602746" y="861685"/>
+                  </a:lnTo>
+                  <a:lnTo>
+                    <a:pt x="2673090" y="873526"/>
+                  </a:lnTo>
+                  <a:lnTo>
+                    <a:pt x="2743435" y="884989"/>
+                  </a:lnTo>
+                  <a:lnTo>
+                    <a:pt x="2813779" y="896086"/>
+                  </a:lnTo>
+                  <a:lnTo>
+                    <a:pt x="2884124" y="906828"/>
+                  </a:lnTo>
+                  <a:lnTo>
+                    <a:pt x="2954468" y="917227"/>
+                  </a:lnTo>
+                  <a:lnTo>
+                    <a:pt x="3024813" y="927294"/>
+                  </a:lnTo>
+                  <a:lnTo>
+                    <a:pt x="3095157" y="932059"/>
+                  </a:lnTo>
+                  <a:lnTo>
+                    <a:pt x="3165502" y="929932"/>
+                  </a:lnTo>
+                  <a:lnTo>
+                    <a:pt x="3235846" y="927789"/>
+                  </a:lnTo>
+                  <a:lnTo>
+                    <a:pt x="3306191" y="925630"/>
+                  </a:lnTo>
+                  <a:lnTo>
+                    <a:pt x="3376535" y="923457"/>
+                  </a:lnTo>
+                  <a:lnTo>
+                    <a:pt x="3446880" y="921268"/>
+                  </a:lnTo>
+                  <a:lnTo>
+                    <a:pt x="3517224" y="919064"/>
+                  </a:lnTo>
+                  <a:lnTo>
+                    <a:pt x="3587569" y="916844"/>
+                  </a:lnTo>
+                  <a:lnTo>
+                    <a:pt x="3657913" y="914608"/>
+                  </a:lnTo>
+                  <a:lnTo>
+                    <a:pt x="3728257" y="912357"/>
+                  </a:lnTo>
+                  <a:lnTo>
+                    <a:pt x="3798602" y="910089"/>
+                  </a:lnTo>
+                  <a:lnTo>
+                    <a:pt x="3868946" y="907805"/>
+                  </a:lnTo>
+                  <a:lnTo>
+                    <a:pt x="3939291" y="905506"/>
+                  </a:lnTo>
+                  <a:lnTo>
+                    <a:pt x="4009635" y="903190"/>
+                  </a:lnTo>
+                  <a:lnTo>
+                    <a:pt x="4079980" y="900857"/>
+                  </a:lnTo>
+                  <a:lnTo>
+                    <a:pt x="4150324" y="898508"/>
+                  </a:lnTo>
+                  <a:lnTo>
+                    <a:pt x="4220669" y="896142"/>
+                  </a:lnTo>
+                  <a:lnTo>
+                    <a:pt x="4291013" y="893760"/>
+                  </a:lnTo>
+                  <a:lnTo>
+                    <a:pt x="4361358" y="891361"/>
+                  </a:lnTo>
+                  <a:lnTo>
+                    <a:pt x="4431702" y="888944"/>
+                  </a:lnTo>
+                  <a:lnTo>
+                    <a:pt x="4502047" y="886511"/>
+                  </a:lnTo>
+                  <a:lnTo>
+                    <a:pt x="4572391" y="884060"/>
+                  </a:lnTo>
+                  <a:lnTo>
+                    <a:pt x="4642736" y="881592"/>
+                  </a:lnTo>
+                  <a:lnTo>
+                    <a:pt x="4713080" y="879107"/>
+                  </a:lnTo>
+                  <a:lnTo>
+                    <a:pt x="4783425" y="876603"/>
+                  </a:lnTo>
+                  <a:lnTo>
+                    <a:pt x="4853769" y="874083"/>
+                  </a:lnTo>
+                  <a:lnTo>
+                    <a:pt x="4924114" y="871544"/>
+                  </a:lnTo>
+                  <a:lnTo>
+                    <a:pt x="4994458" y="868987"/>
+                  </a:lnTo>
+                  <a:lnTo>
+                    <a:pt x="5064803" y="866412"/>
+                  </a:lnTo>
+                  <a:lnTo>
+                    <a:pt x="5135147" y="863819"/>
+                  </a:lnTo>
+                  <a:lnTo>
+                    <a:pt x="5205492" y="861207"/>
+                  </a:lnTo>
+                  <a:lnTo>
+                    <a:pt x="5275836" y="858577"/>
+                  </a:lnTo>
+                  <a:lnTo>
+                    <a:pt x="5346181" y="855929"/>
+                  </a:lnTo>
+                  <a:lnTo>
+                    <a:pt x="5416525" y="853261"/>
+                  </a:lnTo>
+                  <a:lnTo>
+                    <a:pt x="5486870" y="850575"/>
+                  </a:lnTo>
+                  <a:lnTo>
+                    <a:pt x="5557214" y="847869"/>
+                  </a:lnTo>
+                  <a:lnTo>
+                    <a:pt x="5627559" y="845145"/>
+                  </a:lnTo>
+                  <a:lnTo>
+                    <a:pt x="5697903" y="842401"/>
+                  </a:lnTo>
+                  <a:lnTo>
+                    <a:pt x="5768248" y="839638"/>
+                  </a:lnTo>
+                  <a:lnTo>
+                    <a:pt x="5838592" y="836855"/>
+                  </a:lnTo>
+                  <a:lnTo>
+                    <a:pt x="5908937" y="834052"/>
+                  </a:lnTo>
+                  <a:lnTo>
+                    <a:pt x="5979281" y="831230"/>
+                  </a:lnTo>
+                  <a:lnTo>
+                    <a:pt x="6049626" y="828387"/>
+                  </a:lnTo>
+                  <a:lnTo>
+                    <a:pt x="6119970" y="825525"/>
+                  </a:lnTo>
+                  <a:lnTo>
+                    <a:pt x="6190315" y="822642"/>
+                  </a:lnTo>
+                  <a:lnTo>
+                    <a:pt x="6260659" y="819738"/>
+                  </a:lnTo>
+                  <a:lnTo>
+                    <a:pt x="6331004" y="816814"/>
+                  </a:lnTo>
+                  <a:lnTo>
+                    <a:pt x="6401348" y="813870"/>
+                  </a:lnTo>
+                  <a:lnTo>
+                    <a:pt x="6471693" y="810904"/>
+                  </a:lnTo>
+                  <a:lnTo>
+                    <a:pt x="6542037" y="807918"/>
+                  </a:lnTo>
+                  <a:lnTo>
+                    <a:pt x="6612382" y="804910"/>
+                  </a:lnTo>
+                  <a:lnTo>
+                    <a:pt x="6682726" y="801881"/>
+                  </a:lnTo>
+                  <a:lnTo>
+                    <a:pt x="6753071" y="798830"/>
+                  </a:lnTo>
+                  <a:lnTo>
+                    <a:pt x="6823415" y="795758"/>
+                  </a:lnTo>
+                  <a:lnTo>
+                    <a:pt x="6893760" y="792664"/>
+                  </a:lnTo>
+                  <a:lnTo>
+                    <a:pt x="6964104" y="789548"/>
+                  </a:lnTo>
+                  <a:lnTo>
+                    <a:pt x="6964104" y="1182797"/>
+                  </a:lnTo>
+                  <a:lnTo>
+                    <a:pt x="6893760" y="1181163"/>
+                  </a:lnTo>
+                  <a:lnTo>
+                    <a:pt x="6823415" y="1179476"/>
+                  </a:lnTo>
+                  <a:lnTo>
+                    <a:pt x="6753071" y="1177732"/>
+                  </a:lnTo>
+                  <a:lnTo>
+                    <a:pt x="6682726" y="1175932"/>
+                  </a:lnTo>
+                  <a:lnTo>
+                    <a:pt x="6612382" y="1174072"/>
+                  </a:lnTo>
+                  <a:lnTo>
+                    <a:pt x="6542037" y="1172150"/>
+                  </a:lnTo>
+                  <a:lnTo>
+                    <a:pt x="6471693" y="1170165"/>
+                  </a:lnTo>
+                  <a:lnTo>
+                    <a:pt x="6401348" y="1168115"/>
+                  </a:lnTo>
+                  <a:lnTo>
+                    <a:pt x="6331004" y="1165997"/>
+                  </a:lnTo>
+                  <a:lnTo>
+                    <a:pt x="6260659" y="1163809"/>
+                  </a:lnTo>
+                  <a:lnTo>
+                    <a:pt x="6190315" y="1161548"/>
+                  </a:lnTo>
+                  <a:lnTo>
+                    <a:pt x="6119970" y="1159214"/>
+                  </a:lnTo>
+                  <a:lnTo>
+                    <a:pt x="6049626" y="1156802"/>
+                  </a:lnTo>
+                  <a:lnTo>
+                    <a:pt x="5979281" y="1154310"/>
+                  </a:lnTo>
+                  <a:lnTo>
+                    <a:pt x="5908937" y="1151736"/>
+                  </a:lnTo>
+                  <a:lnTo>
+                    <a:pt x="5838592" y="1149078"/>
+                  </a:lnTo>
+                  <a:lnTo>
+                    <a:pt x="5768248" y="1146331"/>
+                  </a:lnTo>
+                  <a:lnTo>
+                    <a:pt x="5697903" y="1143494"/>
+                  </a:lnTo>
+                  <a:lnTo>
+                    <a:pt x="5627559" y="1140563"/>
+                  </a:lnTo>
+                  <a:lnTo>
+                    <a:pt x="5557214" y="1137536"/>
+                  </a:lnTo>
+                  <a:lnTo>
+                    <a:pt x="5486870" y="1134408"/>
+                  </a:lnTo>
+                  <a:lnTo>
+                    <a:pt x="5416525" y="1131178"/>
+                  </a:lnTo>
+                  <a:lnTo>
+                    <a:pt x="5346181" y="1127841"/>
+                  </a:lnTo>
+                  <a:lnTo>
+                    <a:pt x="5275836" y="1124393"/>
+                  </a:lnTo>
+                  <a:lnTo>
+                    <a:pt x="5205492" y="1120832"/>
+                  </a:lnTo>
+                  <a:lnTo>
+                    <a:pt x="5135147" y="1117153"/>
+                  </a:lnTo>
+                  <a:lnTo>
+                    <a:pt x="5064803" y="1113353"/>
+                  </a:lnTo>
+                  <a:lnTo>
+                    <a:pt x="4994458" y="1109427"/>
+                  </a:lnTo>
+                  <a:lnTo>
+                    <a:pt x="4924114" y="1105372"/>
+                  </a:lnTo>
+                  <a:lnTo>
+                    <a:pt x="4853769" y="1101183"/>
+                  </a:lnTo>
+                  <a:lnTo>
+                    <a:pt x="4783425" y="1096856"/>
+                  </a:lnTo>
+                  <a:lnTo>
+                    <a:pt x="4713080" y="1092386"/>
+                  </a:lnTo>
+                  <a:lnTo>
+                    <a:pt x="4642736" y="1087768"/>
+                  </a:lnTo>
+                  <a:lnTo>
+                    <a:pt x="4572391" y="1082998"/>
+                  </a:lnTo>
+                  <a:lnTo>
+                    <a:pt x="4502047" y="1078071"/>
+                  </a:lnTo>
+                  <a:lnTo>
+                    <a:pt x="4431702" y="1072981"/>
+                  </a:lnTo>
+                  <a:lnTo>
+                    <a:pt x="4361358" y="1067723"/>
+                  </a:lnTo>
+                  <a:lnTo>
+                    <a:pt x="4291013" y="1062291"/>
+                  </a:lnTo>
+                  <a:lnTo>
+                    <a:pt x="4220669" y="1056680"/>
+                  </a:lnTo>
+                  <a:lnTo>
+                    <a:pt x="4150324" y="1050884"/>
+                  </a:lnTo>
+                  <a:lnTo>
+                    <a:pt x="4079980" y="1044897"/>
+                  </a:lnTo>
+                  <a:lnTo>
+                    <a:pt x="4009635" y="1038712"/>
+                  </a:lnTo>
+                  <a:lnTo>
+                    <a:pt x="3939291" y="1032322"/>
+                  </a:lnTo>
+                  <a:lnTo>
+                    <a:pt x="3868946" y="1025722"/>
+                  </a:lnTo>
+                  <a:lnTo>
+                    <a:pt x="3798602" y="1018904"/>
+                  </a:lnTo>
+                  <a:lnTo>
+                    <a:pt x="3728257" y="1011862"/>
+                  </a:lnTo>
+                  <a:lnTo>
+                    <a:pt x="3657913" y="1004586"/>
+                  </a:lnTo>
+                  <a:lnTo>
+                    <a:pt x="3587569" y="997071"/>
+                  </a:lnTo>
+                  <a:lnTo>
+                    <a:pt x="3517224" y="989307"/>
+                  </a:lnTo>
+                  <a:lnTo>
+                    <a:pt x="3446880" y="981287"/>
+                  </a:lnTo>
+                  <a:lnTo>
+                    <a:pt x="3376535" y="973003"/>
+                  </a:lnTo>
+                  <a:lnTo>
+                    <a:pt x="3306191" y="964445"/>
+                  </a:lnTo>
+                  <a:lnTo>
+                    <a:pt x="3235846" y="955604"/>
+                  </a:lnTo>
+                  <a:lnTo>
+                    <a:pt x="3165502" y="946472"/>
+                  </a:lnTo>
+                  <a:lnTo>
+                    <a:pt x="3095157" y="937039"/>
+                  </a:lnTo>
+                  <a:lnTo>
+                    <a:pt x="3024813" y="934172"/>
+                  </a:lnTo>
+                  <a:lnTo>
+                    <a:pt x="2954468" y="936270"/>
+                  </a:lnTo>
+                  <a:lnTo>
+                    <a:pt x="2884124" y="938354"/>
+                  </a:lnTo>
+                  <a:lnTo>
+                    <a:pt x="2813779" y="940422"/>
+                  </a:lnTo>
+                  <a:lnTo>
+                    <a:pt x="2743435" y="942476"/>
+                  </a:lnTo>
+                  <a:lnTo>
+                    <a:pt x="2673090" y="944516"/>
+                  </a:lnTo>
+                  <a:lnTo>
+                    <a:pt x="2602746" y="946541"/>
+                  </a:lnTo>
+                  <a:lnTo>
+                    <a:pt x="2532401" y="948552"/>
+                  </a:lnTo>
+                  <a:lnTo>
+                    <a:pt x="2462057" y="950549"/>
+                  </a:lnTo>
+                  <a:lnTo>
+                    <a:pt x="2391712" y="952532"/>
+                  </a:lnTo>
+                  <a:lnTo>
+                    <a:pt x="2321368" y="954500"/>
+                  </a:lnTo>
+                  <a:lnTo>
+                    <a:pt x="2251023" y="956455"/>
+                  </a:lnTo>
+                  <a:lnTo>
+                    <a:pt x="2180679" y="958397"/>
+                  </a:lnTo>
+                  <a:lnTo>
+                    <a:pt x="2110334" y="960324"/>
+                  </a:lnTo>
+                  <a:lnTo>
+                    <a:pt x="2039990" y="962238"/>
+                  </a:lnTo>
+                  <a:lnTo>
+                    <a:pt x="1969645" y="964139"/>
+                  </a:lnTo>
+                  <a:lnTo>
+                    <a:pt x="1899301" y="966026"/>
+                  </a:lnTo>
+                  <a:lnTo>
+                    <a:pt x="1828956" y="967900"/>
+                  </a:lnTo>
+                  <a:lnTo>
+                    <a:pt x="1758612" y="969760"/>
+                  </a:lnTo>
+                  <a:lnTo>
+                    <a:pt x="1688267" y="971608"/>
+                  </a:lnTo>
+                  <a:lnTo>
+                    <a:pt x="1617923" y="973442"/>
+                  </a:lnTo>
+                  <a:lnTo>
+                    <a:pt x="1547578" y="975264"/>
+                  </a:lnTo>
+                  <a:lnTo>
+                    <a:pt x="1477234" y="977073"/>
+                  </a:lnTo>
+                  <a:lnTo>
+                    <a:pt x="1406889" y="978869"/>
+                  </a:lnTo>
+                  <a:lnTo>
+                    <a:pt x="1336545" y="980653"/>
+                  </a:lnTo>
+                  <a:lnTo>
+                    <a:pt x="1266200" y="982423"/>
+                  </a:lnTo>
+                  <a:lnTo>
+                    <a:pt x="1195856" y="984182"/>
+                  </a:lnTo>
+                  <a:lnTo>
+                    <a:pt x="1125511" y="985928"/>
+                  </a:lnTo>
+                  <a:lnTo>
+                    <a:pt x="1055167" y="987662"/>
+                  </a:lnTo>
+                  <a:lnTo>
+                    <a:pt x="984822" y="989383"/>
+                  </a:lnTo>
+                  <a:lnTo>
+                    <a:pt x="914478" y="991093"/>
+                  </a:lnTo>
+                  <a:lnTo>
+                    <a:pt x="844133" y="992790"/>
+                  </a:lnTo>
+                  <a:lnTo>
+                    <a:pt x="773789" y="994476"/>
+                  </a:lnTo>
+                  <a:lnTo>
+                    <a:pt x="703444" y="996149"/>
+                  </a:lnTo>
+                  <a:lnTo>
+                    <a:pt x="633100" y="997811"/>
+                  </a:lnTo>
+                  <a:lnTo>
+                    <a:pt x="562755" y="999461"/>
+                  </a:lnTo>
+                  <a:lnTo>
+                    <a:pt x="492411" y="1001100"/>
+                  </a:lnTo>
+                  <a:lnTo>
+                    <a:pt x="422066" y="1002727"/>
+                  </a:lnTo>
+                  <a:lnTo>
+                    <a:pt x="351722" y="1004343"/>
+                  </a:lnTo>
+                  <a:lnTo>
+                    <a:pt x="281377" y="1005947"/>
+                  </a:lnTo>
+                  <a:lnTo>
+                    <a:pt x="211033" y="1007540"/>
+                  </a:lnTo>
+                  <a:lnTo>
+                    <a:pt x="140688" y="1009121"/>
+                  </a:lnTo>
+                  <a:lnTo>
+                    <a:pt x="70344" y="1010692"/>
+                  </a:lnTo>
+                  <a:lnTo>
+                    <a:pt x="0" y="1012251"/>
+                  </a:lnTo>
+                  <a:close/>
+                </a:path>
+              </a:pathLst>
+            </a:custGeom>
+            <a:solidFill>
+              <a:srgbClr val="FF8C00">
+                <a:alpha val="20000"/>
+              </a:srgbClr>
+            </a:solidFill>
+          </p:spPr>
+          <p:txBody>
+            <a:bodyPr/>
+            <a:lstStyle/>
+            <a:p/>
+          </p:txBody>
+        </p:sp>
+        <p:sp>
+          <p:nvSpPr>
+            <p:cNvPr id="72" name="pl72"/>
+            <p:cNvSpPr/>
+            <p:nvPr/>
+          </p:nvSpPr>
+          <p:spPr>
+            <a:xfrm>
+              <a:off x="1235312" y="4361397"/>
+              <a:ext cx="6964104" cy="932059"/>
+            </a:xfrm>
+            <a:custGeom>
+              <a:avLst/>
+              <a:pathLst>
+                <a:path w="6964104" h="932059">
+                  <a:moveTo>
+                    <a:pt x="0" y="0"/>
+                  </a:moveTo>
+                  <a:lnTo>
+                    <a:pt x="70344" y="39373"/>
+                  </a:lnTo>
+                  <a:lnTo>
+                    <a:pt x="140688" y="77488"/>
+                  </a:lnTo>
+                  <a:lnTo>
+                    <a:pt x="211033" y="114385"/>
+                  </a:lnTo>
+                  <a:lnTo>
+                    <a:pt x="281377" y="150104"/>
+                  </a:lnTo>
+                  <a:lnTo>
+                    <a:pt x="351722" y="184681"/>
+                  </a:lnTo>
+                  <a:lnTo>
+                    <a:pt x="422066" y="218153"/>
+                  </a:lnTo>
+                  <a:lnTo>
+                    <a:pt x="492411" y="250556"/>
+                  </a:lnTo>
+                  <a:lnTo>
+                    <a:pt x="562755" y="281924"/>
+                  </a:lnTo>
+                  <a:lnTo>
+                    <a:pt x="633100" y="312289"/>
+                  </a:lnTo>
+                  <a:lnTo>
+                    <a:pt x="703444" y="341684"/>
+                  </a:lnTo>
+                  <a:lnTo>
+                    <a:pt x="773789" y="370140"/>
+                  </a:lnTo>
+                  <a:lnTo>
+                    <a:pt x="844133" y="397687"/>
+                  </a:lnTo>
+                  <a:lnTo>
+                    <a:pt x="914478" y="424354"/>
+                  </a:lnTo>
+                  <a:lnTo>
+                    <a:pt x="984822" y="450168"/>
+                  </a:lnTo>
+                  <a:lnTo>
+                    <a:pt x="1055167" y="475158"/>
+                  </a:lnTo>
+                  <a:lnTo>
+                    <a:pt x="1125511" y="499349"/>
+                  </a:lnTo>
+                  <a:lnTo>
+                    <a:pt x="1195856" y="522768"/>
+                  </a:lnTo>
+                  <a:lnTo>
+                    <a:pt x="1266200" y="545438"/>
+                  </a:lnTo>
+                  <a:lnTo>
+                    <a:pt x="1336545" y="567383"/>
+                  </a:lnTo>
+                  <a:lnTo>
+                    <a:pt x="1406889" y="588628"/>
+                  </a:lnTo>
+                  <a:lnTo>
+                    <a:pt x="1477234" y="609194"/>
+                  </a:lnTo>
+                  <a:lnTo>
+                    <a:pt x="1547578" y="629102"/>
+                  </a:lnTo>
+                  <a:lnTo>
+                    <a:pt x="1617923" y="648375"/>
+                  </a:lnTo>
+                  <a:lnTo>
+                    <a:pt x="1688267" y="667032"/>
+                  </a:lnTo>
+                  <a:lnTo>
+                    <a:pt x="1758612" y="685092"/>
+                  </a:lnTo>
+                  <a:lnTo>
+                    <a:pt x="1828956" y="702576"/>
+                  </a:lnTo>
+                  <a:lnTo>
+                    <a:pt x="1899301" y="719501"/>
+                  </a:lnTo>
+                  <a:lnTo>
+                    <a:pt x="1969645" y="735885"/>
+                  </a:lnTo>
+                  <a:lnTo>
+                    <a:pt x="2039990" y="751746"/>
+                  </a:lnTo>
+                  <a:lnTo>
+                    <a:pt x="2110334" y="767100"/>
+                  </a:lnTo>
+                  <a:lnTo>
+                    <a:pt x="2180679" y="781963"/>
+                  </a:lnTo>
+                  <a:lnTo>
+                    <a:pt x="2251023" y="796352"/>
+                  </a:lnTo>
+                  <a:lnTo>
+                    <a:pt x="2321368" y="810281"/>
+                  </a:lnTo>
+                  <a:lnTo>
+                    <a:pt x="2391712" y="823764"/>
+                  </a:lnTo>
+                  <a:lnTo>
+                    <a:pt x="2462057" y="836817"/>
+                  </a:lnTo>
+                  <a:lnTo>
+                    <a:pt x="2532401" y="849453"/>
+                  </a:lnTo>
+                  <a:lnTo>
+                    <a:pt x="2602746" y="861685"/>
+                  </a:lnTo>
+                  <a:lnTo>
+                    <a:pt x="2673090" y="873526"/>
+                  </a:lnTo>
+                  <a:lnTo>
+                    <a:pt x="2743435" y="884989"/>
+                  </a:lnTo>
+                  <a:lnTo>
+                    <a:pt x="2813779" y="896086"/>
+                  </a:lnTo>
+                  <a:lnTo>
+                    <a:pt x="2884124" y="906828"/>
+                  </a:lnTo>
+                  <a:lnTo>
+                    <a:pt x="2954468" y="917227"/>
+                  </a:lnTo>
+                  <a:lnTo>
+                    <a:pt x="3024813" y="927294"/>
+                  </a:lnTo>
+                  <a:lnTo>
+                    <a:pt x="3095157" y="932059"/>
+                  </a:lnTo>
+                  <a:lnTo>
+                    <a:pt x="3165502" y="929932"/>
+                  </a:lnTo>
+                  <a:lnTo>
+                    <a:pt x="3235846" y="927789"/>
+                  </a:lnTo>
+                  <a:lnTo>
+                    <a:pt x="3306191" y="925630"/>
+                  </a:lnTo>
+                  <a:lnTo>
+                    <a:pt x="3376535" y="923457"/>
+                  </a:lnTo>
+                  <a:lnTo>
+                    <a:pt x="3446880" y="921268"/>
+                  </a:lnTo>
+                  <a:lnTo>
+                    <a:pt x="3517224" y="919064"/>
+                  </a:lnTo>
+                  <a:lnTo>
+                    <a:pt x="3587569" y="916844"/>
+                  </a:lnTo>
+                  <a:lnTo>
+                    <a:pt x="3657913" y="914608"/>
+                  </a:lnTo>
+                  <a:lnTo>
+                    <a:pt x="3728257" y="912357"/>
+                  </a:lnTo>
+                  <a:lnTo>
+                    <a:pt x="3798602" y="910089"/>
+                  </a:lnTo>
+                  <a:lnTo>
+                    <a:pt x="3868946" y="907805"/>
+                  </a:lnTo>
+                  <a:lnTo>
+                    <a:pt x="3939291" y="905506"/>
+                  </a:lnTo>
+                  <a:lnTo>
+                    <a:pt x="4009635" y="903190"/>
+                  </a:lnTo>
+                  <a:lnTo>
+                    <a:pt x="4079980" y="900857"/>
+                  </a:lnTo>
+                  <a:lnTo>
+                    <a:pt x="4150324" y="898508"/>
+                  </a:lnTo>
+                  <a:lnTo>
+                    <a:pt x="4220669" y="896142"/>
+                  </a:lnTo>
+                  <a:lnTo>
+                    <a:pt x="4291013" y="893760"/>
+                  </a:lnTo>
+                  <a:lnTo>
+                    <a:pt x="4361358" y="891361"/>
+                  </a:lnTo>
+                  <a:lnTo>
+                    <a:pt x="4431702" y="888944"/>
+                  </a:lnTo>
+                  <a:lnTo>
+                    <a:pt x="4502047" y="886511"/>
+                  </a:lnTo>
+                  <a:lnTo>
+                    <a:pt x="4572391" y="884060"/>
+                  </a:lnTo>
+                  <a:lnTo>
+                    <a:pt x="4642736" y="881592"/>
+                  </a:lnTo>
+                  <a:lnTo>
+                    <a:pt x="4713080" y="879107"/>
+                  </a:lnTo>
+                  <a:lnTo>
+                    <a:pt x="4783425" y="876603"/>
+                  </a:lnTo>
+                  <a:lnTo>
+                    <a:pt x="4853769" y="874083"/>
+                  </a:lnTo>
+                  <a:lnTo>
+                    <a:pt x="4924114" y="871544"/>
+                  </a:lnTo>
+                  <a:lnTo>
+                    <a:pt x="4994458" y="868987"/>
+                  </a:lnTo>
+                  <a:lnTo>
+                    <a:pt x="5064803" y="866412"/>
+                  </a:lnTo>
+                  <a:lnTo>
+                    <a:pt x="5135147" y="863819"/>
+                  </a:lnTo>
+                  <a:lnTo>
+                    <a:pt x="5205492" y="861207"/>
+                  </a:lnTo>
+                  <a:lnTo>
+                    <a:pt x="5275836" y="858577"/>
+                  </a:lnTo>
+                  <a:lnTo>
+                    <a:pt x="5346181" y="855929"/>
+                  </a:lnTo>
+                  <a:lnTo>
+                    <a:pt x="5416525" y="853261"/>
+                  </a:lnTo>
+                  <a:lnTo>
+                    <a:pt x="5486870" y="850575"/>
+                  </a:lnTo>
+                  <a:lnTo>
+                    <a:pt x="5557214" y="847869"/>
+                  </a:lnTo>
+                  <a:lnTo>
+                    <a:pt x="5627559" y="845145"/>
+                  </a:lnTo>
+                  <a:lnTo>
+                    <a:pt x="5697903" y="842401"/>
+                  </a:lnTo>
+                  <a:lnTo>
+                    <a:pt x="5768248" y="839638"/>
+                  </a:lnTo>
+                  <a:lnTo>
+                    <a:pt x="5838592" y="836855"/>
+                  </a:lnTo>
+                  <a:lnTo>
+                    <a:pt x="5908937" y="834052"/>
+                  </a:lnTo>
+                  <a:lnTo>
+                    <a:pt x="5979281" y="831230"/>
+                  </a:lnTo>
+                  <a:lnTo>
+                    <a:pt x="6049626" y="828387"/>
+                  </a:lnTo>
+                  <a:lnTo>
+                    <a:pt x="6119970" y="825525"/>
+                  </a:lnTo>
+                  <a:lnTo>
+                    <a:pt x="6190315" y="822642"/>
+                  </a:lnTo>
+                  <a:lnTo>
+                    <a:pt x="6260659" y="819738"/>
+                  </a:lnTo>
+                  <a:lnTo>
+                    <a:pt x="6331004" y="816814"/>
+                  </a:lnTo>
+                  <a:lnTo>
+                    <a:pt x="6401348" y="813870"/>
+                  </a:lnTo>
+                  <a:lnTo>
+                    <a:pt x="6471693" y="810904"/>
+                  </a:lnTo>
+                  <a:lnTo>
+                    <a:pt x="6542037" y="807918"/>
+                  </a:lnTo>
+                  <a:lnTo>
+                    <a:pt x="6612382" y="804910"/>
+                  </a:lnTo>
+                  <a:lnTo>
+                    <a:pt x="6682726" y="801881"/>
+                  </a:lnTo>
+                  <a:lnTo>
+                    <a:pt x="6753071" y="798830"/>
+                  </a:lnTo>
+                  <a:lnTo>
+                    <a:pt x="6823415" y="795758"/>
+                  </a:lnTo>
+                  <a:lnTo>
+                    <a:pt x="6893760" y="792664"/>
+                  </a:lnTo>
+                  <a:lnTo>
+                    <a:pt x="6964104" y="789548"/>
+                  </a:lnTo>
+                </a:path>
+              </a:pathLst>
+            </a:custGeom>
+          </p:spPr>
+          <p:txBody>
+            <a:bodyPr/>
+            <a:lstStyle/>
+            <a:p/>
+          </p:txBody>
+        </p:sp>
+        <p:sp>
+          <p:nvSpPr>
+            <p:cNvPr id="73" name="pl73"/>
+            <p:cNvSpPr/>
+            <p:nvPr/>
+          </p:nvSpPr>
+          <p:spPr>
+            <a:xfrm>
+              <a:off x="1235312" y="5295570"/>
+              <a:ext cx="6964104" cy="248624"/>
+            </a:xfrm>
+            <a:custGeom>
+              <a:avLst/>
+              <a:pathLst>
+                <a:path w="6964104" h="248624">
+                  <a:moveTo>
+                    <a:pt x="6964104" y="248624"/>
+                  </a:moveTo>
+                  <a:lnTo>
+                    <a:pt x="6893760" y="246990"/>
+                  </a:lnTo>
+                  <a:lnTo>
+                    <a:pt x="6823415" y="245303"/>
+                  </a:lnTo>
+                  <a:lnTo>
+                    <a:pt x="6753071" y="243560"/>
+                  </a:lnTo>
+                  <a:lnTo>
+                    <a:pt x="6682726" y="241759"/>
+                  </a:lnTo>
+                  <a:lnTo>
+                    <a:pt x="6612382" y="239899"/>
+                  </a:lnTo>
+                  <a:lnTo>
+                    <a:pt x="6542037" y="237977"/>
+                  </a:lnTo>
+                  <a:lnTo>
+                    <a:pt x="6471693" y="235992"/>
+                  </a:lnTo>
+                  <a:lnTo>
+                    <a:pt x="6401348" y="233942"/>
+                  </a:lnTo>
+                  <a:lnTo>
+                    <a:pt x="6331004" y="231824"/>
+                  </a:lnTo>
+                  <a:lnTo>
+                    <a:pt x="6260659" y="229636"/>
+                  </a:lnTo>
+                  <a:lnTo>
+                    <a:pt x="6190315" y="227376"/>
+                  </a:lnTo>
+                  <a:lnTo>
+                    <a:pt x="6119970" y="225041"/>
+                  </a:lnTo>
+                  <a:lnTo>
+                    <a:pt x="6049626" y="222629"/>
+                  </a:lnTo>
+                  <a:lnTo>
+                    <a:pt x="5979281" y="220137"/>
+                  </a:lnTo>
+                  <a:lnTo>
+                    <a:pt x="5908937" y="217564"/>
+                  </a:lnTo>
+                  <a:lnTo>
+                    <a:pt x="5838592" y="214905"/>
+                  </a:lnTo>
+                  <a:lnTo>
+                    <a:pt x="5768248" y="212158"/>
+                  </a:lnTo>
+                  <a:lnTo>
+                    <a:pt x="5697903" y="209321"/>
+                  </a:lnTo>
+                  <a:lnTo>
+                    <a:pt x="5627559" y="206391"/>
+                  </a:lnTo>
+                  <a:lnTo>
+                    <a:pt x="5557214" y="203363"/>
+                  </a:lnTo>
+                  <a:lnTo>
+                    <a:pt x="5486870" y="200236"/>
+                  </a:lnTo>
+                  <a:lnTo>
+                    <a:pt x="5416525" y="197005"/>
+                  </a:lnTo>
+                  <a:lnTo>
+                    <a:pt x="5346181" y="193668"/>
+                  </a:lnTo>
+                  <a:lnTo>
+                    <a:pt x="5275836" y="190220"/>
+                  </a:lnTo>
+                  <a:lnTo>
+                    <a:pt x="5205492" y="186659"/>
+                  </a:lnTo>
+                  <a:lnTo>
+                    <a:pt x="5135147" y="182980"/>
+                  </a:lnTo>
+                  <a:lnTo>
+                    <a:pt x="5064803" y="179180"/>
+                  </a:lnTo>
+                  <a:lnTo>
+                    <a:pt x="4994458" y="175255"/>
+                  </a:lnTo>
+                  <a:lnTo>
+                    <a:pt x="4924114" y="171200"/>
+                  </a:lnTo>
+                  <a:lnTo>
+                    <a:pt x="4853769" y="167011"/>
+                  </a:lnTo>
+                  <a:lnTo>
+                    <a:pt x="4783425" y="162683"/>
+                  </a:lnTo>
+                  <a:lnTo>
+                    <a:pt x="4713080" y="158213"/>
+                  </a:lnTo>
+                  <a:lnTo>
+                    <a:pt x="4642736" y="153596"/>
+                  </a:lnTo>
+                  <a:lnTo>
+                    <a:pt x="4572391" y="148826"/>
+                  </a:lnTo>
+                  <a:lnTo>
+                    <a:pt x="4502047" y="143898"/>
+                  </a:lnTo>
+                  <a:lnTo>
+                    <a:pt x="4431702" y="138808"/>
+                  </a:lnTo>
+                  <a:lnTo>
+                    <a:pt x="4361358" y="133550"/>
+                  </a:lnTo>
+                  <a:lnTo>
+                    <a:pt x="4291013" y="128118"/>
+                  </a:lnTo>
+                  <a:lnTo>
+                    <a:pt x="4220669" y="122507"/>
+                  </a:lnTo>
+                  <a:lnTo>
+                    <a:pt x="4150324" y="116711"/>
+                  </a:lnTo>
+                  <a:lnTo>
+                    <a:pt x="4079980" y="110724"/>
+                  </a:lnTo>
+                  <a:lnTo>
+                    <a:pt x="4009635" y="104539"/>
+                  </a:lnTo>
+                  <a:lnTo>
+                    <a:pt x="3939291" y="98150"/>
+                  </a:lnTo>
+                  <a:lnTo>
+                    <a:pt x="3868946" y="91550"/>
+                  </a:lnTo>
+                  <a:lnTo>
+                    <a:pt x="3798602" y="84732"/>
+                  </a:lnTo>
+                  <a:lnTo>
+                    <a:pt x="3728257" y="77689"/>
+                  </a:lnTo>
+                  <a:lnTo>
+                    <a:pt x="3657913" y="70413"/>
+                  </a:lnTo>
+                  <a:lnTo>
+                    <a:pt x="3587569" y="62898"/>
+                  </a:lnTo>
+                  <a:lnTo>
+                    <a:pt x="3517224" y="55134"/>
+                  </a:lnTo>
+                  <a:lnTo>
+                    <a:pt x="3446880" y="47114"/>
+                  </a:lnTo>
+                  <a:lnTo>
+                    <a:pt x="3376535" y="38830"/>
+                  </a:lnTo>
+                  <a:lnTo>
+                    <a:pt x="3306191" y="30272"/>
+                  </a:lnTo>
+                  <a:lnTo>
+                    <a:pt x="3235846" y="21432"/>
+                  </a:lnTo>
+                  <a:lnTo>
+                    <a:pt x="3165502" y="12299"/>
+                  </a:lnTo>
+                  <a:lnTo>
+                    <a:pt x="3095157" y="2866"/>
+                  </a:lnTo>
+                  <a:lnTo>
+                    <a:pt x="3024813" y="0"/>
+                  </a:lnTo>
+                  <a:lnTo>
+                    <a:pt x="2954468" y="2098"/>
+                  </a:lnTo>
+                  <a:lnTo>
+                    <a:pt x="2884124" y="4181"/>
+                  </a:lnTo>
+                  <a:lnTo>
+                    <a:pt x="2813779" y="6249"/>
+                  </a:lnTo>
+                  <a:lnTo>
+                    <a:pt x="2743435" y="8303"/>
+                  </a:lnTo>
+                  <a:lnTo>
+                    <a:pt x="2673090" y="10343"/>
+                  </a:lnTo>
+                  <a:lnTo>
+                    <a:pt x="2602746" y="12368"/>
+                  </a:lnTo>
+                  <a:lnTo>
+                    <a:pt x="2532401" y="14379"/>
+                  </a:lnTo>
+                  <a:lnTo>
+                    <a:pt x="2462057" y="16376"/>
+                  </a:lnTo>
+                  <a:lnTo>
+                    <a:pt x="2391712" y="18359"/>
+                  </a:lnTo>
+                  <a:lnTo>
+                    <a:pt x="2321368" y="20328"/>
+                  </a:lnTo>
+                  <a:lnTo>
+                    <a:pt x="2251023" y="22283"/>
+                  </a:lnTo>
+                  <a:lnTo>
+                    <a:pt x="2180679" y="24224"/>
+                  </a:lnTo>
+                  <a:lnTo>
+                    <a:pt x="2110334" y="26151"/>
+                  </a:lnTo>
+                  <a:lnTo>
+                    <a:pt x="2039990" y="28065"/>
+                  </a:lnTo>
+                  <a:lnTo>
+                    <a:pt x="1969645" y="29966"/>
+                  </a:lnTo>
+                  <a:lnTo>
+                    <a:pt x="1899301" y="31853"/>
+                  </a:lnTo>
+                  <a:lnTo>
+                    <a:pt x="1828956" y="33727"/>
+                  </a:lnTo>
+                  <a:lnTo>
+                    <a:pt x="1758612" y="35588"/>
+                  </a:lnTo>
+                  <a:lnTo>
+                    <a:pt x="1688267" y="37435"/>
+                  </a:lnTo>
+                  <a:lnTo>
+                    <a:pt x="1617923" y="39270"/>
+                  </a:lnTo>
+                  <a:lnTo>
+                    <a:pt x="1547578" y="41091"/>
+                  </a:lnTo>
+                  <a:lnTo>
+                    <a:pt x="1477234" y="42900"/>
+                  </a:lnTo>
+                  <a:lnTo>
+                    <a:pt x="1406889" y="44696"/>
+                  </a:lnTo>
+                  <a:lnTo>
+                    <a:pt x="1336545" y="46480"/>
+                  </a:lnTo>
+                  <a:lnTo>
+                    <a:pt x="1266200" y="48251"/>
+                  </a:lnTo>
+                  <a:lnTo>
+                    <a:pt x="1195856" y="50009"/>
+                  </a:lnTo>
+                  <a:lnTo>
+                    <a:pt x="1125511" y="51755"/>
+                  </a:lnTo>
+                  <a:lnTo>
+                    <a:pt x="1055167" y="53489"/>
+                  </a:lnTo>
+                  <a:lnTo>
+                    <a:pt x="984822" y="55211"/>
+                  </a:lnTo>
+                  <a:lnTo>
+                    <a:pt x="914478" y="56920"/>
+                  </a:lnTo>
+                  <a:lnTo>
+                    <a:pt x="844133" y="58617"/>
+                  </a:lnTo>
+                  <a:lnTo>
+                    <a:pt x="773789" y="60303"/>
+                  </a:lnTo>
+                  <a:lnTo>
+                    <a:pt x="703444" y="61977"/>
+                  </a:lnTo>
+                  <a:lnTo>
+                    <a:pt x="633100" y="63638"/>
+                  </a:lnTo>
+                  <a:lnTo>
+                    <a:pt x="562755" y="65289"/>
+                  </a:lnTo>
+                  <a:lnTo>
+                    <a:pt x="492411" y="66927"/>
+                  </a:lnTo>
+                  <a:lnTo>
+                    <a:pt x="422066" y="68554"/>
+                  </a:lnTo>
+                  <a:lnTo>
+                    <a:pt x="351722" y="70170"/>
+                  </a:lnTo>
+                  <a:lnTo>
+                    <a:pt x="281377" y="71774"/>
+                  </a:lnTo>
+                  <a:lnTo>
+                    <a:pt x="211033" y="73367"/>
+                  </a:lnTo>
+                  <a:lnTo>
+                    <a:pt x="140688" y="74949"/>
+                  </a:lnTo>
+                  <a:lnTo>
+                    <a:pt x="70344" y="76519"/>
+                  </a:lnTo>
+                  <a:lnTo>
+                    <a:pt x="0" y="78079"/>
+                  </a:lnTo>
+                </a:path>
+              </a:pathLst>
+            </a:custGeom>
+          </p:spPr>
+          <p:txBody>
+            <a:bodyPr/>
+            <a:lstStyle/>
+            <a:p/>
+          </p:txBody>
+        </p:sp>
+        <p:sp>
+          <p:nvSpPr>
+            <p:cNvPr id="74" name="pl74"/>
+            <p:cNvSpPr/>
+            <p:nvPr/>
+          </p:nvSpPr>
+          <p:spPr>
+            <a:xfrm>
+              <a:off x="1235312" y="5072966"/>
+              <a:ext cx="6964104" cy="372692"/>
+            </a:xfrm>
+            <a:custGeom>
+              <a:avLst/>
+              <a:pathLst>
+                <a:path w="6964104" h="372692">
+                  <a:moveTo>
+                    <a:pt x="0" y="0"/>
+                  </a:moveTo>
+                  <a:lnTo>
+                    <a:pt x="70344" y="6573"/>
+                  </a:lnTo>
+                  <a:lnTo>
+                    <a:pt x="140688" y="13065"/>
+                  </a:lnTo>
+                  <a:lnTo>
+                    <a:pt x="211033" y="19474"/>
+                  </a:lnTo>
+                  <a:lnTo>
+                    <a:pt x="281377" y="25802"/>
+                  </a:lnTo>
+                  <a:lnTo>
+                    <a:pt x="351722" y="32050"/>
+                  </a:lnTo>
+                  <a:lnTo>
+                    <a:pt x="422066" y="38219"/>
+                  </a:lnTo>
+                  <a:lnTo>
+                    <a:pt x="492411" y="44311"/>
+                  </a:lnTo>
+                  <a:lnTo>
+                    <a:pt x="562755" y="50325"/>
+                  </a:lnTo>
+                  <a:lnTo>
+                    <a:pt x="633100" y="56264"/>
+                  </a:lnTo>
+                  <a:lnTo>
+                    <a:pt x="703444" y="62128"/>
+                  </a:lnTo>
+                  <a:lnTo>
+                    <a:pt x="773789" y="67917"/>
+                  </a:lnTo>
+                  <a:lnTo>
+                    <a:pt x="844133" y="73634"/>
+                  </a:lnTo>
+                  <a:lnTo>
+                    <a:pt x="914478" y="79278"/>
+                  </a:lnTo>
+                  <a:lnTo>
+                    <a:pt x="984822" y="84851"/>
+                  </a:lnTo>
+                  <a:lnTo>
+                    <a:pt x="1055167" y="90354"/>
+                  </a:lnTo>
+                  <a:lnTo>
+                    <a:pt x="1125511" y="95787"/>
+                  </a:lnTo>
+                  <a:lnTo>
+                    <a:pt x="1195856" y="101152"/>
+                  </a:lnTo>
+                  <a:lnTo>
+                    <a:pt x="1266200" y="106449"/>
+                  </a:lnTo>
+                  <a:lnTo>
+                    <a:pt x="1336545" y="111679"/>
+                  </a:lnTo>
+                  <a:lnTo>
+                    <a:pt x="1406889" y="116843"/>
+                  </a:lnTo>
+                  <a:lnTo>
+                    <a:pt x="1477234" y="121942"/>
+                  </a:lnTo>
+                  <a:lnTo>
+                    <a:pt x="1547578" y="126977"/>
+                  </a:lnTo>
+                  <a:lnTo>
+                    <a:pt x="1617923" y="131948"/>
+                  </a:lnTo>
+                  <a:lnTo>
+                    <a:pt x="1688267" y="136856"/>
+                  </a:lnTo>
+                  <a:lnTo>
+                    <a:pt x="1758612" y="141702"/>
+                  </a:lnTo>
+                  <a:lnTo>
+                    <a:pt x="1828956" y="146487"/>
+                  </a:lnTo>
+                  <a:lnTo>
+                    <a:pt x="1899301" y="151212"/>
+                  </a:lnTo>
+                  <a:lnTo>
+                    <a:pt x="1969645" y="155877"/>
+                  </a:lnTo>
+                  <a:lnTo>
+                    <a:pt x="2039990" y="160483"/>
+                  </a:lnTo>
+                  <a:lnTo>
+                    <a:pt x="2110334" y="165031"/>
+                  </a:lnTo>
+                  <a:lnTo>
+                    <a:pt x="2180679" y="169521"/>
+                  </a:lnTo>
+                  <a:lnTo>
+                    <a:pt x="2251023" y="173955"/>
+                  </a:lnTo>
+                  <a:lnTo>
+                    <a:pt x="2321368" y="178333"/>
+                  </a:lnTo>
+                  <a:lnTo>
+                    <a:pt x="2391712" y="182655"/>
+                  </a:lnTo>
+                  <a:lnTo>
+                    <a:pt x="2462057" y="186923"/>
+                  </a:lnTo>
+                  <a:lnTo>
+                    <a:pt x="2532401" y="191137"/>
+                  </a:lnTo>
+                  <a:lnTo>
+                    <a:pt x="2602746" y="195298"/>
+                  </a:lnTo>
+                  <a:lnTo>
+                    <a:pt x="2673090" y="199407"/>
+                  </a:lnTo>
+                  <a:lnTo>
+                    <a:pt x="2743435" y="203463"/>
+                  </a:lnTo>
+                  <a:lnTo>
+                    <a:pt x="2813779" y="207469"/>
+                  </a:lnTo>
+                  <a:lnTo>
+                    <a:pt x="2884124" y="211423"/>
+                  </a:lnTo>
+                  <a:lnTo>
+                    <a:pt x="2954468" y="215328"/>
+                  </a:lnTo>
+                  <a:lnTo>
+                    <a:pt x="3024813" y="219184"/>
+                  </a:lnTo>
+                  <a:lnTo>
+                    <a:pt x="3095157" y="222990"/>
+                  </a:lnTo>
+                  <a:lnTo>
+                    <a:pt x="3165502" y="226749"/>
+                  </a:lnTo>
+                  <a:lnTo>
+                    <a:pt x="3235846" y="230461"/>
+                  </a:lnTo>
+                  <a:lnTo>
+                    <a:pt x="3306191" y="234125"/>
+                  </a:lnTo>
+                  <a:lnTo>
+                    <a:pt x="3376535" y="237743"/>
+                  </a:lnTo>
+                  <a:lnTo>
+                    <a:pt x="3446880" y="241316"/>
+                  </a:lnTo>
+                  <a:lnTo>
+                    <a:pt x="3517224" y="244843"/>
+                  </a:lnTo>
+                  <a:lnTo>
+                    <a:pt x="3587569" y="248326"/>
+                  </a:lnTo>
+                  <a:lnTo>
+                    <a:pt x="3657913" y="251765"/>
+                  </a:lnTo>
+                  <a:lnTo>
+                    <a:pt x="3728257" y="255161"/>
+                  </a:lnTo>
+                  <a:lnTo>
+                    <a:pt x="3798602" y="258513"/>
+                  </a:lnTo>
+                  <a:lnTo>
+                    <a:pt x="3868946" y="261823"/>
+                  </a:lnTo>
+                  <a:lnTo>
+                    <a:pt x="3939291" y="265092"/>
+                  </a:lnTo>
+                  <a:lnTo>
+                    <a:pt x="4009635" y="268319"/>
+                  </a:lnTo>
+                  <a:lnTo>
+                    <a:pt x="4079980" y="271506"/>
+                  </a:lnTo>
+                  <a:lnTo>
+                    <a:pt x="4150324" y="274652"/>
+                  </a:lnTo>
+                  <a:lnTo>
+                    <a:pt x="4220669" y="277759"/>
+                  </a:lnTo>
+                  <a:lnTo>
+                    <a:pt x="4291013" y="280826"/>
+                  </a:lnTo>
+                  <a:lnTo>
+                    <a:pt x="4361358" y="283855"/>
+                  </a:lnTo>
+                  <a:lnTo>
+                    <a:pt x="4431702" y="286845"/>
+                  </a:lnTo>
+                  <a:lnTo>
+                    <a:pt x="4502047" y="289798"/>
+                  </a:lnTo>
+                  <a:lnTo>
+                    <a:pt x="4572391" y="292713"/>
+                  </a:lnTo>
+                  <a:lnTo>
+                    <a:pt x="4642736" y="295591"/>
+                  </a:lnTo>
+                  <a:lnTo>
+                    <a:pt x="4713080" y="298434"/>
+                  </a:lnTo>
+                  <a:lnTo>
+                    <a:pt x="4783425" y="301240"/>
+                  </a:lnTo>
+                  <a:lnTo>
+                    <a:pt x="4853769" y="304011"/>
+                  </a:lnTo>
+                  <a:lnTo>
+                    <a:pt x="4924114" y="306747"/>
+                  </a:lnTo>
+                  <a:lnTo>
+                    <a:pt x="4994458" y="309448"/>
+                  </a:lnTo>
+                  <a:lnTo>
+                    <a:pt x="5064803" y="312115"/>
+                  </a:lnTo>
+                  <a:lnTo>
+                    <a:pt x="5135147" y="314749"/>
+                  </a:lnTo>
+                  <a:lnTo>
+                    <a:pt x="5205492" y="317349"/>
+                  </a:lnTo>
+                  <a:lnTo>
+                    <a:pt x="5275836" y="319917"/>
+                  </a:lnTo>
+                  <a:lnTo>
+                    <a:pt x="5346181" y="322452"/>
+                  </a:lnTo>
+                  <a:lnTo>
+                    <a:pt x="5416525" y="324955"/>
+                  </a:lnTo>
+                  <a:lnTo>
+                    <a:pt x="5486870" y="327427"/>
+                  </a:lnTo>
+                  <a:lnTo>
+                    <a:pt x="5557214" y="329867"/>
+                  </a:lnTo>
+                  <a:lnTo>
+                    <a:pt x="5627559" y="332276"/>
+                  </a:lnTo>
+                  <a:lnTo>
+                    <a:pt x="5697903" y="334655"/>
+                  </a:lnTo>
+                  <a:lnTo>
+                    <a:pt x="5768248" y="337004"/>
+                  </a:lnTo>
+                  <a:lnTo>
+                    <a:pt x="5838592" y="339324"/>
+                  </a:lnTo>
+                  <a:lnTo>
+                    <a:pt x="5908937" y="341614"/>
+                  </a:lnTo>
+                  <a:lnTo>
+                    <a:pt x="5979281" y="343875"/>
+                  </a:lnTo>
+                  <a:lnTo>
+                    <a:pt x="6049626" y="346108"/>
+                  </a:lnTo>
+                  <a:lnTo>
+                    <a:pt x="6119970" y="348312"/>
+                  </a:lnTo>
+                  <a:lnTo>
+                    <a:pt x="6190315" y="350489"/>
+                  </a:lnTo>
+                  <a:lnTo>
+                    <a:pt x="6260659" y="352638"/>
+                  </a:lnTo>
+                  <a:lnTo>
+                    <a:pt x="6331004" y="354760"/>
+                  </a:lnTo>
+                  <a:lnTo>
+                    <a:pt x="6401348" y="356855"/>
+                  </a:lnTo>
+                  <a:lnTo>
+                    <a:pt x="6471693" y="358924"/>
+                  </a:lnTo>
+                  <a:lnTo>
+                    <a:pt x="6542037" y="360967"/>
+                  </a:lnTo>
+                  <a:lnTo>
+                    <a:pt x="6612382" y="362983"/>
+                  </a:lnTo>
+                  <a:lnTo>
+                    <a:pt x="6682726" y="364975"/>
+                  </a:lnTo>
+                  <a:lnTo>
+                    <a:pt x="6753071" y="366941"/>
+                  </a:lnTo>
+                  <a:lnTo>
+                    <a:pt x="6823415" y="368882"/>
+                  </a:lnTo>
+                  <a:lnTo>
+                    <a:pt x="6893760" y="370799"/>
+                  </a:lnTo>
+                  <a:lnTo>
+                    <a:pt x="6964104" y="372692"/>
+                  </a:lnTo>
+                </a:path>
+              </a:pathLst>
+            </a:custGeom>
+            <a:ln w="27101" cap="flat">
+              <a:solidFill>
+                <a:srgbClr val="FF8C00">
+                  <a:alpha val="100000"/>
+                </a:srgbClr>
+              </a:solidFill>
+              <a:prstDash val="solid"/>
+              <a:round/>
+            </a:ln>
+          </p:spPr>
+          <p:txBody>
+            <a:bodyPr/>
+            <a:lstStyle/>
+            <a:p/>
+          </p:txBody>
+        </p:sp>
+        <p:sp>
+          <p:nvSpPr>
+            <p:cNvPr id="75" name="pl75"/>
+            <p:cNvSpPr/>
+            <p:nvPr/>
+          </p:nvSpPr>
+          <p:spPr>
+            <a:xfrm>
+              <a:off x="887106" y="5294352"/>
+              <a:ext cx="7660515" cy="0"/>
+            </a:xfrm>
+            <a:custGeom>
+              <a:avLst/>
+              <a:pathLst>
+                <a:path w="7660515" h="0">
+                  <a:moveTo>
+                    <a:pt x="0" y="0"/>
+                  </a:moveTo>
+                  <a:lnTo>
+                    <a:pt x="7660515" y="0"/>
+                  </a:lnTo>
+                  <a:lnTo>
+                    <a:pt x="7660515" y="0"/>
+                  </a:lnTo>
+                </a:path>
+              </a:pathLst>
+            </a:custGeom>
+            <a:ln w="13550" cap="flat">
+              <a:solidFill>
+                <a:srgbClr val="7F7F7F">
+                  <a:alpha val="100000"/>
+                </a:srgbClr>
+              </a:solidFill>
+              <a:prstDash val="dash"/>
+              <a:round/>
+            </a:ln>
+          </p:spPr>
+          <p:txBody>
+            <a:bodyPr/>
+            <a:lstStyle/>
+            <a:p/>
+          </p:txBody>
+        </p:sp>
+        <p:sp>
+          <p:nvSpPr>
+            <p:cNvPr id="76" name="pl76"/>
+            <p:cNvSpPr/>
+            <p:nvPr/>
+          </p:nvSpPr>
+          <p:spPr>
+            <a:xfrm>
+              <a:off x="4300713" y="4336484"/>
+              <a:ext cx="0" cy="1317069"/>
+            </a:xfrm>
+            <a:custGeom>
+              <a:avLst/>
+              <a:pathLst>
+                <a:path w="0" h="1317069">
+                  <a:moveTo>
+                    <a:pt x="0" y="1317069"/>
+                  </a:moveTo>
+                  <a:lnTo>
+                    <a:pt x="0" y="0"/>
+                  </a:lnTo>
+                  <a:lnTo>
+                    <a:pt x="0" y="0"/>
+                  </a:lnTo>
+                </a:path>
+              </a:pathLst>
+            </a:custGeom>
+            <a:ln w="13550" cap="flat">
+              <a:solidFill>
+                <a:srgbClr val="666666">
+                  <a:alpha val="100000"/>
+                </a:srgbClr>
+              </a:solidFill>
+              <a:prstDash val="dot"/>
+              <a:round/>
+            </a:ln>
+          </p:spPr>
+          <p:txBody>
+            <a:bodyPr/>
+            <a:lstStyle/>
+            <a:p/>
+          </p:txBody>
+        </p:sp>
+        <p:sp>
+          <p:nvSpPr>
+            <p:cNvPr id="77" name="pl77"/>
+            <p:cNvSpPr/>
+            <p:nvPr/>
+          </p:nvSpPr>
+          <p:spPr>
+            <a:xfrm>
+              <a:off x="3103710" y="4336484"/>
+              <a:ext cx="0" cy="1317069"/>
+            </a:xfrm>
+            <a:custGeom>
+              <a:avLst/>
+              <a:pathLst>
+                <a:path w="0" h="1317069">
+                  <a:moveTo>
+                    <a:pt x="0" y="1317069"/>
+                  </a:moveTo>
+                  <a:lnTo>
+                    <a:pt x="0" y="0"/>
+                  </a:lnTo>
+                  <a:lnTo>
+                    <a:pt x="0" y="0"/>
+                  </a:lnTo>
+                </a:path>
+              </a:pathLst>
+            </a:custGeom>
+            <a:ln w="13550" cap="flat">
+              <a:solidFill>
+                <a:srgbClr val="4682B4">
+                  <a:alpha val="69803"/>
+                </a:srgbClr>
+              </a:solidFill>
+              <a:prstDash val="dash"/>
+              <a:round/>
+            </a:ln>
+          </p:spPr>
+          <p:txBody>
+            <a:bodyPr/>
+            <a:lstStyle/>
+            <a:p/>
+          </p:txBody>
+        </p:sp>
+        <p:sp>
+          <p:nvSpPr>
+            <p:cNvPr id="78" name="pl78"/>
+            <p:cNvSpPr/>
+            <p:nvPr/>
+          </p:nvSpPr>
+          <p:spPr>
+            <a:xfrm>
+              <a:off x="5504283" y="4336484"/>
+              <a:ext cx="0" cy="1317069"/>
+            </a:xfrm>
+            <a:custGeom>
+              <a:avLst/>
+              <a:pathLst>
+                <a:path w="0" h="1317069">
+                  <a:moveTo>
+                    <a:pt x="0" y="1317069"/>
+                  </a:moveTo>
+                  <a:lnTo>
+                    <a:pt x="0" y="0"/>
+                  </a:lnTo>
+                  <a:lnTo>
+                    <a:pt x="0" y="0"/>
+                  </a:lnTo>
+                </a:path>
+              </a:pathLst>
+            </a:custGeom>
+            <a:ln w="13550" cap="flat">
+              <a:solidFill>
+                <a:srgbClr val="4682B4">
+                  <a:alpha val="69803"/>
+                </a:srgbClr>
+              </a:solidFill>
+              <a:prstDash val="dash"/>
+              <a:round/>
+            </a:ln>
+          </p:spPr>
+          <p:txBody>
+            <a:bodyPr/>
+            <a:lstStyle/>
+            <a:p/>
+          </p:txBody>
+        </p:sp>
+        <p:sp>
+          <p:nvSpPr>
+            <p:cNvPr id="79" name="tx79"/>
+            <p:cNvSpPr/>
+            <p:nvPr/>
+          </p:nvSpPr>
+          <p:spPr>
+            <a:xfrm>
+              <a:off x="762297" y="5553636"/>
+              <a:ext cx="62179" cy="80101"/>
+            </a:xfrm>
+            <a:prstGeom prst="rect">
+              <a:avLst/>
+            </a:prstGeom>
+            <a:noFill/>
+          </p:spPr>
+          <p:txBody>
+            <a:bodyPr lIns="0" rIns="0" tIns="0" bIns="0" anchorCtr="1" anchor="ctr" wrap="none"/>
+            <a:lstStyle/>
+            <a:p>
+              <a:pPr algn="l" marL="0" marR="0" indent="0">
+                <a:lnSpc>
+                  <a:spcPts val="880"/>
+                </a:lnSpc>
+                <a:spcBef>
+                  <a:spcPts val="0"/>
+                </a:spcBef>
+                <a:spcAft>
+                  <a:spcPts val="0"/>
+                </a:spcAft>
+              </a:pPr>
+              <a:r>
+                <a:rPr sz="880">
+                  <a:solidFill>
+                    <a:srgbClr val="4D4D4D">
+                      <a:alpha val="100000"/>
+                    </a:srgbClr>
+                  </a:solidFill>
+                  <a:latin typeface="Helvetica"/>
+                  <a:cs typeface="Helvetica"/>
+                </a:rPr>
+                <a:t>0</a:t>
+              </a:r>
+            </a:p>
+          </p:txBody>
+        </p:sp>
+        <p:sp>
+          <p:nvSpPr>
+            <p:cNvPr id="80" name="tx80"/>
+            <p:cNvSpPr/>
+            <p:nvPr/>
+          </p:nvSpPr>
+          <p:spPr>
+            <a:xfrm>
+              <a:off x="762297" y="5254302"/>
+              <a:ext cx="62179" cy="80101"/>
+            </a:xfrm>
+            <a:prstGeom prst="rect">
+              <a:avLst/>
+            </a:prstGeom>
+            <a:noFill/>
+          </p:spPr>
+          <p:txBody>
+            <a:bodyPr lIns="0" rIns="0" tIns="0" bIns="0" anchorCtr="1" anchor="ctr" wrap="none"/>
+            <a:lstStyle/>
+            <a:p>
+              <a:pPr algn="l" marL="0" marR="0" indent="0">
+                <a:lnSpc>
+                  <a:spcPts val="880"/>
+                </a:lnSpc>
+                <a:spcBef>
+                  <a:spcPts val="0"/>
+                </a:spcBef>
+                <a:spcAft>
+                  <a:spcPts val="0"/>
+                </a:spcAft>
+              </a:pPr>
+              <a:r>
+                <a:rPr sz="880">
+                  <a:solidFill>
+                    <a:srgbClr val="4D4D4D">
+                      <a:alpha val="100000"/>
+                    </a:srgbClr>
+                  </a:solidFill>
+                  <a:latin typeface="Helvetica"/>
+                  <a:cs typeface="Helvetica"/>
+                </a:rPr>
+                <a:t>1</a:t>
+              </a:r>
+            </a:p>
+          </p:txBody>
+        </p:sp>
+        <p:sp>
+          <p:nvSpPr>
+            <p:cNvPr id="81" name="tx81"/>
+            <p:cNvSpPr/>
+            <p:nvPr/>
+          </p:nvSpPr>
+          <p:spPr>
+            <a:xfrm>
+              <a:off x="762297" y="4954968"/>
+              <a:ext cx="62179" cy="80101"/>
+            </a:xfrm>
+            <a:prstGeom prst="rect">
+              <a:avLst/>
+            </a:prstGeom>
+            <a:noFill/>
+          </p:spPr>
+          <p:txBody>
+            <a:bodyPr lIns="0" rIns="0" tIns="0" bIns="0" anchorCtr="1" anchor="ctr" wrap="none"/>
+            <a:lstStyle/>
+            <a:p>
+              <a:pPr algn="l" marL="0" marR="0" indent="0">
+                <a:lnSpc>
+                  <a:spcPts val="880"/>
+                </a:lnSpc>
+                <a:spcBef>
+                  <a:spcPts val="0"/>
+                </a:spcBef>
+                <a:spcAft>
+                  <a:spcPts val="0"/>
+                </a:spcAft>
+              </a:pPr>
+              <a:r>
+                <a:rPr sz="880">
+                  <a:solidFill>
+                    <a:srgbClr val="4D4D4D">
+                      <a:alpha val="100000"/>
+                    </a:srgbClr>
+                  </a:solidFill>
+                  <a:latin typeface="Helvetica"/>
+                  <a:cs typeface="Helvetica"/>
+                </a:rPr>
+                <a:t>2</a:t>
+              </a:r>
+            </a:p>
+          </p:txBody>
+        </p:sp>
+        <p:sp>
+          <p:nvSpPr>
+            <p:cNvPr id="82" name="tx82"/>
+            <p:cNvSpPr/>
+            <p:nvPr/>
+          </p:nvSpPr>
+          <p:spPr>
+            <a:xfrm>
+              <a:off x="762297" y="4655634"/>
+              <a:ext cx="62179" cy="80101"/>
+            </a:xfrm>
+            <a:prstGeom prst="rect">
+              <a:avLst/>
+            </a:prstGeom>
+            <a:noFill/>
+          </p:spPr>
+          <p:txBody>
+            <a:bodyPr lIns="0" rIns="0" tIns="0" bIns="0" anchorCtr="1" anchor="ctr" wrap="none"/>
+            <a:lstStyle/>
+            <a:p>
+              <a:pPr algn="l" marL="0" marR="0" indent="0">
+                <a:lnSpc>
+                  <a:spcPts val="880"/>
+                </a:lnSpc>
+                <a:spcBef>
+                  <a:spcPts val="0"/>
+                </a:spcBef>
+                <a:spcAft>
+                  <a:spcPts val="0"/>
+                </a:spcAft>
+              </a:pPr>
+              <a:r>
+                <a:rPr sz="880">
+                  <a:solidFill>
+                    <a:srgbClr val="4D4D4D">
+                      <a:alpha val="100000"/>
+                    </a:srgbClr>
+                  </a:solidFill>
+                  <a:latin typeface="Helvetica"/>
+                  <a:cs typeface="Helvetica"/>
+                </a:rPr>
+                <a:t>3</a:t>
+              </a:r>
+            </a:p>
+          </p:txBody>
+        </p:sp>
+        <p:sp>
+          <p:nvSpPr>
+            <p:cNvPr id="83" name="tx83"/>
+            <p:cNvSpPr/>
+            <p:nvPr/>
+          </p:nvSpPr>
+          <p:spPr>
+            <a:xfrm>
+              <a:off x="762297" y="4356300"/>
+              <a:ext cx="62179" cy="80101"/>
+            </a:xfrm>
+            <a:prstGeom prst="rect">
+              <a:avLst/>
+            </a:prstGeom>
+            <a:noFill/>
+          </p:spPr>
+          <p:txBody>
+            <a:bodyPr lIns="0" rIns="0" tIns="0" bIns="0" anchorCtr="1" anchor="ctr" wrap="none"/>
+            <a:lstStyle/>
+            <a:p>
+              <a:pPr algn="l" marL="0" marR="0" indent="0">
+                <a:lnSpc>
+                  <a:spcPts val="880"/>
+                </a:lnSpc>
+                <a:spcBef>
+                  <a:spcPts val="0"/>
+                </a:spcBef>
+                <a:spcAft>
+                  <a:spcPts val="0"/>
+                </a:spcAft>
+              </a:pPr>
+              <a:r>
+                <a:rPr sz="880">
+                  <a:solidFill>
+                    <a:srgbClr val="4D4D4D">
+                      <a:alpha val="100000"/>
+                    </a:srgbClr>
+                  </a:solidFill>
+                  <a:latin typeface="Helvetica"/>
+                  <a:cs typeface="Helvetica"/>
+                </a:rPr>
+                <a:t>4</a:t>
+              </a:r>
+            </a:p>
+          </p:txBody>
+        </p:sp>
+        <p:sp>
+          <p:nvSpPr>
+            <p:cNvPr id="84" name="tx84"/>
+            <p:cNvSpPr/>
+            <p:nvPr/>
+          </p:nvSpPr>
+          <p:spPr>
+            <a:xfrm>
+              <a:off x="1324230" y="5716183"/>
+              <a:ext cx="161574" cy="80101"/>
+            </a:xfrm>
+            <a:prstGeom prst="rect">
+              <a:avLst/>
+            </a:prstGeom>
+            <a:noFill/>
+          </p:spPr>
+          <p:txBody>
+            <a:bodyPr lIns="0" rIns="0" tIns="0" bIns="0" anchorCtr="1" anchor="ctr" wrap="none"/>
+            <a:lstStyle/>
+            <a:p>
+              <a:pPr algn="l" marL="0" marR="0" indent="0">
+                <a:lnSpc>
+                  <a:spcPts val="880"/>
+                </a:lnSpc>
+                <a:spcBef>
+                  <a:spcPts val="0"/>
+                </a:spcBef>
+                <a:spcAft>
+                  <a:spcPts val="0"/>
+                </a:spcAft>
+              </a:pPr>
+              <a:r>
+                <a:rPr sz="880">
+                  <a:solidFill>
+                    <a:srgbClr val="4D4D4D">
+                      <a:alpha val="100000"/>
+                    </a:srgbClr>
+                  </a:solidFill>
+                  <a:latin typeface="Helvetica"/>
+                  <a:cs typeface="Helvetica"/>
+                </a:rPr>
+                <a:t>-50</a:t>
+              </a:r>
+            </a:p>
+          </p:txBody>
+        </p:sp>
+        <p:sp>
+          <p:nvSpPr>
+            <p:cNvPr id="85" name="tx85"/>
+            <p:cNvSpPr/>
+            <p:nvPr/>
+          </p:nvSpPr>
+          <p:spPr>
+            <a:xfrm>
+              <a:off x="2179256" y="5716183"/>
+              <a:ext cx="161574" cy="80101"/>
+            </a:xfrm>
+            <a:prstGeom prst="rect">
+              <a:avLst/>
+            </a:prstGeom>
+            <a:noFill/>
+          </p:spPr>
+          <p:txBody>
+            <a:bodyPr lIns="0" rIns="0" tIns="0" bIns="0" anchorCtr="1" anchor="ctr" wrap="none"/>
+            <a:lstStyle/>
+            <a:p>
+              <a:pPr algn="l" marL="0" marR="0" indent="0">
+                <a:lnSpc>
+                  <a:spcPts val="880"/>
+                </a:lnSpc>
+                <a:spcBef>
+                  <a:spcPts val="0"/>
+                </a:spcBef>
+                <a:spcAft>
+                  <a:spcPts val="0"/>
+                </a:spcAft>
+              </a:pPr>
+              <a:r>
+                <a:rPr sz="880">
+                  <a:solidFill>
+                    <a:srgbClr val="4D4D4D">
+                      <a:alpha val="100000"/>
+                    </a:srgbClr>
+                  </a:solidFill>
+                  <a:latin typeface="Helvetica"/>
+                  <a:cs typeface="Helvetica"/>
+                </a:rPr>
+                <a:t>-40</a:t>
+              </a:r>
+            </a:p>
+          </p:txBody>
+        </p:sp>
+        <p:sp>
+          <p:nvSpPr>
+            <p:cNvPr id="86" name="tx86"/>
+            <p:cNvSpPr/>
+            <p:nvPr/>
+          </p:nvSpPr>
+          <p:spPr>
+            <a:xfrm>
+              <a:off x="3034282" y="5716183"/>
+              <a:ext cx="161574" cy="80101"/>
+            </a:xfrm>
+            <a:prstGeom prst="rect">
+              <a:avLst/>
+            </a:prstGeom>
+            <a:noFill/>
+          </p:spPr>
+          <p:txBody>
+            <a:bodyPr lIns="0" rIns="0" tIns="0" bIns="0" anchorCtr="1" anchor="ctr" wrap="none"/>
+            <a:lstStyle/>
+            <a:p>
+              <a:pPr algn="l" marL="0" marR="0" indent="0">
+                <a:lnSpc>
+                  <a:spcPts val="880"/>
+                </a:lnSpc>
+                <a:spcBef>
+                  <a:spcPts val="0"/>
+                </a:spcBef>
+                <a:spcAft>
+                  <a:spcPts val="0"/>
+                </a:spcAft>
+              </a:pPr>
+              <a:r>
+                <a:rPr sz="880">
+                  <a:solidFill>
+                    <a:srgbClr val="4D4D4D">
+                      <a:alpha val="100000"/>
+                    </a:srgbClr>
+                  </a:solidFill>
+                  <a:latin typeface="Helvetica"/>
+                  <a:cs typeface="Helvetica"/>
+                </a:rPr>
+                <a:t>-30</a:t>
+              </a:r>
+            </a:p>
+          </p:txBody>
+        </p:sp>
+        <p:sp>
+          <p:nvSpPr>
+            <p:cNvPr id="87" name="tx87"/>
+            <p:cNvSpPr/>
+            <p:nvPr/>
+          </p:nvSpPr>
+          <p:spPr>
+            <a:xfrm>
+              <a:off x="3889308" y="5716183"/>
+              <a:ext cx="161574" cy="80101"/>
+            </a:xfrm>
+            <a:prstGeom prst="rect">
+              <a:avLst/>
+            </a:prstGeom>
+            <a:noFill/>
+          </p:spPr>
+          <p:txBody>
+            <a:bodyPr lIns="0" rIns="0" tIns="0" bIns="0" anchorCtr="1" anchor="ctr" wrap="none"/>
+            <a:lstStyle/>
+            <a:p>
+              <a:pPr algn="l" marL="0" marR="0" indent="0">
+                <a:lnSpc>
+                  <a:spcPts val="880"/>
+                </a:lnSpc>
+                <a:spcBef>
+                  <a:spcPts val="0"/>
+                </a:spcBef>
+                <a:spcAft>
+                  <a:spcPts val="0"/>
+                </a:spcAft>
+              </a:pPr>
+              <a:r>
+                <a:rPr sz="880">
+                  <a:solidFill>
+                    <a:srgbClr val="4D4D4D">
+                      <a:alpha val="100000"/>
+                    </a:srgbClr>
+                  </a:solidFill>
+                  <a:latin typeface="Helvetica"/>
+                  <a:cs typeface="Helvetica"/>
+                </a:rPr>
+                <a:t>-20</a:t>
+              </a:r>
+            </a:p>
+          </p:txBody>
+        </p:sp>
+        <p:sp>
+          <p:nvSpPr>
+            <p:cNvPr id="88" name="tx88"/>
+            <p:cNvSpPr/>
+            <p:nvPr/>
+          </p:nvSpPr>
+          <p:spPr>
+            <a:xfrm>
+              <a:off x="4744334" y="5716183"/>
+              <a:ext cx="161574" cy="80101"/>
+            </a:xfrm>
+            <a:prstGeom prst="rect">
+              <a:avLst/>
+            </a:prstGeom>
+            <a:noFill/>
+          </p:spPr>
+          <p:txBody>
+            <a:bodyPr lIns="0" rIns="0" tIns="0" bIns="0" anchorCtr="1" anchor="ctr" wrap="none"/>
+            <a:lstStyle/>
+            <a:p>
+              <a:pPr algn="l" marL="0" marR="0" indent="0">
+                <a:lnSpc>
+                  <a:spcPts val="880"/>
+                </a:lnSpc>
+                <a:spcBef>
+                  <a:spcPts val="0"/>
+                </a:spcBef>
+                <a:spcAft>
+                  <a:spcPts val="0"/>
+                </a:spcAft>
+              </a:pPr>
+              <a:r>
+                <a:rPr sz="880">
+                  <a:solidFill>
+                    <a:srgbClr val="4D4D4D">
+                      <a:alpha val="100000"/>
+                    </a:srgbClr>
+                  </a:solidFill>
+                  <a:latin typeface="Helvetica"/>
+                  <a:cs typeface="Helvetica"/>
+                </a:rPr>
+                <a:t>-10</a:t>
+              </a:r>
+            </a:p>
+          </p:txBody>
+        </p:sp>
+        <p:sp>
+          <p:nvSpPr>
+            <p:cNvPr id="89" name="tx89"/>
+            <p:cNvSpPr/>
+            <p:nvPr/>
+          </p:nvSpPr>
+          <p:spPr>
+            <a:xfrm>
+              <a:off x="5649057" y="5716183"/>
+              <a:ext cx="62179" cy="80101"/>
+            </a:xfrm>
+            <a:prstGeom prst="rect">
+              <a:avLst/>
+            </a:prstGeom>
+            <a:noFill/>
+          </p:spPr>
+          <p:txBody>
+            <a:bodyPr lIns="0" rIns="0" tIns="0" bIns="0" anchorCtr="1" anchor="ctr" wrap="none"/>
+            <a:lstStyle/>
+            <a:p>
+              <a:pPr algn="l" marL="0" marR="0" indent="0">
+                <a:lnSpc>
+                  <a:spcPts val="880"/>
+                </a:lnSpc>
+                <a:spcBef>
+                  <a:spcPts val="0"/>
+                </a:spcBef>
+                <a:spcAft>
+                  <a:spcPts val="0"/>
+                </a:spcAft>
+              </a:pPr>
+              <a:r>
+                <a:rPr sz="880">
+                  <a:solidFill>
+                    <a:srgbClr val="4D4D4D">
+                      <a:alpha val="100000"/>
+                    </a:srgbClr>
+                  </a:solidFill>
+                  <a:latin typeface="Helvetica"/>
+                  <a:cs typeface="Helvetica"/>
+                </a:rPr>
+                <a:t>0</a:t>
+              </a:r>
+            </a:p>
+          </p:txBody>
+        </p:sp>
+        <p:sp>
+          <p:nvSpPr>
+            <p:cNvPr id="90" name="tx90"/>
+            <p:cNvSpPr/>
+            <p:nvPr/>
+          </p:nvSpPr>
+          <p:spPr>
+            <a:xfrm>
+              <a:off x="6472994" y="5716183"/>
+              <a:ext cx="124358" cy="80101"/>
+            </a:xfrm>
+            <a:prstGeom prst="rect">
+              <a:avLst/>
+            </a:prstGeom>
+            <a:noFill/>
+          </p:spPr>
+          <p:txBody>
+            <a:bodyPr lIns="0" rIns="0" tIns="0" bIns="0" anchorCtr="1" anchor="ctr" wrap="none"/>
+            <a:lstStyle/>
+            <a:p>
+              <a:pPr algn="l" marL="0" marR="0" indent="0">
+                <a:lnSpc>
+                  <a:spcPts val="880"/>
+                </a:lnSpc>
+                <a:spcBef>
+                  <a:spcPts val="0"/>
+                </a:spcBef>
+                <a:spcAft>
+                  <a:spcPts val="0"/>
+                </a:spcAft>
+              </a:pPr>
+              <a:r>
+                <a:rPr sz="880">
+                  <a:solidFill>
+                    <a:srgbClr val="4D4D4D">
+                      <a:alpha val="100000"/>
+                    </a:srgbClr>
+                  </a:solidFill>
+                  <a:latin typeface="Helvetica"/>
+                  <a:cs typeface="Helvetica"/>
+                </a:rPr>
+                <a:t>10</a:t>
+              </a:r>
+            </a:p>
+          </p:txBody>
+        </p:sp>
+        <p:sp>
+          <p:nvSpPr>
+            <p:cNvPr id="91" name="tx91"/>
+            <p:cNvSpPr/>
+            <p:nvPr/>
+          </p:nvSpPr>
+          <p:spPr>
+            <a:xfrm>
+              <a:off x="7328020" y="5716183"/>
+              <a:ext cx="124358" cy="80101"/>
+            </a:xfrm>
+            <a:prstGeom prst="rect">
+              <a:avLst/>
+            </a:prstGeom>
+            <a:noFill/>
+          </p:spPr>
+          <p:txBody>
+            <a:bodyPr lIns="0" rIns="0" tIns="0" bIns="0" anchorCtr="1" anchor="ctr" wrap="none"/>
+            <a:lstStyle/>
+            <a:p>
+              <a:pPr algn="l" marL="0" marR="0" indent="0">
+                <a:lnSpc>
+                  <a:spcPts val="880"/>
+                </a:lnSpc>
+                <a:spcBef>
+                  <a:spcPts val="0"/>
+                </a:spcBef>
+                <a:spcAft>
+                  <a:spcPts val="0"/>
+                </a:spcAft>
+              </a:pPr>
+              <a:r>
+                <a:rPr sz="880">
+                  <a:solidFill>
+                    <a:srgbClr val="4D4D4D">
+                      <a:alpha val="100000"/>
+                    </a:srgbClr>
+                  </a:solidFill>
+                  <a:latin typeface="Helvetica"/>
+                  <a:cs typeface="Helvetica"/>
+                </a:rPr>
+                <a:t>20</a:t>
+              </a:r>
+            </a:p>
+          </p:txBody>
+        </p:sp>
+        <p:sp>
+          <p:nvSpPr>
+            <p:cNvPr id="92" name="tx92"/>
+            <p:cNvSpPr/>
+            <p:nvPr/>
+          </p:nvSpPr>
+          <p:spPr>
+            <a:xfrm>
+              <a:off x="8183046" y="5716183"/>
+              <a:ext cx="124358" cy="80101"/>
+            </a:xfrm>
+            <a:prstGeom prst="rect">
+              <a:avLst/>
+            </a:prstGeom>
+            <a:noFill/>
+          </p:spPr>
+          <p:txBody>
+            <a:bodyPr lIns="0" rIns="0" tIns="0" bIns="0" anchorCtr="1" anchor="ctr" wrap="none"/>
+            <a:lstStyle/>
+            <a:p>
+              <a:pPr algn="l" marL="0" marR="0" indent="0">
+                <a:lnSpc>
+                  <a:spcPts val="880"/>
+                </a:lnSpc>
+                <a:spcBef>
+                  <a:spcPts val="0"/>
+                </a:spcBef>
+                <a:spcAft>
+                  <a:spcPts val="0"/>
+                </a:spcAft>
+              </a:pPr>
+              <a:r>
+                <a:rPr sz="880">
+                  <a:solidFill>
+                    <a:srgbClr val="4D4D4D">
+                      <a:alpha val="100000"/>
+                    </a:srgbClr>
+                  </a:solidFill>
+                  <a:latin typeface="Helvetica"/>
+                  <a:cs typeface="Helvetica"/>
+                </a:rPr>
+                <a:t>30</a:t>
+              </a:r>
+            </a:p>
+          </p:txBody>
+        </p:sp>
+        <p:sp>
+          <p:nvSpPr>
+            <p:cNvPr id="93" name="tx93"/>
+            <p:cNvSpPr/>
+            <p:nvPr/>
+          </p:nvSpPr>
+          <p:spPr>
+            <a:xfrm>
+              <a:off x="1561815" y="5855859"/>
+              <a:ext cx="6311097" cy="100218"/>
+            </a:xfrm>
+            <a:prstGeom prst="rect">
+              <a:avLst/>
+            </a:prstGeom>
+            <a:noFill/>
+          </p:spPr>
+          <p:txBody>
+            <a:bodyPr lIns="0" rIns="0" tIns="0" bIns="0" anchorCtr="1" anchor="ctr" wrap="none"/>
+            <a:lstStyle/>
+            <a:p>
+              <a:pPr algn="l" marL="0" marR="0" indent="0">
+                <a:lnSpc>
+                  <a:spcPts val="1100"/>
+                </a:lnSpc>
+                <a:spcBef>
+                  <a:spcPts val="0"/>
+                </a:spcBef>
+                <a:spcAft>
+                  <a:spcPts val="0"/>
+                </a:spcAft>
+              </a:pPr>
+              <a:r>
+                <a:rPr sz="1100">
+                  <a:solidFill>
+                    <a:srgbClr val="000000">
+                      <a:alpha val="100000"/>
+                    </a:srgbClr>
+                  </a:solidFill>
+                  <a:latin typeface="Helvetica"/>
+                  <a:cs typeface="Helvetica"/>
+                </a:rPr>
+                <a:t>Sensitivity eGFR Difference (%): 100 × (CKD-EPI 2012 CysC − CKD-EPI 2021 Cr) / CKD-EPI 2021 Cr</a:t>
+              </a:r>
+            </a:p>
+          </p:txBody>
+        </p:sp>
+        <p:sp>
+          <p:nvSpPr>
+            <p:cNvPr id="94" name="tx94"/>
+            <p:cNvSpPr/>
+            <p:nvPr/>
+          </p:nvSpPr>
+          <p:spPr>
+            <a:xfrm rot="-5400000">
+              <a:off x="138035" y="4944909"/>
+              <a:ext cx="1016904" cy="100218"/>
+            </a:xfrm>
+            <a:prstGeom prst="rect">
+              <a:avLst/>
+            </a:prstGeom>
+            <a:noFill/>
+          </p:spPr>
+          <p:txBody>
+            <a:bodyPr lIns="0" rIns="0" tIns="0" bIns="0" anchorCtr="1" anchor="ctr" wrap="none"/>
+            <a:lstStyle/>
+            <a:p>
+              <a:pPr algn="l" marL="0" marR="0" indent="0">
+                <a:lnSpc>
+                  <a:spcPts val="1100"/>
+                </a:lnSpc>
+                <a:spcBef>
+                  <a:spcPts val="0"/>
+                </a:spcBef>
+                <a:spcAft>
+                  <a:spcPts val="0"/>
+                </a:spcAft>
+              </a:pPr>
+              <a:r>
+                <a:rPr sz="1100">
+                  <a:solidFill>
+                    <a:srgbClr val="000000">
+                      <a:alpha val="100000"/>
+                    </a:srgbClr>
+                  </a:solidFill>
+                  <a:latin typeface="Helvetica"/>
+                  <a:cs typeface="Helvetica"/>
+                </a:rPr>
+                <a:t>subHR (95% CI)</a:t>
+              </a:r>
+            </a:p>
+          </p:txBody>
+        </p:sp>
+        <p:sp>
+          <p:nvSpPr>
+            <p:cNvPr id="95" name="tx95"/>
+            <p:cNvSpPr/>
+            <p:nvPr/>
+          </p:nvSpPr>
+          <p:spPr>
+            <a:xfrm>
+              <a:off x="887106" y="4159544"/>
+              <a:ext cx="6959864" cy="82021"/>
+            </a:xfrm>
+            <a:prstGeom prst="rect">
+              <a:avLst/>
+            </a:prstGeom>
+            <a:noFill/>
+          </p:spPr>
+          <p:txBody>
+            <a:bodyPr lIns="0" rIns="0" tIns="0" bIns="0" anchorCtr="1" anchor="ctr" wrap="none"/>
+            <a:lstStyle/>
+            <a:p>
+              <a:pPr algn="l" marL="0" marR="0" indent="0">
+                <a:lnSpc>
+                  <a:spcPts val="900"/>
+                </a:lnSpc>
+                <a:spcBef>
+                  <a:spcPts val="0"/>
+                </a:spcBef>
+                <a:spcAft>
+                  <a:spcPts val="0"/>
+                </a:spcAft>
+              </a:pPr>
+              <a:r>
+                <a:rPr sz="900">
+                  <a:solidFill>
+                    <a:srgbClr val="404040">
+                      <a:alpha val="100000"/>
+                    </a:srgbClr>
+                  </a:solidFill>
+                  <a:latin typeface="Helvetica"/>
+                  <a:cs typeface="Helvetica"/>
+                </a:rPr>
+                <a:t>subHR per 10 % decline: 1.17 (0.92-1.48), p_Bonf = 1.000 (n = 6)  |  per IQR decline (Δ = 28.1 %): 1.54 (0.79-3.03)  |  IQR: [-30.1, -2.1] %</a:t>
+              </a:r>
+            </a:p>
+          </p:txBody>
+        </p:sp>
+        <p:sp>
+          <p:nvSpPr>
+            <p:cNvPr id="96" name="tx96"/>
+            <p:cNvSpPr/>
+            <p:nvPr/>
+          </p:nvSpPr>
+          <p:spPr>
+            <a:xfrm>
+              <a:off x="887106" y="3932770"/>
               <a:ext cx="4579863" cy="120152"/>
             </a:xfrm>
             <a:prstGeom prst="rect">
